--- a/MDF_Investor_Teaser_Final.pptx
+++ b/MDF_Investor_Teaser_Final.pptx
@@ -7,6 +7,7 @@
   <p:sldIdLst>
     <p:sldId id="256" r:id="rId7"/>
     <p:sldId id="257" r:id="rId8"/>
+    <p:sldId id="258" r:id="rId9"/>
   </p:sldIdLst>
   <p:sldSz cx="12191695" cy="6858000" type="screen4x3"/>
   <p:notesSz cx="6858000" cy="9144000"/>
@@ -3227,7 +3228,7 @@
         <p:spPr>
           <a:xfrm>
             <a:off x="256032" y="82296"/>
-            <a:ext cx="7315200" cy="365760"/>
+            <a:ext cx="8229600" cy="365760"/>
           </a:xfrm>
           <a:prstGeom prst="rect">
             <a:avLst/>
@@ -3240,7 +3241,7 @@
           <a:p>
             <a:pPr algn="l"/>
             <a:r>
-              <a:rPr sz="2200" b="1" i="0">
+              <a:rPr sz="1600" b="1" i="0">
                 <a:solidFill>
                   <a:srgbClr val="FFFFFF"/>
                 </a:solidFill>
@@ -3259,8 +3260,8 @@
         </p:nvSpPr>
         <p:spPr>
           <a:xfrm>
-            <a:off x="256032" y="466344"/>
-            <a:ext cx="7772400" cy="237744"/>
+            <a:off x="256032" y="475488"/>
+            <a:ext cx="8686800" cy="237744"/>
           </a:xfrm>
           <a:prstGeom prst="rect">
             <a:avLst/>
@@ -3273,7 +3274,7 @@
           <a:p>
             <a:pPr algn="l"/>
             <a:r>
-              <a:rPr sz="1000" b="0" i="0">
+              <a:rPr sz="900" b="0" i="0">
                 <a:solidFill>
                   <a:srgbClr val="A8BAC5"/>
                 </a:solidFill>
@@ -3292,8 +3293,8 @@
         </p:nvSpPr>
         <p:spPr>
           <a:xfrm>
-            <a:off x="9485071" y="208026"/>
-            <a:ext cx="2450592" cy="384048"/>
+            <a:off x="9421063" y="226314"/>
+            <a:ext cx="2514600" cy="347472"/>
           </a:xfrm>
           <a:prstGeom prst="roundRect">
             <a:avLst>
@@ -3327,13 +3328,13 @@
           <a:p>
             <a:pPr algn="ctr"/>
             <a:r>
-              <a:rPr sz="1000" b="1" i="0">
+              <a:rPr sz="900" b="1" i="0">
                 <a:solidFill>
                   <a:srgbClr val="FFFFFF"/>
                 </a:solidFill>
                 <a:latin typeface="Arial"/>
               </a:rPr>
-              <a:t>Seeking $300K  ·  Convertible Note</a:t>
+              <a:t>Seeking $350K  ·  Convertible Note</a:t>
             </a:r>
           </a:p>
         </p:txBody>
@@ -3391,27 +3392,27 @@
         </p:nvSpPr>
         <p:spPr>
           <a:xfrm>
-            <a:off x="329184" y="900684"/>
-            <a:ext cx="2705023" cy="457200"/>
-          </a:xfrm>
-          <a:prstGeom prst="rect">
-            <a:avLst/>
-          </a:prstGeom>
-          <a:noFill/>
-        </p:spPr>
-        <p:txBody>
-          <a:bodyPr wrap="square" anchor="t"/>
-          <a:lstStyle/>
-          <a:p>
-            <a:pPr algn="ctr"/>
-            <a:r>
-              <a:rPr sz="2400" b="1" i="0">
+            <a:off x="310896" y="900684"/>
+            <a:ext cx="2741599" cy="457200"/>
+          </a:xfrm>
+          <a:prstGeom prst="rect">
+            <a:avLst/>
+          </a:prstGeom>
+          <a:noFill/>
+        </p:spPr>
+        <p:txBody>
+          <a:bodyPr wrap="square" anchor="t"/>
+          <a:lstStyle/>
+          <a:p>
+            <a:pPr algn="ctr"/>
+            <a:r>
+              <a:rPr sz="2000" b="1" i="0">
                 <a:solidFill>
                   <a:srgbClr val="B84C30"/>
                 </a:solidFill>
                 <a:latin typeface="Arial"/>
               </a:rPr>
-              <a:t>$300K</a:t>
+              <a:t>$350K</a:t>
             </a:r>
           </a:p>
         </p:txBody>
@@ -3424,7 +3425,7 @@
         </p:nvSpPr>
         <p:spPr>
           <a:xfrm>
-            <a:off x="310896" y="1357884"/>
+            <a:off x="310896" y="1367028"/>
             <a:ext cx="2741599" cy="256032"/>
           </a:xfrm>
           <a:prstGeom prst="rect">
@@ -3502,27 +3503,27 @@
         </p:nvSpPr>
         <p:spPr>
           <a:xfrm>
-            <a:off x="3271951" y="900684"/>
-            <a:ext cx="2705023" cy="457200"/>
-          </a:xfrm>
-          <a:prstGeom prst="rect">
-            <a:avLst/>
-          </a:prstGeom>
-          <a:noFill/>
-        </p:spPr>
-        <p:txBody>
-          <a:bodyPr wrap="square" anchor="t"/>
-          <a:lstStyle/>
-          <a:p>
-            <a:pPr algn="ctr"/>
-            <a:r>
-              <a:rPr sz="2400" b="1" i="0">
+            <a:off x="3253663" y="900684"/>
+            <a:ext cx="2741599" cy="457200"/>
+          </a:xfrm>
+          <a:prstGeom prst="rect">
+            <a:avLst/>
+          </a:prstGeom>
+          <a:noFill/>
+        </p:spPr>
+        <p:txBody>
+          <a:bodyPr wrap="square" anchor="t"/>
+          <a:lstStyle/>
+          <a:p>
+            <a:pPr algn="ctr"/>
+            <a:r>
+              <a:rPr sz="2000" b="1" i="0">
                 <a:solidFill>
                   <a:srgbClr val="B84C30"/>
                 </a:solidFill>
                 <a:latin typeface="Arial"/>
               </a:rPr>
-              <a:t>15%</a:t>
+              <a:t>5% PIK</a:t>
             </a:r>
           </a:p>
         </p:txBody>
@@ -3535,7 +3536,7 @@
         </p:nvSpPr>
         <p:spPr>
           <a:xfrm>
-            <a:off x="3253663" y="1357884"/>
+            <a:off x="3253663" y="1367028"/>
             <a:ext cx="2741599" cy="256032"/>
           </a:xfrm>
           <a:prstGeom prst="rect">
@@ -3555,7 +3556,7 @@
                 </a:solidFill>
                 <a:latin typeface="Arial"/>
               </a:rPr>
-              <a:t>PIK RATE, COMPOUNDING</a:t>
+              <a:t>ANNUAL COMPOUNDING</a:t>
             </a:r>
           </a:p>
         </p:txBody>
@@ -3613,27 +3614,27 @@
         </p:nvSpPr>
         <p:spPr>
           <a:xfrm>
-            <a:off x="6214719" y="900684"/>
-            <a:ext cx="2705023" cy="457200"/>
-          </a:xfrm>
-          <a:prstGeom prst="rect">
-            <a:avLst/>
-          </a:prstGeom>
-          <a:noFill/>
-        </p:spPr>
-        <p:txBody>
-          <a:bodyPr wrap="square" anchor="t"/>
-          <a:lstStyle/>
-          <a:p>
-            <a:pPr algn="ctr"/>
-            <a:r>
-              <a:rPr sz="2400" b="1" i="0">
+            <a:off x="6196431" y="900684"/>
+            <a:ext cx="2741599" cy="457200"/>
+          </a:xfrm>
+          <a:prstGeom prst="rect">
+            <a:avLst/>
+          </a:prstGeom>
+          <a:noFill/>
+        </p:spPr>
+        <p:txBody>
+          <a:bodyPr wrap="square" anchor="t"/>
+          <a:lstStyle/>
+          <a:p>
+            <a:pPr algn="ctr"/>
+            <a:r>
+              <a:rPr sz="2000" b="1" i="0">
                 <a:solidFill>
                   <a:srgbClr val="B84C30"/>
                 </a:solidFill>
                 <a:latin typeface="Arial"/>
               </a:rPr>
-              <a:t>3+2 YR</a:t>
+              <a:t>8.75% EQUITY</a:t>
             </a:r>
           </a:p>
         </p:txBody>
@@ -3646,7 +3647,7 @@
         </p:nvSpPr>
         <p:spPr>
           <a:xfrm>
-            <a:off x="6196431" y="1357884"/>
+            <a:off x="6196431" y="1367028"/>
             <a:ext cx="2741599" cy="256032"/>
           </a:xfrm>
           <a:prstGeom prst="rect">
@@ -3666,7 +3667,7 @@
                 </a:solidFill>
                 <a:latin typeface="Arial"/>
               </a:rPr>
-              <a:t>MATURITY + EXTENSION</a:t>
+              <a:t>AT $4M CAP</a:t>
             </a:r>
           </a:p>
         </p:txBody>
@@ -3724,27 +3725,27 @@
         </p:nvSpPr>
         <p:spPr>
           <a:xfrm>
-            <a:off x="9157487" y="900684"/>
-            <a:ext cx="2705023" cy="457200"/>
-          </a:xfrm>
-          <a:prstGeom prst="rect">
-            <a:avLst/>
-          </a:prstGeom>
-          <a:noFill/>
-        </p:spPr>
-        <p:txBody>
-          <a:bodyPr wrap="square" anchor="t"/>
-          <a:lstStyle/>
-          <a:p>
-            <a:pPr algn="ctr"/>
-            <a:r>
-              <a:rPr sz="2400" b="1" i="0">
+            <a:off x="9139199" y="900684"/>
+            <a:ext cx="2741599" cy="457200"/>
+          </a:xfrm>
+          <a:prstGeom prst="rect">
+            <a:avLst/>
+          </a:prstGeom>
+          <a:noFill/>
+        </p:spPr>
+        <p:txBody>
+          <a:bodyPr wrap="square" anchor="t"/>
+          <a:lstStyle/>
+          <a:p>
+            <a:pPr algn="ctr"/>
+            <a:r>
+              <a:rPr sz="2000" b="1" i="0">
                 <a:solidFill>
                   <a:srgbClr val="B84C30"/>
                 </a:solidFill>
                 <a:latin typeface="Arial"/>
               </a:rPr>
-              <a:t>$3.5M</a:t>
+              <a:t>4 YR</a:t>
             </a:r>
           </a:p>
         </p:txBody>
@@ -3757,7 +3758,7 @@
         </p:nvSpPr>
         <p:spPr>
           <a:xfrm>
-            <a:off x="9139199" y="1357884"/>
+            <a:off x="9139199" y="1367028"/>
             <a:ext cx="2741599" cy="256032"/>
           </a:xfrm>
           <a:prstGeom prst="rect">
@@ -3777,7 +3778,7 @@
                 </a:solidFill>
                 <a:latin typeface="Arial"/>
               </a:rPr>
-              <a:t>VALUATION CAP</a:t>
+              <a:t>SINGLE LIQUIDITY EVENT</a:t>
             </a:r>
           </a:p>
         </p:txBody>
@@ -3790,7 +3791,7 @@
         </p:nvSpPr>
         <p:spPr>
           <a:xfrm>
-            <a:off x="256032" y="1755648"/>
+            <a:off x="256032" y="1737360"/>
             <a:ext cx="5748375" cy="256032"/>
           </a:xfrm>
           <a:prstGeom prst="rect">
@@ -3804,13 +3805,13 @@
           <a:p>
             <a:pPr algn="l"/>
             <a:r>
-              <a:rPr sz="1100" b="1" i="0">
+              <a:rPr sz="1000" b="1" i="0">
                 <a:solidFill>
                   <a:srgbClr val="3D4F5C"/>
                 </a:solidFill>
                 <a:latin typeface="Arial"/>
               </a:rPr>
-              <a:t>Illustrative Returns</a:t>
+              <a:t>ILLUSTRATIVE RETURNS</a:t>
             </a:r>
           </a:p>
         </p:txBody>
@@ -3823,7 +3824,7 @@
         </p:nvSpPr>
         <p:spPr>
           <a:xfrm>
-            <a:off x="256032" y="2029968"/>
+            <a:off x="256032" y="2011680"/>
             <a:ext cx="914400" cy="31750"/>
           </a:xfrm>
           <a:prstGeom prst="rect">
@@ -3866,8 +3867,1026 @@
         </p:nvSpPr>
         <p:spPr>
           <a:xfrm>
-            <a:off x="256032" y="2121408"/>
-            <a:ext cx="5748375" cy="402336"/>
+            <a:off x="256032" y="2084832"/>
+            <a:ext cx="5748375" cy="301752"/>
+          </a:xfrm>
+          <a:prstGeom prst="rect">
+            <a:avLst/>
+          </a:prstGeom>
+          <a:solidFill>
+            <a:srgbClr val="3D4F5C"/>
+          </a:solidFill>
+          <a:ln>
+            <a:noFill/>
+          </a:ln>
+        </p:spPr>
+        <p:style>
+          <a:lnRef idx="1">
+            <a:schemeClr val="accent1"/>
+          </a:lnRef>
+          <a:fillRef idx="3">
+            <a:schemeClr val="accent1"/>
+          </a:fillRef>
+          <a:effectRef idx="2">
+            <a:schemeClr val="accent1"/>
+          </a:effectRef>
+          <a:fontRef idx="minor">
+            <a:schemeClr val="lt1"/>
+          </a:fontRef>
+        </p:style>
+        <p:txBody>
+          <a:bodyPr rtlCol="0" anchor="ctr"/>
+          <a:lstStyle/>
+          <a:p>
+            <a:pPr algn="ctr"/>
+          </a:p>
+        </p:txBody>
+      </p:sp>
+      <p:sp>
+        <p:nvSpPr>
+          <p:cNvPr id="23" name="TextBox 22"/>
+          <p:cNvSpPr txBox="1"/>
+          <p:nvPr/>
+        </p:nvSpPr>
+        <p:spPr>
+          <a:xfrm>
+            <a:off x="329184" y="2139696"/>
+            <a:ext cx="1554480" cy="246888"/>
+          </a:xfrm>
+          <a:prstGeom prst="rect">
+            <a:avLst/>
+          </a:prstGeom>
+          <a:noFill/>
+        </p:spPr>
+        <p:txBody>
+          <a:bodyPr wrap="square" anchor="t"/>
+          <a:lstStyle/>
+          <a:p>
+            <a:pPr algn="l"/>
+            <a:r>
+              <a:rPr sz="750" b="1" i="0">
+                <a:solidFill>
+                  <a:srgbClr val="FFFFFF"/>
+                </a:solidFill>
+                <a:latin typeface="Arial"/>
+              </a:rPr>
+              <a:t>Valuation at Year 4</a:t>
+            </a:r>
+          </a:p>
+        </p:txBody>
+      </p:sp>
+      <p:sp>
+        <p:nvSpPr>
+          <p:cNvPr id="24" name="TextBox 23"/>
+          <p:cNvSpPr txBox="1"/>
+          <p:nvPr/>
+        </p:nvSpPr>
+        <p:spPr>
+          <a:xfrm>
+            <a:off x="1938528" y="2139696"/>
+            <a:ext cx="713232" cy="246888"/>
+          </a:xfrm>
+          <a:prstGeom prst="rect">
+            <a:avLst/>
+          </a:prstGeom>
+          <a:noFill/>
+        </p:spPr>
+        <p:txBody>
+          <a:bodyPr wrap="square" anchor="t"/>
+          <a:lstStyle/>
+          <a:p>
+            <a:pPr algn="r"/>
+            <a:r>
+              <a:rPr sz="750" b="1" i="0">
+                <a:solidFill>
+                  <a:srgbClr val="FFFFFF"/>
+                </a:solidFill>
+                <a:latin typeface="Arial"/>
+              </a:rPr>
+              <a:t>Principal + PIK</a:t>
+            </a:r>
+          </a:p>
+        </p:txBody>
+      </p:sp>
+      <p:sp>
+        <p:nvSpPr>
+          <p:cNvPr id="25" name="TextBox 24"/>
+          <p:cNvSpPr txBox="1"/>
+          <p:nvPr/>
+        </p:nvSpPr>
+        <p:spPr>
+          <a:xfrm>
+            <a:off x="2743200" y="2139696"/>
+            <a:ext cx="685800" cy="246888"/>
+          </a:xfrm>
+          <a:prstGeom prst="rect">
+            <a:avLst/>
+          </a:prstGeom>
+          <a:noFill/>
+        </p:spPr>
+        <p:txBody>
+          <a:bodyPr wrap="square" anchor="t"/>
+          <a:lstStyle/>
+          <a:p>
+            <a:pPr algn="r"/>
+            <a:r>
+              <a:rPr sz="750" b="1" i="0">
+                <a:solidFill>
+                  <a:srgbClr val="FFFFFF"/>
+                </a:solidFill>
+                <a:latin typeface="Arial"/>
+              </a:rPr>
+              <a:t>Equity Value</a:t>
+            </a:r>
+          </a:p>
+        </p:txBody>
+      </p:sp>
+      <p:sp>
+        <p:nvSpPr>
+          <p:cNvPr id="26" name="TextBox 25"/>
+          <p:cNvSpPr txBox="1"/>
+          <p:nvPr/>
+        </p:nvSpPr>
+        <p:spPr>
+          <a:xfrm>
+            <a:off x="3520440" y="2139696"/>
+            <a:ext cx="713232" cy="246888"/>
+          </a:xfrm>
+          <a:prstGeom prst="rect">
+            <a:avLst/>
+          </a:prstGeom>
+          <a:noFill/>
+        </p:spPr>
+        <p:txBody>
+          <a:bodyPr wrap="square" anchor="t"/>
+          <a:lstStyle/>
+          <a:p>
+            <a:pPr algn="r"/>
+            <a:r>
+              <a:rPr sz="750" b="1" i="0">
+                <a:solidFill>
+                  <a:srgbClr val="FFFFFF"/>
+                </a:solidFill>
+                <a:latin typeface="Arial"/>
+              </a:rPr>
+              <a:t>Total Payout</a:t>
+            </a:r>
+          </a:p>
+        </p:txBody>
+      </p:sp>
+      <p:sp>
+        <p:nvSpPr>
+          <p:cNvPr id="27" name="TextBox 26"/>
+          <p:cNvSpPr txBox="1"/>
+          <p:nvPr/>
+        </p:nvSpPr>
+        <p:spPr>
+          <a:xfrm>
+            <a:off x="4325112" y="2139696"/>
+            <a:ext cx="521208" cy="246888"/>
+          </a:xfrm>
+          <a:prstGeom prst="rect">
+            <a:avLst/>
+          </a:prstGeom>
+          <a:noFill/>
+        </p:spPr>
+        <p:txBody>
+          <a:bodyPr wrap="square" anchor="t"/>
+          <a:lstStyle/>
+          <a:p>
+            <a:pPr algn="r"/>
+            <a:r>
+              <a:rPr sz="750" b="1" i="0">
+                <a:solidFill>
+                  <a:srgbClr val="FFFFFF"/>
+                </a:solidFill>
+                <a:latin typeface="Arial"/>
+              </a:rPr>
+              <a:t>MOIC</a:t>
+            </a:r>
+          </a:p>
+        </p:txBody>
+      </p:sp>
+      <p:sp>
+        <p:nvSpPr>
+          <p:cNvPr id="28" name="TextBox 27"/>
+          <p:cNvSpPr txBox="1"/>
+          <p:nvPr/>
+        </p:nvSpPr>
+        <p:spPr>
+          <a:xfrm>
+            <a:off x="4937760" y="2139696"/>
+            <a:ext cx="1012240" cy="246888"/>
+          </a:xfrm>
+          <a:prstGeom prst="rect">
+            <a:avLst/>
+          </a:prstGeom>
+          <a:noFill/>
+        </p:spPr>
+        <p:txBody>
+          <a:bodyPr wrap="square" anchor="t"/>
+          <a:lstStyle/>
+          <a:p>
+            <a:pPr algn="r"/>
+            <a:r>
+              <a:rPr sz="750" b="1" i="0">
+                <a:solidFill>
+                  <a:srgbClr val="FFFFFF"/>
+                </a:solidFill>
+                <a:latin typeface="Arial"/>
+              </a:rPr>
+              <a:t>4-yr IRR</a:t>
+            </a:r>
+          </a:p>
+        </p:txBody>
+      </p:sp>
+      <p:sp>
+        <p:nvSpPr>
+          <p:cNvPr id="29" name="Rectangle 28"/>
+          <p:cNvSpPr/>
+          <p:nvPr/>
+        </p:nvSpPr>
+        <p:spPr>
+          <a:xfrm>
+            <a:off x="256032" y="2386584"/>
+            <a:ext cx="5748375" cy="283464"/>
+          </a:xfrm>
+          <a:prstGeom prst="rect">
+            <a:avLst/>
+          </a:prstGeom>
+          <a:solidFill>
+            <a:srgbClr val="F3F3F3"/>
+          </a:solidFill>
+          <a:ln>
+            <a:noFill/>
+          </a:ln>
+        </p:spPr>
+        <p:style>
+          <a:lnRef idx="1">
+            <a:schemeClr val="accent1"/>
+          </a:lnRef>
+          <a:fillRef idx="3">
+            <a:schemeClr val="accent1"/>
+          </a:fillRef>
+          <a:effectRef idx="2">
+            <a:schemeClr val="accent1"/>
+          </a:effectRef>
+          <a:fontRef idx="minor">
+            <a:schemeClr val="lt1"/>
+          </a:fontRef>
+        </p:style>
+        <p:txBody>
+          <a:bodyPr rtlCol="0" anchor="ctr"/>
+          <a:lstStyle/>
+          <a:p>
+            <a:pPr algn="ctr"/>
+          </a:p>
+        </p:txBody>
+      </p:sp>
+      <p:sp>
+        <p:nvSpPr>
+          <p:cNvPr id="30" name="TextBox 29"/>
+          <p:cNvSpPr txBox="1"/>
+          <p:nvPr/>
+        </p:nvSpPr>
+        <p:spPr>
+          <a:xfrm>
+            <a:off x="329184" y="2432304"/>
+            <a:ext cx="475488" cy="228600"/>
+          </a:xfrm>
+          <a:prstGeom prst="rect">
+            <a:avLst/>
+          </a:prstGeom>
+          <a:noFill/>
+        </p:spPr>
+        <p:txBody>
+          <a:bodyPr wrap="square" anchor="t"/>
+          <a:lstStyle/>
+          <a:p>
+            <a:pPr algn="l"/>
+            <a:r>
+              <a:rPr sz="900" b="0" i="0">
+                <a:solidFill>
+                  <a:srgbClr val="1E1E1E"/>
+                </a:solidFill>
+                <a:latin typeface="Arial"/>
+              </a:rPr>
+              <a:t>$2.5M</a:t>
+            </a:r>
+          </a:p>
+        </p:txBody>
+      </p:sp>
+      <p:sp>
+        <p:nvSpPr>
+          <p:cNvPr id="31" name="Rounded Rectangle 30"/>
+          <p:cNvSpPr/>
+          <p:nvPr/>
+        </p:nvSpPr>
+        <p:spPr>
+          <a:xfrm>
+            <a:off x="832104" y="2450592"/>
+            <a:ext cx="502920" cy="155448"/>
+          </a:xfrm>
+          <a:prstGeom prst="roundRect">
+            <a:avLst>
+              <a:gd name="adj" fmla="val 35000"/>
+            </a:avLst>
+          </a:prstGeom>
+          <a:solidFill>
+            <a:srgbClr val="949EA8"/>
+          </a:solidFill>
+          <a:ln>
+            <a:noFill/>
+          </a:ln>
+        </p:spPr>
+        <p:style>
+          <a:lnRef idx="1">
+            <a:schemeClr val="accent1"/>
+          </a:lnRef>
+          <a:fillRef idx="3">
+            <a:schemeClr val="accent1"/>
+          </a:fillRef>
+          <a:effectRef idx="2">
+            <a:schemeClr val="accent1"/>
+          </a:effectRef>
+          <a:fontRef idx="minor">
+            <a:schemeClr val="lt1"/>
+          </a:fontRef>
+        </p:style>
+        <p:txBody>
+          <a:bodyPr rtlCol="0" anchor="ctr" wrap="square"/>
+          <a:lstStyle/>
+          <a:p>
+            <a:pPr algn="ctr"/>
+            <a:r>
+              <a:rPr sz="650" b="1" i="0">
+                <a:solidFill>
+                  <a:srgbClr val="FFFFFF"/>
+                </a:solidFill>
+                <a:latin typeface="Arial"/>
+              </a:rPr>
+              <a:t>downside</a:t>
+            </a:r>
+          </a:p>
+        </p:txBody>
+      </p:sp>
+      <p:sp>
+        <p:nvSpPr>
+          <p:cNvPr id="32" name="TextBox 31"/>
+          <p:cNvSpPr txBox="1"/>
+          <p:nvPr/>
+        </p:nvSpPr>
+        <p:spPr>
+          <a:xfrm>
+            <a:off x="1938528" y="2432304"/>
+            <a:ext cx="731520" cy="228600"/>
+          </a:xfrm>
+          <a:prstGeom prst="rect">
+            <a:avLst/>
+          </a:prstGeom>
+          <a:noFill/>
+        </p:spPr>
+        <p:txBody>
+          <a:bodyPr wrap="square" anchor="t"/>
+          <a:lstStyle/>
+          <a:p>
+            <a:pPr algn="r"/>
+            <a:r>
+              <a:rPr sz="900" b="0" i="0">
+                <a:solidFill>
+                  <a:srgbClr val="1E1E1E"/>
+                </a:solidFill>
+                <a:latin typeface="Arial"/>
+              </a:rPr>
+              <a:t>$447K</a:t>
+            </a:r>
+          </a:p>
+        </p:txBody>
+      </p:sp>
+      <p:sp>
+        <p:nvSpPr>
+          <p:cNvPr id="33" name="TextBox 32"/>
+          <p:cNvSpPr txBox="1"/>
+          <p:nvPr/>
+        </p:nvSpPr>
+        <p:spPr>
+          <a:xfrm>
+            <a:off x="2743200" y="2432304"/>
+            <a:ext cx="704088" cy="228600"/>
+          </a:xfrm>
+          <a:prstGeom prst="rect">
+            <a:avLst/>
+          </a:prstGeom>
+          <a:noFill/>
+        </p:spPr>
+        <p:txBody>
+          <a:bodyPr wrap="square" anchor="t"/>
+          <a:lstStyle/>
+          <a:p>
+            <a:pPr algn="r"/>
+            <a:r>
+              <a:rPr sz="900" b="0" i="0">
+                <a:solidFill>
+                  <a:srgbClr val="1E1E1E"/>
+                </a:solidFill>
+                <a:latin typeface="Arial"/>
+              </a:rPr>
+              <a:t>$219K</a:t>
+            </a:r>
+          </a:p>
+        </p:txBody>
+      </p:sp>
+      <p:sp>
+        <p:nvSpPr>
+          <p:cNvPr id="34" name="TextBox 33"/>
+          <p:cNvSpPr txBox="1"/>
+          <p:nvPr/>
+        </p:nvSpPr>
+        <p:spPr>
+          <a:xfrm>
+            <a:off x="3520440" y="2432304"/>
+            <a:ext cx="731520" cy="228600"/>
+          </a:xfrm>
+          <a:prstGeom prst="rect">
+            <a:avLst/>
+          </a:prstGeom>
+          <a:noFill/>
+        </p:spPr>
+        <p:txBody>
+          <a:bodyPr wrap="square" anchor="t"/>
+          <a:lstStyle/>
+          <a:p>
+            <a:pPr algn="r"/>
+            <a:r>
+              <a:rPr sz="900" b="0" i="0">
+                <a:solidFill>
+                  <a:srgbClr val="1E1E1E"/>
+                </a:solidFill>
+                <a:latin typeface="Arial"/>
+              </a:rPr>
+              <a:t>$666K</a:t>
+            </a:r>
+          </a:p>
+        </p:txBody>
+      </p:sp>
+      <p:sp>
+        <p:nvSpPr>
+          <p:cNvPr id="35" name="TextBox 34"/>
+          <p:cNvSpPr txBox="1"/>
+          <p:nvPr/>
+        </p:nvSpPr>
+        <p:spPr>
+          <a:xfrm>
+            <a:off x="4325112" y="2432304"/>
+            <a:ext cx="539496" cy="228600"/>
+          </a:xfrm>
+          <a:prstGeom prst="rect">
+            <a:avLst/>
+          </a:prstGeom>
+          <a:noFill/>
+        </p:spPr>
+        <p:txBody>
+          <a:bodyPr wrap="square" anchor="t"/>
+          <a:lstStyle/>
+          <a:p>
+            <a:pPr algn="r"/>
+            <a:r>
+              <a:rPr sz="900" b="0" i="0">
+                <a:solidFill>
+                  <a:srgbClr val="1E1E1E"/>
+                </a:solidFill>
+                <a:latin typeface="Arial"/>
+              </a:rPr>
+              <a:t>1.90x</a:t>
+            </a:r>
+          </a:p>
+        </p:txBody>
+      </p:sp>
+      <p:sp>
+        <p:nvSpPr>
+          <p:cNvPr id="36" name="TextBox 35"/>
+          <p:cNvSpPr txBox="1"/>
+          <p:nvPr/>
+        </p:nvSpPr>
+        <p:spPr>
+          <a:xfrm>
+            <a:off x="4937760" y="2432304"/>
+            <a:ext cx="1030528" cy="228600"/>
+          </a:xfrm>
+          <a:prstGeom prst="rect">
+            <a:avLst/>
+          </a:prstGeom>
+          <a:noFill/>
+        </p:spPr>
+        <p:txBody>
+          <a:bodyPr wrap="square" anchor="t"/>
+          <a:lstStyle/>
+          <a:p>
+            <a:pPr algn="r"/>
+            <a:r>
+              <a:rPr sz="900" b="0" i="0">
+                <a:solidFill>
+                  <a:srgbClr val="1E1E1E"/>
+                </a:solidFill>
+                <a:latin typeface="Arial"/>
+              </a:rPr>
+              <a:t>17.4%</a:t>
+            </a:r>
+          </a:p>
+        </p:txBody>
+      </p:sp>
+      <p:sp>
+        <p:nvSpPr>
+          <p:cNvPr id="37" name="Rectangle 36"/>
+          <p:cNvSpPr/>
+          <p:nvPr/>
+        </p:nvSpPr>
+        <p:spPr>
+          <a:xfrm>
+            <a:off x="256032" y="2670048"/>
+            <a:ext cx="5748375" cy="283464"/>
+          </a:xfrm>
+          <a:prstGeom prst="rect">
+            <a:avLst/>
+          </a:prstGeom>
+          <a:solidFill>
+            <a:srgbClr val="FFFFFF"/>
+          </a:solidFill>
+          <a:ln>
+            <a:noFill/>
+          </a:ln>
+        </p:spPr>
+        <p:style>
+          <a:lnRef idx="1">
+            <a:schemeClr val="accent1"/>
+          </a:lnRef>
+          <a:fillRef idx="3">
+            <a:schemeClr val="accent1"/>
+          </a:fillRef>
+          <a:effectRef idx="2">
+            <a:schemeClr val="accent1"/>
+          </a:effectRef>
+          <a:fontRef idx="minor">
+            <a:schemeClr val="lt1"/>
+          </a:fontRef>
+        </p:style>
+        <p:txBody>
+          <a:bodyPr rtlCol="0" anchor="ctr"/>
+          <a:lstStyle/>
+          <a:p>
+            <a:pPr algn="ctr"/>
+          </a:p>
+        </p:txBody>
+      </p:sp>
+      <p:sp>
+        <p:nvSpPr>
+          <p:cNvPr id="38" name="TextBox 37"/>
+          <p:cNvSpPr txBox="1"/>
+          <p:nvPr/>
+        </p:nvSpPr>
+        <p:spPr>
+          <a:xfrm>
+            <a:off x="329184" y="2715768"/>
+            <a:ext cx="475488" cy="228600"/>
+          </a:xfrm>
+          <a:prstGeom prst="rect">
+            <a:avLst/>
+          </a:prstGeom>
+          <a:noFill/>
+        </p:spPr>
+        <p:txBody>
+          <a:bodyPr wrap="square" anchor="t"/>
+          <a:lstStyle/>
+          <a:p>
+            <a:pPr algn="l"/>
+            <a:r>
+              <a:rPr sz="900" b="0" i="0">
+                <a:solidFill>
+                  <a:srgbClr val="1E1E1E"/>
+                </a:solidFill>
+                <a:latin typeface="Arial"/>
+              </a:rPr>
+              <a:t>$3.0M</a:t>
+            </a:r>
+          </a:p>
+        </p:txBody>
+      </p:sp>
+      <p:sp>
+        <p:nvSpPr>
+          <p:cNvPr id="39" name="TextBox 38"/>
+          <p:cNvSpPr txBox="1"/>
+          <p:nvPr/>
+        </p:nvSpPr>
+        <p:spPr>
+          <a:xfrm>
+            <a:off x="1938528" y="2715768"/>
+            <a:ext cx="731520" cy="228600"/>
+          </a:xfrm>
+          <a:prstGeom prst="rect">
+            <a:avLst/>
+          </a:prstGeom>
+          <a:noFill/>
+        </p:spPr>
+        <p:txBody>
+          <a:bodyPr wrap="square" anchor="t"/>
+          <a:lstStyle/>
+          <a:p>
+            <a:pPr algn="r"/>
+            <a:r>
+              <a:rPr sz="900" b="0" i="0">
+                <a:solidFill>
+                  <a:srgbClr val="1E1E1E"/>
+                </a:solidFill>
+                <a:latin typeface="Arial"/>
+              </a:rPr>
+              <a:t>$447K</a:t>
+            </a:r>
+          </a:p>
+        </p:txBody>
+      </p:sp>
+      <p:sp>
+        <p:nvSpPr>
+          <p:cNvPr id="40" name="TextBox 39"/>
+          <p:cNvSpPr txBox="1"/>
+          <p:nvPr/>
+        </p:nvSpPr>
+        <p:spPr>
+          <a:xfrm>
+            <a:off x="2743200" y="2715768"/>
+            <a:ext cx="704088" cy="228600"/>
+          </a:xfrm>
+          <a:prstGeom prst="rect">
+            <a:avLst/>
+          </a:prstGeom>
+          <a:noFill/>
+        </p:spPr>
+        <p:txBody>
+          <a:bodyPr wrap="square" anchor="t"/>
+          <a:lstStyle/>
+          <a:p>
+            <a:pPr algn="r"/>
+            <a:r>
+              <a:rPr sz="900" b="0" i="0">
+                <a:solidFill>
+                  <a:srgbClr val="1E1E1E"/>
+                </a:solidFill>
+                <a:latin typeface="Arial"/>
+              </a:rPr>
+              <a:t>$263K</a:t>
+            </a:r>
+          </a:p>
+        </p:txBody>
+      </p:sp>
+      <p:sp>
+        <p:nvSpPr>
+          <p:cNvPr id="41" name="TextBox 40"/>
+          <p:cNvSpPr txBox="1"/>
+          <p:nvPr/>
+        </p:nvSpPr>
+        <p:spPr>
+          <a:xfrm>
+            <a:off x="3520440" y="2715768"/>
+            <a:ext cx="731520" cy="228600"/>
+          </a:xfrm>
+          <a:prstGeom prst="rect">
+            <a:avLst/>
+          </a:prstGeom>
+          <a:noFill/>
+        </p:spPr>
+        <p:txBody>
+          <a:bodyPr wrap="square" anchor="t"/>
+          <a:lstStyle/>
+          <a:p>
+            <a:pPr algn="r"/>
+            <a:r>
+              <a:rPr sz="900" b="0" i="0">
+                <a:solidFill>
+                  <a:srgbClr val="1E1E1E"/>
+                </a:solidFill>
+                <a:latin typeface="Arial"/>
+              </a:rPr>
+              <a:t>$710K</a:t>
+            </a:r>
+          </a:p>
+        </p:txBody>
+      </p:sp>
+      <p:sp>
+        <p:nvSpPr>
+          <p:cNvPr id="42" name="TextBox 41"/>
+          <p:cNvSpPr txBox="1"/>
+          <p:nvPr/>
+        </p:nvSpPr>
+        <p:spPr>
+          <a:xfrm>
+            <a:off x="4325112" y="2715768"/>
+            <a:ext cx="539496" cy="228600"/>
+          </a:xfrm>
+          <a:prstGeom prst="rect">
+            <a:avLst/>
+          </a:prstGeom>
+          <a:noFill/>
+        </p:spPr>
+        <p:txBody>
+          <a:bodyPr wrap="square" anchor="t"/>
+          <a:lstStyle/>
+          <a:p>
+            <a:pPr algn="r"/>
+            <a:r>
+              <a:rPr sz="900" b="0" i="0">
+                <a:solidFill>
+                  <a:srgbClr val="1E1E1E"/>
+                </a:solidFill>
+                <a:latin typeface="Arial"/>
+              </a:rPr>
+              <a:t>2.03x</a:t>
+            </a:r>
+          </a:p>
+        </p:txBody>
+      </p:sp>
+      <p:sp>
+        <p:nvSpPr>
+          <p:cNvPr id="43" name="TextBox 42"/>
+          <p:cNvSpPr txBox="1"/>
+          <p:nvPr/>
+        </p:nvSpPr>
+        <p:spPr>
+          <a:xfrm>
+            <a:off x="4937760" y="2715768"/>
+            <a:ext cx="1030528" cy="228600"/>
+          </a:xfrm>
+          <a:prstGeom prst="rect">
+            <a:avLst/>
+          </a:prstGeom>
+          <a:noFill/>
+        </p:spPr>
+        <p:txBody>
+          <a:bodyPr wrap="square" anchor="t"/>
+          <a:lstStyle/>
+          <a:p>
+            <a:pPr algn="r"/>
+            <a:r>
+              <a:rPr sz="900" b="0" i="0">
+                <a:solidFill>
+                  <a:srgbClr val="1E1E1E"/>
+                </a:solidFill>
+                <a:latin typeface="Arial"/>
+              </a:rPr>
+              <a:t>19.4%</a:t>
+            </a:r>
+          </a:p>
+        </p:txBody>
+      </p:sp>
+      <p:sp>
+        <p:nvSpPr>
+          <p:cNvPr id="44" name="Rectangle 43"/>
+          <p:cNvSpPr/>
+          <p:nvPr/>
+        </p:nvSpPr>
+        <p:spPr>
+          <a:xfrm>
+            <a:off x="256032" y="2953512"/>
+            <a:ext cx="5748375" cy="283464"/>
+          </a:xfrm>
+          <a:prstGeom prst="rect">
+            <a:avLst/>
+          </a:prstGeom>
+          <a:solidFill>
+            <a:srgbClr val="F3F3F3"/>
+          </a:solidFill>
+          <a:ln>
+            <a:noFill/>
+          </a:ln>
+        </p:spPr>
+        <p:style>
+          <a:lnRef idx="1">
+            <a:schemeClr val="accent1"/>
+          </a:lnRef>
+          <a:fillRef idx="3">
+            <a:schemeClr val="accent1"/>
+          </a:fillRef>
+          <a:effectRef idx="2">
+            <a:schemeClr val="accent1"/>
+          </a:effectRef>
+          <a:fontRef idx="minor">
+            <a:schemeClr val="lt1"/>
+          </a:fontRef>
+        </p:style>
+        <p:txBody>
+          <a:bodyPr rtlCol="0" anchor="ctr"/>
+          <a:lstStyle/>
+          <a:p>
+            <a:pPr algn="ctr"/>
+          </a:p>
+        </p:txBody>
+      </p:sp>
+      <p:sp>
+        <p:nvSpPr>
+          <p:cNvPr id="45" name="TextBox 44"/>
+          <p:cNvSpPr txBox="1"/>
+          <p:nvPr/>
+        </p:nvSpPr>
+        <p:spPr>
+          <a:xfrm>
+            <a:off x="329184" y="2999232"/>
+            <a:ext cx="475488" cy="228600"/>
+          </a:xfrm>
+          <a:prstGeom prst="rect">
+            <a:avLst/>
+          </a:prstGeom>
+          <a:noFill/>
+        </p:spPr>
+        <p:txBody>
+          <a:bodyPr wrap="square" anchor="t"/>
+          <a:lstStyle/>
+          <a:p>
+            <a:pPr algn="l"/>
+            <a:r>
+              <a:rPr sz="900" b="0" i="0">
+                <a:solidFill>
+                  <a:srgbClr val="1E1E1E"/>
+                </a:solidFill>
+                <a:latin typeface="Arial"/>
+              </a:rPr>
+              <a:t>$3.5M</a:t>
+            </a:r>
+          </a:p>
+        </p:txBody>
+      </p:sp>
+      <p:sp>
+        <p:nvSpPr>
+          <p:cNvPr id="46" name="TextBox 45"/>
+          <p:cNvSpPr txBox="1"/>
+          <p:nvPr/>
+        </p:nvSpPr>
+        <p:spPr>
+          <a:xfrm>
+            <a:off x="1938528" y="2999232"/>
+            <a:ext cx="731520" cy="228600"/>
+          </a:xfrm>
+          <a:prstGeom prst="rect">
+            <a:avLst/>
+          </a:prstGeom>
+          <a:noFill/>
+        </p:spPr>
+        <p:txBody>
+          <a:bodyPr wrap="square" anchor="t"/>
+          <a:lstStyle/>
+          <a:p>
+            <a:pPr algn="r"/>
+            <a:r>
+              <a:rPr sz="900" b="0" i="0">
+                <a:solidFill>
+                  <a:srgbClr val="1E1E1E"/>
+                </a:solidFill>
+                <a:latin typeface="Arial"/>
+              </a:rPr>
+              <a:t>$447K</a:t>
+            </a:r>
+          </a:p>
+        </p:txBody>
+      </p:sp>
+      <p:sp>
+        <p:nvSpPr>
+          <p:cNvPr id="47" name="TextBox 46"/>
+          <p:cNvSpPr txBox="1"/>
+          <p:nvPr/>
+        </p:nvSpPr>
+        <p:spPr>
+          <a:xfrm>
+            <a:off x="2743200" y="2999232"/>
+            <a:ext cx="704088" cy="228600"/>
+          </a:xfrm>
+          <a:prstGeom prst="rect">
+            <a:avLst/>
+          </a:prstGeom>
+          <a:noFill/>
+        </p:spPr>
+        <p:txBody>
+          <a:bodyPr wrap="square" anchor="t"/>
+          <a:lstStyle/>
+          <a:p>
+            <a:pPr algn="r"/>
+            <a:r>
+              <a:rPr sz="900" b="0" i="0">
+                <a:solidFill>
+                  <a:srgbClr val="1E1E1E"/>
+                </a:solidFill>
+                <a:latin typeface="Arial"/>
+              </a:rPr>
+              <a:t>$306K</a:t>
+            </a:r>
+          </a:p>
+        </p:txBody>
+      </p:sp>
+      <p:sp>
+        <p:nvSpPr>
+          <p:cNvPr id="48" name="TextBox 47"/>
+          <p:cNvSpPr txBox="1"/>
+          <p:nvPr/>
+        </p:nvSpPr>
+        <p:spPr>
+          <a:xfrm>
+            <a:off x="3520440" y="2999232"/>
+            <a:ext cx="731520" cy="228600"/>
+          </a:xfrm>
+          <a:prstGeom prst="rect">
+            <a:avLst/>
+          </a:prstGeom>
+          <a:noFill/>
+        </p:spPr>
+        <p:txBody>
+          <a:bodyPr wrap="square" anchor="t"/>
+          <a:lstStyle/>
+          <a:p>
+            <a:pPr algn="r"/>
+            <a:r>
+              <a:rPr sz="900" b="0" i="0">
+                <a:solidFill>
+                  <a:srgbClr val="1E1E1E"/>
+                </a:solidFill>
+                <a:latin typeface="Arial"/>
+              </a:rPr>
+              <a:t>$753K</a:t>
+            </a:r>
+          </a:p>
+        </p:txBody>
+      </p:sp>
+      <p:sp>
+        <p:nvSpPr>
+          <p:cNvPr id="49" name="TextBox 48"/>
+          <p:cNvSpPr txBox="1"/>
+          <p:nvPr/>
+        </p:nvSpPr>
+        <p:spPr>
+          <a:xfrm>
+            <a:off x="4325112" y="2999232"/>
+            <a:ext cx="539496" cy="228600"/>
+          </a:xfrm>
+          <a:prstGeom prst="rect">
+            <a:avLst/>
+          </a:prstGeom>
+          <a:noFill/>
+        </p:spPr>
+        <p:txBody>
+          <a:bodyPr wrap="square" anchor="t"/>
+          <a:lstStyle/>
+          <a:p>
+            <a:pPr algn="r"/>
+            <a:r>
+              <a:rPr sz="900" b="0" i="0">
+                <a:solidFill>
+                  <a:srgbClr val="1E1E1E"/>
+                </a:solidFill>
+                <a:latin typeface="Arial"/>
+              </a:rPr>
+              <a:t>2.15x</a:t>
+            </a:r>
+          </a:p>
+        </p:txBody>
+      </p:sp>
+      <p:sp>
+        <p:nvSpPr>
+          <p:cNvPr id="50" name="TextBox 49"/>
+          <p:cNvSpPr txBox="1"/>
+          <p:nvPr/>
+        </p:nvSpPr>
+        <p:spPr>
+          <a:xfrm>
+            <a:off x="4937760" y="2999232"/>
+            <a:ext cx="1030528" cy="228600"/>
+          </a:xfrm>
+          <a:prstGeom prst="rect">
+            <a:avLst/>
+          </a:prstGeom>
+          <a:noFill/>
+        </p:spPr>
+        <p:txBody>
+          <a:bodyPr wrap="square" anchor="t"/>
+          <a:lstStyle/>
+          <a:p>
+            <a:pPr algn="r"/>
+            <a:r>
+              <a:rPr sz="900" b="0" i="0">
+                <a:solidFill>
+                  <a:srgbClr val="1E1E1E"/>
+                </a:solidFill>
+                <a:latin typeface="Arial"/>
+              </a:rPr>
+              <a:t>21.1%</a:t>
+            </a:r>
+          </a:p>
+        </p:txBody>
+      </p:sp>
+      <p:sp>
+        <p:nvSpPr>
+          <p:cNvPr id="51" name="Rectangle 50"/>
+          <p:cNvSpPr/>
+          <p:nvPr/>
+        </p:nvSpPr>
+        <p:spPr>
+          <a:xfrm>
+            <a:off x="256032" y="3236976"/>
+            <a:ext cx="5748375" cy="283464"/>
           </a:xfrm>
           <a:prstGeom prst="rect">
             <a:avLst/>
@@ -3903,14 +4922,14 @@
       </p:sp>
       <p:sp>
         <p:nvSpPr>
-          <p:cNvPr id="23" name="TextBox 22"/>
-          <p:cNvSpPr txBox="1"/>
-          <p:nvPr/>
-        </p:nvSpPr>
-        <p:spPr>
-          <a:xfrm>
-            <a:off x="384048" y="2203704"/>
-            <a:ext cx="1463040" cy="256032"/>
+          <p:cNvPr id="52" name="TextBox 51"/>
+          <p:cNvSpPr txBox="1"/>
+          <p:nvPr/>
+        </p:nvSpPr>
+        <p:spPr>
+          <a:xfrm>
+            <a:off x="329184" y="3282696"/>
+            <a:ext cx="475488" cy="228600"/>
           </a:xfrm>
           <a:prstGeom prst="rect">
             <a:avLst/>
@@ -3923,27 +4942,81 @@
           <a:p>
             <a:pPr algn="l"/>
             <a:r>
-              <a:rPr sz="1000" b="1" i="0">
+              <a:rPr sz="900" b="1" i="0">
                 <a:solidFill>
                   <a:srgbClr val="B84C30"/>
                 </a:solidFill>
                 <a:latin typeface="Arial"/>
               </a:rPr>
-              <a:t>Year 3 exit</a:t>
-            </a:r>
-          </a:p>
-        </p:txBody>
-      </p:sp>
-      <p:sp>
-        <p:nvSpPr>
-          <p:cNvPr id="24" name="TextBox 23"/>
-          <p:cNvSpPr txBox="1"/>
-          <p:nvPr/>
-        </p:nvSpPr>
-        <p:spPr>
-          <a:xfrm>
-            <a:off x="3032607" y="2203704"/>
-            <a:ext cx="2834640" cy="256032"/>
+              <a:t>$4.0M</a:t>
+            </a:r>
+          </a:p>
+        </p:txBody>
+      </p:sp>
+      <p:sp>
+        <p:nvSpPr>
+          <p:cNvPr id="53" name="Rounded Rectangle 52"/>
+          <p:cNvSpPr/>
+          <p:nvPr/>
+        </p:nvSpPr>
+        <p:spPr>
+          <a:xfrm>
+            <a:off x="832104" y="3300984"/>
+            <a:ext cx="502920" cy="155448"/>
+          </a:xfrm>
+          <a:prstGeom prst="roundRect">
+            <a:avLst>
+              <a:gd name="adj" fmla="val 35000"/>
+            </a:avLst>
+          </a:prstGeom>
+          <a:solidFill>
+            <a:srgbClr val="B84C30"/>
+          </a:solidFill>
+          <a:ln>
+            <a:noFill/>
+          </a:ln>
+        </p:spPr>
+        <p:style>
+          <a:lnRef idx="1">
+            <a:schemeClr val="accent1"/>
+          </a:lnRef>
+          <a:fillRef idx="3">
+            <a:schemeClr val="accent1"/>
+          </a:fillRef>
+          <a:effectRef idx="2">
+            <a:schemeClr val="accent1"/>
+          </a:effectRef>
+          <a:fontRef idx="minor">
+            <a:schemeClr val="lt1"/>
+          </a:fontRef>
+        </p:style>
+        <p:txBody>
+          <a:bodyPr rtlCol="0" anchor="ctr" wrap="square"/>
+          <a:lstStyle/>
+          <a:p>
+            <a:pPr algn="ctr"/>
+            <a:r>
+              <a:rPr sz="650" b="1" i="0">
+                <a:solidFill>
+                  <a:srgbClr val="FFFFFF"/>
+                </a:solidFill>
+                <a:latin typeface="Arial"/>
+              </a:rPr>
+              <a:t>cap</a:t>
+            </a:r>
+          </a:p>
+        </p:txBody>
+      </p:sp>
+      <p:sp>
+        <p:nvSpPr>
+          <p:cNvPr id="54" name="TextBox 53"/>
+          <p:cNvSpPr txBox="1"/>
+          <p:nvPr/>
+        </p:nvSpPr>
+        <p:spPr>
+          <a:xfrm>
+            <a:off x="1938528" y="3282696"/>
+            <a:ext cx="731520" cy="228600"/>
           </a:xfrm>
           <a:prstGeom prst="rect">
             <a:avLst/>
@@ -3956,27 +5029,400 @@
           <a:p>
             <a:pPr algn="r"/>
             <a:r>
-              <a:rPr sz="1000" b="1" i="0">
+              <a:rPr sz="900" b="1" i="0">
                 <a:solidFill>
                   <a:srgbClr val="B84C30"/>
                 </a:solidFill>
                 <a:latin typeface="Arial"/>
               </a:rPr>
-              <a:t>~$735K returned  ·  ~2.5x MOIC</a:t>
-            </a:r>
-          </a:p>
-        </p:txBody>
-      </p:sp>
-      <p:sp>
-        <p:nvSpPr>
-          <p:cNvPr id="25" name="Rectangle 24"/>
+              <a:t>$447K</a:t>
+            </a:r>
+          </a:p>
+        </p:txBody>
+      </p:sp>
+      <p:sp>
+        <p:nvSpPr>
+          <p:cNvPr id="55" name="TextBox 54"/>
+          <p:cNvSpPr txBox="1"/>
+          <p:nvPr/>
+        </p:nvSpPr>
+        <p:spPr>
+          <a:xfrm>
+            <a:off x="2743200" y="3282696"/>
+            <a:ext cx="704088" cy="228600"/>
+          </a:xfrm>
+          <a:prstGeom prst="rect">
+            <a:avLst/>
+          </a:prstGeom>
+          <a:noFill/>
+        </p:spPr>
+        <p:txBody>
+          <a:bodyPr wrap="square" anchor="t"/>
+          <a:lstStyle/>
+          <a:p>
+            <a:pPr algn="r"/>
+            <a:r>
+              <a:rPr sz="900" b="1" i="0">
+                <a:solidFill>
+                  <a:srgbClr val="B84C30"/>
+                </a:solidFill>
+                <a:latin typeface="Arial"/>
+              </a:rPr>
+              <a:t>$350K</a:t>
+            </a:r>
+          </a:p>
+        </p:txBody>
+      </p:sp>
+      <p:sp>
+        <p:nvSpPr>
+          <p:cNvPr id="56" name="TextBox 55"/>
+          <p:cNvSpPr txBox="1"/>
+          <p:nvPr/>
+        </p:nvSpPr>
+        <p:spPr>
+          <a:xfrm>
+            <a:off x="3520440" y="3282696"/>
+            <a:ext cx="731520" cy="228600"/>
+          </a:xfrm>
+          <a:prstGeom prst="rect">
+            <a:avLst/>
+          </a:prstGeom>
+          <a:noFill/>
+        </p:spPr>
+        <p:txBody>
+          <a:bodyPr wrap="square" anchor="t"/>
+          <a:lstStyle/>
+          <a:p>
+            <a:pPr algn="r"/>
+            <a:r>
+              <a:rPr sz="900" b="1" i="0">
+                <a:solidFill>
+                  <a:srgbClr val="B84C30"/>
+                </a:solidFill>
+                <a:latin typeface="Arial"/>
+              </a:rPr>
+              <a:t>$797K</a:t>
+            </a:r>
+          </a:p>
+        </p:txBody>
+      </p:sp>
+      <p:sp>
+        <p:nvSpPr>
+          <p:cNvPr id="57" name="TextBox 56"/>
+          <p:cNvSpPr txBox="1"/>
+          <p:nvPr/>
+        </p:nvSpPr>
+        <p:spPr>
+          <a:xfrm>
+            <a:off x="4325112" y="3282696"/>
+            <a:ext cx="539496" cy="228600"/>
+          </a:xfrm>
+          <a:prstGeom prst="rect">
+            <a:avLst/>
+          </a:prstGeom>
+          <a:noFill/>
+        </p:spPr>
+        <p:txBody>
+          <a:bodyPr wrap="square" anchor="t"/>
+          <a:lstStyle/>
+          <a:p>
+            <a:pPr algn="r"/>
+            <a:r>
+              <a:rPr sz="900" b="1" i="0">
+                <a:solidFill>
+                  <a:srgbClr val="B84C30"/>
+                </a:solidFill>
+                <a:latin typeface="Arial"/>
+              </a:rPr>
+              <a:t>2.28x</a:t>
+            </a:r>
+          </a:p>
+        </p:txBody>
+      </p:sp>
+      <p:sp>
+        <p:nvSpPr>
+          <p:cNvPr id="58" name="TextBox 57"/>
+          <p:cNvSpPr txBox="1"/>
+          <p:nvPr/>
+        </p:nvSpPr>
+        <p:spPr>
+          <a:xfrm>
+            <a:off x="4937760" y="3282696"/>
+            <a:ext cx="1030528" cy="228600"/>
+          </a:xfrm>
+          <a:prstGeom prst="rect">
+            <a:avLst/>
+          </a:prstGeom>
+          <a:noFill/>
+        </p:spPr>
+        <p:txBody>
+          <a:bodyPr wrap="square" anchor="t"/>
+          <a:lstStyle/>
+          <a:p>
+            <a:pPr algn="r"/>
+            <a:r>
+              <a:rPr sz="900" b="1" i="0">
+                <a:solidFill>
+                  <a:srgbClr val="B84C30"/>
+                </a:solidFill>
+                <a:latin typeface="Arial"/>
+              </a:rPr>
+              <a:t>22.8%</a:t>
+            </a:r>
+          </a:p>
+        </p:txBody>
+      </p:sp>
+      <p:sp>
+        <p:nvSpPr>
+          <p:cNvPr id="59" name="Rectangle 58"/>
           <p:cNvSpPr/>
           <p:nvPr/>
         </p:nvSpPr>
         <p:spPr>
           <a:xfrm>
-            <a:off x="256032" y="2569464"/>
-            <a:ext cx="5748375" cy="402336"/>
+            <a:off x="256032" y="3520440"/>
+            <a:ext cx="5748375" cy="283464"/>
+          </a:xfrm>
+          <a:prstGeom prst="rect">
+            <a:avLst/>
+          </a:prstGeom>
+          <a:solidFill>
+            <a:srgbClr val="F3F3F3"/>
+          </a:solidFill>
+          <a:ln>
+            <a:noFill/>
+          </a:ln>
+        </p:spPr>
+        <p:style>
+          <a:lnRef idx="1">
+            <a:schemeClr val="accent1"/>
+          </a:lnRef>
+          <a:fillRef idx="3">
+            <a:schemeClr val="accent1"/>
+          </a:fillRef>
+          <a:effectRef idx="2">
+            <a:schemeClr val="accent1"/>
+          </a:effectRef>
+          <a:fontRef idx="minor">
+            <a:schemeClr val="lt1"/>
+          </a:fontRef>
+        </p:style>
+        <p:txBody>
+          <a:bodyPr rtlCol="0" anchor="ctr"/>
+          <a:lstStyle/>
+          <a:p>
+            <a:pPr algn="ctr"/>
+          </a:p>
+        </p:txBody>
+      </p:sp>
+      <p:sp>
+        <p:nvSpPr>
+          <p:cNvPr id="60" name="TextBox 59"/>
+          <p:cNvSpPr txBox="1"/>
+          <p:nvPr/>
+        </p:nvSpPr>
+        <p:spPr>
+          <a:xfrm>
+            <a:off x="329184" y="3566160"/>
+            <a:ext cx="475488" cy="228600"/>
+          </a:xfrm>
+          <a:prstGeom prst="rect">
+            <a:avLst/>
+          </a:prstGeom>
+          <a:noFill/>
+        </p:spPr>
+        <p:txBody>
+          <a:bodyPr wrap="square" anchor="t"/>
+          <a:lstStyle/>
+          <a:p>
+            <a:pPr algn="l"/>
+            <a:r>
+              <a:rPr sz="900" b="0" i="0">
+                <a:solidFill>
+                  <a:srgbClr val="1E1E1E"/>
+                </a:solidFill>
+                <a:latin typeface="Arial"/>
+              </a:rPr>
+              <a:t>$4.5M</a:t>
+            </a:r>
+          </a:p>
+        </p:txBody>
+      </p:sp>
+      <p:sp>
+        <p:nvSpPr>
+          <p:cNvPr id="61" name="TextBox 60"/>
+          <p:cNvSpPr txBox="1"/>
+          <p:nvPr/>
+        </p:nvSpPr>
+        <p:spPr>
+          <a:xfrm>
+            <a:off x="1938528" y="3566160"/>
+            <a:ext cx="731520" cy="228600"/>
+          </a:xfrm>
+          <a:prstGeom prst="rect">
+            <a:avLst/>
+          </a:prstGeom>
+          <a:noFill/>
+        </p:spPr>
+        <p:txBody>
+          <a:bodyPr wrap="square" anchor="t"/>
+          <a:lstStyle/>
+          <a:p>
+            <a:pPr algn="r"/>
+            <a:r>
+              <a:rPr sz="900" b="0" i="0">
+                <a:solidFill>
+                  <a:srgbClr val="1E1E1E"/>
+                </a:solidFill>
+                <a:latin typeface="Arial"/>
+              </a:rPr>
+              <a:t>$447K</a:t>
+            </a:r>
+          </a:p>
+        </p:txBody>
+      </p:sp>
+      <p:sp>
+        <p:nvSpPr>
+          <p:cNvPr id="62" name="TextBox 61"/>
+          <p:cNvSpPr txBox="1"/>
+          <p:nvPr/>
+        </p:nvSpPr>
+        <p:spPr>
+          <a:xfrm>
+            <a:off x="2743200" y="3566160"/>
+            <a:ext cx="704088" cy="228600"/>
+          </a:xfrm>
+          <a:prstGeom prst="rect">
+            <a:avLst/>
+          </a:prstGeom>
+          <a:noFill/>
+        </p:spPr>
+        <p:txBody>
+          <a:bodyPr wrap="square" anchor="t"/>
+          <a:lstStyle/>
+          <a:p>
+            <a:pPr algn="r"/>
+            <a:r>
+              <a:rPr sz="900" b="0" i="0">
+                <a:solidFill>
+                  <a:srgbClr val="1E1E1E"/>
+                </a:solidFill>
+                <a:latin typeface="Arial"/>
+              </a:rPr>
+              <a:t>$394K</a:t>
+            </a:r>
+          </a:p>
+        </p:txBody>
+      </p:sp>
+      <p:sp>
+        <p:nvSpPr>
+          <p:cNvPr id="63" name="TextBox 62"/>
+          <p:cNvSpPr txBox="1"/>
+          <p:nvPr/>
+        </p:nvSpPr>
+        <p:spPr>
+          <a:xfrm>
+            <a:off x="3520440" y="3566160"/>
+            <a:ext cx="731520" cy="228600"/>
+          </a:xfrm>
+          <a:prstGeom prst="rect">
+            <a:avLst/>
+          </a:prstGeom>
+          <a:noFill/>
+        </p:spPr>
+        <p:txBody>
+          <a:bodyPr wrap="square" anchor="t"/>
+          <a:lstStyle/>
+          <a:p>
+            <a:pPr algn="r"/>
+            <a:r>
+              <a:rPr sz="900" b="0" i="0">
+                <a:solidFill>
+                  <a:srgbClr val="1E1E1E"/>
+                </a:solidFill>
+                <a:latin typeface="Arial"/>
+              </a:rPr>
+              <a:t>$841K</a:t>
+            </a:r>
+          </a:p>
+        </p:txBody>
+      </p:sp>
+      <p:sp>
+        <p:nvSpPr>
+          <p:cNvPr id="64" name="TextBox 63"/>
+          <p:cNvSpPr txBox="1"/>
+          <p:nvPr/>
+        </p:nvSpPr>
+        <p:spPr>
+          <a:xfrm>
+            <a:off x="4325112" y="3566160"/>
+            <a:ext cx="539496" cy="228600"/>
+          </a:xfrm>
+          <a:prstGeom prst="rect">
+            <a:avLst/>
+          </a:prstGeom>
+          <a:noFill/>
+        </p:spPr>
+        <p:txBody>
+          <a:bodyPr wrap="square" anchor="t"/>
+          <a:lstStyle/>
+          <a:p>
+            <a:pPr algn="r"/>
+            <a:r>
+              <a:rPr sz="900" b="0" i="0">
+                <a:solidFill>
+                  <a:srgbClr val="1E1E1E"/>
+                </a:solidFill>
+                <a:latin typeface="Arial"/>
+              </a:rPr>
+              <a:t>2.40x</a:t>
+            </a:r>
+          </a:p>
+        </p:txBody>
+      </p:sp>
+      <p:sp>
+        <p:nvSpPr>
+          <p:cNvPr id="65" name="TextBox 64"/>
+          <p:cNvSpPr txBox="1"/>
+          <p:nvPr/>
+        </p:nvSpPr>
+        <p:spPr>
+          <a:xfrm>
+            <a:off x="4937760" y="3566160"/>
+            <a:ext cx="1030528" cy="228600"/>
+          </a:xfrm>
+          <a:prstGeom prst="rect">
+            <a:avLst/>
+          </a:prstGeom>
+          <a:noFill/>
+        </p:spPr>
+        <p:txBody>
+          <a:bodyPr wrap="square" anchor="t"/>
+          <a:lstStyle/>
+          <a:p>
+            <a:pPr algn="r"/>
+            <a:r>
+              <a:rPr sz="900" b="0" i="0">
+                <a:solidFill>
+                  <a:srgbClr val="1E1E1E"/>
+                </a:solidFill>
+                <a:latin typeface="Arial"/>
+              </a:rPr>
+              <a:t>24.4%</a:t>
+            </a:r>
+          </a:p>
+        </p:txBody>
+      </p:sp>
+      <p:sp>
+        <p:nvSpPr>
+          <p:cNvPr id="66" name="Rectangle 65"/>
+          <p:cNvSpPr/>
+          <p:nvPr/>
+        </p:nvSpPr>
+        <p:spPr>
+          <a:xfrm>
+            <a:off x="256032" y="3803904"/>
+            <a:ext cx="5748375" cy="283464"/>
           </a:xfrm>
           <a:prstGeom prst="rect">
             <a:avLst/>
@@ -4012,14 +5458,14 @@
       </p:sp>
       <p:sp>
         <p:nvSpPr>
-          <p:cNvPr id="26" name="TextBox 25"/>
-          <p:cNvSpPr txBox="1"/>
-          <p:nvPr/>
-        </p:nvSpPr>
-        <p:spPr>
-          <a:xfrm>
-            <a:off x="384048" y="2651760"/>
-            <a:ext cx="1463040" cy="256032"/>
+          <p:cNvPr id="67" name="TextBox 66"/>
+          <p:cNvSpPr txBox="1"/>
+          <p:nvPr/>
+        </p:nvSpPr>
+        <p:spPr>
+          <a:xfrm>
+            <a:off x="329184" y="3849624"/>
+            <a:ext cx="475488" cy="228600"/>
           </a:xfrm>
           <a:prstGeom prst="rect">
             <a:avLst/>
@@ -4032,99 +5478,35 @@
           <a:p>
             <a:pPr algn="l"/>
             <a:r>
-              <a:rPr sz="1000" b="1" i="0">
+              <a:rPr sz="900" b="1" i="0">
                 <a:solidFill>
                   <a:srgbClr val="FFFFFF"/>
                 </a:solidFill>
                 <a:latin typeface="Arial"/>
               </a:rPr>
-              <a:t>Year 5 exit</a:t>
-            </a:r>
-          </a:p>
-        </p:txBody>
-      </p:sp>
-      <p:sp>
-        <p:nvSpPr>
-          <p:cNvPr id="27" name="TextBox 26"/>
-          <p:cNvSpPr txBox="1"/>
-          <p:nvPr/>
-        </p:nvSpPr>
-        <p:spPr>
-          <a:xfrm>
-            <a:off x="3032607" y="2651760"/>
-            <a:ext cx="2834640" cy="256032"/>
-          </a:xfrm>
-          <a:prstGeom prst="rect">
-            <a:avLst/>
-          </a:prstGeom>
-          <a:noFill/>
-        </p:spPr>
-        <p:txBody>
-          <a:bodyPr wrap="square" anchor="t"/>
-          <a:lstStyle/>
-          <a:p>
-            <a:pPr algn="r"/>
-            <a:r>
-              <a:rPr sz="1000" b="1" i="0">
-                <a:solidFill>
-                  <a:srgbClr val="FFFFFF"/>
-                </a:solidFill>
-                <a:latin typeface="Arial"/>
-              </a:rPr>
-              <a:t>~$1.05M returned  ·  ~3.5x MOIC</a:t>
-            </a:r>
-          </a:p>
-        </p:txBody>
-      </p:sp>
-      <p:sp>
-        <p:nvSpPr>
-          <p:cNvPr id="28" name="TextBox 27"/>
-          <p:cNvSpPr txBox="1"/>
-          <p:nvPr/>
-        </p:nvSpPr>
-        <p:spPr>
-          <a:xfrm>
-            <a:off x="256032" y="3063240"/>
-            <a:ext cx="5748375" cy="548640"/>
-          </a:xfrm>
-          <a:prstGeom prst="rect">
-            <a:avLst/>
-          </a:prstGeom>
-          <a:noFill/>
-        </p:spPr>
-        <p:txBody>
-          <a:bodyPr wrap="square" anchor="t"/>
-          <a:lstStyle/>
-          <a:p>
-            <a:pPr algn="l"/>
-            <a:r>
-              <a:rPr sz="750" b="0" i="1">
-                <a:solidFill>
-                  <a:srgbClr val="8A939C"/>
-                </a:solidFill>
-                <a:latin typeface="Arial"/>
-              </a:rPr>
-              <a:t>Investor owns 8.6% equity at cap ($300K / $3.5M). Yr 5 assumes $1M EBITDA at 5x valuation. Paid out via SBA recap — founder retains 100% ownership.</a:t>
-            </a:r>
-          </a:p>
-        </p:txBody>
-      </p:sp>
-      <p:sp>
-        <p:nvSpPr>
-          <p:cNvPr id="29" name="Rectangle 28"/>
+              <a:t>$5.0M</a:t>
+            </a:r>
+          </a:p>
+        </p:txBody>
+      </p:sp>
+      <p:sp>
+        <p:nvSpPr>
+          <p:cNvPr id="68" name="Rounded Rectangle 67"/>
           <p:cNvSpPr/>
           <p:nvPr/>
         </p:nvSpPr>
         <p:spPr>
           <a:xfrm>
-            <a:off x="256032" y="3721608"/>
-            <a:ext cx="2837611" cy="676656"/>
-          </a:xfrm>
-          <a:prstGeom prst="rect">
-            <a:avLst/>
+            <a:off x="832104" y="3867912"/>
+            <a:ext cx="502920" cy="155448"/>
+          </a:xfrm>
+          <a:prstGeom prst="roundRect">
+            <a:avLst>
+              <a:gd name="adj" fmla="val 35000"/>
+            </a:avLst>
           </a:prstGeom>
           <a:solidFill>
-            <a:srgbClr val="E6EBEE"/>
+            <a:srgbClr val="3D4F5C"/>
           </a:solidFill>
           <a:ln>
             <a:noFill/>
@@ -4145,95 +5527,203 @@
           </a:fontRef>
         </p:style>
         <p:txBody>
-          <a:bodyPr rtlCol="0" anchor="ctr"/>
-          <a:lstStyle/>
-          <a:p>
-            <a:pPr algn="ctr"/>
-          </a:p>
-        </p:txBody>
-      </p:sp>
-      <p:sp>
-        <p:nvSpPr>
-          <p:cNvPr id="30" name="TextBox 29"/>
-          <p:cNvSpPr txBox="1"/>
-          <p:nvPr/>
-        </p:nvSpPr>
-        <p:spPr>
-          <a:xfrm>
-            <a:off x="310896" y="3794760"/>
-            <a:ext cx="2727883" cy="329184"/>
-          </a:xfrm>
-          <a:prstGeom prst="rect">
-            <a:avLst/>
-          </a:prstGeom>
-          <a:noFill/>
-        </p:spPr>
-        <p:txBody>
-          <a:bodyPr wrap="square" anchor="t"/>
-          <a:lstStyle/>
-          <a:p>
-            <a:pPr algn="ctr"/>
-            <a:r>
-              <a:rPr sz="1500" b="1" i="0">
-                <a:solidFill>
-                  <a:srgbClr val="B84C30"/>
-                </a:solidFill>
-                <a:latin typeface="Arial"/>
-              </a:rPr>
-              <a:t>$300K</a:t>
-            </a:r>
-          </a:p>
-        </p:txBody>
-      </p:sp>
-      <p:sp>
-        <p:nvSpPr>
-          <p:cNvPr id="31" name="TextBox 30"/>
-          <p:cNvSpPr txBox="1"/>
-          <p:nvPr/>
-        </p:nvSpPr>
-        <p:spPr>
-          <a:xfrm>
-            <a:off x="310896" y="4114800"/>
-            <a:ext cx="2727883" cy="256032"/>
-          </a:xfrm>
-          <a:prstGeom prst="rect">
-            <a:avLst/>
-          </a:prstGeom>
-          <a:noFill/>
-        </p:spPr>
-        <p:txBody>
-          <a:bodyPr wrap="square" anchor="t"/>
-          <a:lstStyle/>
-          <a:p>
-            <a:pPr algn="ctr"/>
-            <a:r>
-              <a:rPr sz="750" b="0" i="0">
-                <a:solidFill>
-                  <a:srgbClr val="8A939C"/>
-                </a:solidFill>
-                <a:latin typeface="Arial"/>
-              </a:rPr>
-              <a:t>Principal</a:t>
-            </a:r>
-          </a:p>
-        </p:txBody>
-      </p:sp>
-      <p:sp>
-        <p:nvSpPr>
-          <p:cNvPr id="32" name="Rectangle 31"/>
+          <a:bodyPr rtlCol="0" anchor="ctr" wrap="square"/>
+          <a:lstStyle/>
+          <a:p>
+            <a:pPr algn="ctr"/>
+            <a:r>
+              <a:rPr sz="650" b="1" i="0">
+                <a:solidFill>
+                  <a:srgbClr val="FFFFFF"/>
+                </a:solidFill>
+                <a:latin typeface="Arial"/>
+              </a:rPr>
+              <a:t>target</a:t>
+            </a:r>
+          </a:p>
+        </p:txBody>
+      </p:sp>
+      <p:sp>
+        <p:nvSpPr>
+          <p:cNvPr id="69" name="TextBox 68"/>
+          <p:cNvSpPr txBox="1"/>
+          <p:nvPr/>
+        </p:nvSpPr>
+        <p:spPr>
+          <a:xfrm>
+            <a:off x="1938528" y="3849624"/>
+            <a:ext cx="731520" cy="228600"/>
+          </a:xfrm>
+          <a:prstGeom prst="rect">
+            <a:avLst/>
+          </a:prstGeom>
+          <a:noFill/>
+        </p:spPr>
+        <p:txBody>
+          <a:bodyPr wrap="square" anchor="t"/>
+          <a:lstStyle/>
+          <a:p>
+            <a:pPr algn="r"/>
+            <a:r>
+              <a:rPr sz="900" b="1" i="0">
+                <a:solidFill>
+                  <a:srgbClr val="FFFFFF"/>
+                </a:solidFill>
+                <a:latin typeface="Arial"/>
+              </a:rPr>
+              <a:t>$447K</a:t>
+            </a:r>
+          </a:p>
+        </p:txBody>
+      </p:sp>
+      <p:sp>
+        <p:nvSpPr>
+          <p:cNvPr id="70" name="TextBox 69"/>
+          <p:cNvSpPr txBox="1"/>
+          <p:nvPr/>
+        </p:nvSpPr>
+        <p:spPr>
+          <a:xfrm>
+            <a:off x="2743200" y="3849624"/>
+            <a:ext cx="704088" cy="228600"/>
+          </a:xfrm>
+          <a:prstGeom prst="rect">
+            <a:avLst/>
+          </a:prstGeom>
+          <a:noFill/>
+        </p:spPr>
+        <p:txBody>
+          <a:bodyPr wrap="square" anchor="t"/>
+          <a:lstStyle/>
+          <a:p>
+            <a:pPr algn="r"/>
+            <a:r>
+              <a:rPr sz="900" b="1" i="0">
+                <a:solidFill>
+                  <a:srgbClr val="FFFFFF"/>
+                </a:solidFill>
+                <a:latin typeface="Arial"/>
+              </a:rPr>
+              <a:t>$438K</a:t>
+            </a:r>
+          </a:p>
+        </p:txBody>
+      </p:sp>
+      <p:sp>
+        <p:nvSpPr>
+          <p:cNvPr id="71" name="TextBox 70"/>
+          <p:cNvSpPr txBox="1"/>
+          <p:nvPr/>
+        </p:nvSpPr>
+        <p:spPr>
+          <a:xfrm>
+            <a:off x="3520440" y="3849624"/>
+            <a:ext cx="731520" cy="228600"/>
+          </a:xfrm>
+          <a:prstGeom prst="rect">
+            <a:avLst/>
+          </a:prstGeom>
+          <a:noFill/>
+        </p:spPr>
+        <p:txBody>
+          <a:bodyPr wrap="square" anchor="t"/>
+          <a:lstStyle/>
+          <a:p>
+            <a:pPr algn="r"/>
+            <a:r>
+              <a:rPr sz="900" b="1" i="0">
+                <a:solidFill>
+                  <a:srgbClr val="FFFFFF"/>
+                </a:solidFill>
+                <a:latin typeface="Arial"/>
+              </a:rPr>
+              <a:t>$885K</a:t>
+            </a:r>
+          </a:p>
+        </p:txBody>
+      </p:sp>
+      <p:sp>
+        <p:nvSpPr>
+          <p:cNvPr id="72" name="TextBox 71"/>
+          <p:cNvSpPr txBox="1"/>
+          <p:nvPr/>
+        </p:nvSpPr>
+        <p:spPr>
+          <a:xfrm>
+            <a:off x="4325112" y="3849624"/>
+            <a:ext cx="539496" cy="228600"/>
+          </a:xfrm>
+          <a:prstGeom prst="rect">
+            <a:avLst/>
+          </a:prstGeom>
+          <a:noFill/>
+        </p:spPr>
+        <p:txBody>
+          <a:bodyPr wrap="square" anchor="t"/>
+          <a:lstStyle/>
+          <a:p>
+            <a:pPr algn="r"/>
+            <a:r>
+              <a:rPr sz="900" b="1" i="0">
+                <a:solidFill>
+                  <a:srgbClr val="FFFFFF"/>
+                </a:solidFill>
+                <a:latin typeface="Arial"/>
+              </a:rPr>
+              <a:t>2.53x</a:t>
+            </a:r>
+          </a:p>
+        </p:txBody>
+      </p:sp>
+      <p:sp>
+        <p:nvSpPr>
+          <p:cNvPr id="73" name="TextBox 72"/>
+          <p:cNvSpPr txBox="1"/>
+          <p:nvPr/>
+        </p:nvSpPr>
+        <p:spPr>
+          <a:xfrm>
+            <a:off x="4937760" y="3849624"/>
+            <a:ext cx="1030528" cy="228600"/>
+          </a:xfrm>
+          <a:prstGeom prst="rect">
+            <a:avLst/>
+          </a:prstGeom>
+          <a:noFill/>
+        </p:spPr>
+        <p:txBody>
+          <a:bodyPr wrap="square" anchor="t"/>
+          <a:lstStyle/>
+          <a:p>
+            <a:pPr algn="r"/>
+            <a:r>
+              <a:rPr sz="900" b="1" i="0">
+                <a:solidFill>
+                  <a:srgbClr val="FFFFFF"/>
+                </a:solidFill>
+                <a:latin typeface="Arial"/>
+              </a:rPr>
+              <a:t>26.0%</a:t>
+            </a:r>
+          </a:p>
+        </p:txBody>
+      </p:sp>
+      <p:sp>
+        <p:nvSpPr>
+          <p:cNvPr id="74" name="Rectangle 73"/>
           <p:cNvSpPr/>
           <p:nvPr/>
         </p:nvSpPr>
         <p:spPr>
           <a:xfrm>
-            <a:off x="3166795" y="3721608"/>
-            <a:ext cx="2837611" cy="676656"/>
+            <a:off x="256032" y="4087368"/>
+            <a:ext cx="5748375" cy="283464"/>
           </a:xfrm>
           <a:prstGeom prst="rect">
             <a:avLst/>
           </a:prstGeom>
           <a:solidFill>
-            <a:srgbClr val="E6EBEE"/>
+            <a:srgbClr val="FFFFFF"/>
           </a:solidFill>
           <a:ln>
             <a:noFill/>
@@ -4263,86 +5753,251 @@
       </p:sp>
       <p:sp>
         <p:nvSpPr>
-          <p:cNvPr id="33" name="TextBox 32"/>
-          <p:cNvSpPr txBox="1"/>
-          <p:nvPr/>
-        </p:nvSpPr>
-        <p:spPr>
-          <a:xfrm>
-            <a:off x="3221659" y="3794760"/>
-            <a:ext cx="2727883" cy="329184"/>
-          </a:xfrm>
-          <a:prstGeom prst="rect">
-            <a:avLst/>
-          </a:prstGeom>
-          <a:noFill/>
-        </p:spPr>
-        <p:txBody>
-          <a:bodyPr wrap="square" anchor="t"/>
-          <a:lstStyle/>
-          <a:p>
-            <a:pPr algn="ctr"/>
-            <a:r>
-              <a:rPr sz="1500" b="1" i="0">
-                <a:solidFill>
-                  <a:srgbClr val="B84C30"/>
-                </a:solidFill>
-                <a:latin typeface="Arial"/>
-              </a:rPr>
-              <a:t>15% PIK</a:t>
-            </a:r>
-          </a:p>
-        </p:txBody>
-      </p:sp>
-      <p:sp>
-        <p:nvSpPr>
-          <p:cNvPr id="34" name="TextBox 33"/>
-          <p:cNvSpPr txBox="1"/>
-          <p:nvPr/>
-        </p:nvSpPr>
-        <p:spPr>
-          <a:xfrm>
-            <a:off x="3221659" y="4114800"/>
-            <a:ext cx="2727883" cy="256032"/>
-          </a:xfrm>
-          <a:prstGeom prst="rect">
-            <a:avLst/>
-          </a:prstGeom>
-          <a:noFill/>
-        </p:spPr>
-        <p:txBody>
-          <a:bodyPr wrap="square" anchor="t"/>
-          <a:lstStyle/>
-          <a:p>
-            <a:pPr algn="ctr"/>
-            <a:r>
-              <a:rPr sz="750" b="0" i="0">
+          <p:cNvPr id="75" name="TextBox 74"/>
+          <p:cNvSpPr txBox="1"/>
+          <p:nvPr/>
+        </p:nvSpPr>
+        <p:spPr>
+          <a:xfrm>
+            <a:off x="329184" y="4133088"/>
+            <a:ext cx="475488" cy="228600"/>
+          </a:xfrm>
+          <a:prstGeom prst="rect">
+            <a:avLst/>
+          </a:prstGeom>
+          <a:noFill/>
+        </p:spPr>
+        <p:txBody>
+          <a:bodyPr wrap="square" anchor="t"/>
+          <a:lstStyle/>
+          <a:p>
+            <a:pPr algn="l"/>
+            <a:r>
+              <a:rPr sz="900" b="0" i="0">
+                <a:solidFill>
+                  <a:srgbClr val="1E1E1E"/>
+                </a:solidFill>
+                <a:latin typeface="Arial"/>
+              </a:rPr>
+              <a:t>$5.5M</a:t>
+            </a:r>
+          </a:p>
+        </p:txBody>
+      </p:sp>
+      <p:sp>
+        <p:nvSpPr>
+          <p:cNvPr id="76" name="TextBox 75"/>
+          <p:cNvSpPr txBox="1"/>
+          <p:nvPr/>
+        </p:nvSpPr>
+        <p:spPr>
+          <a:xfrm>
+            <a:off x="1938528" y="4133088"/>
+            <a:ext cx="731520" cy="228600"/>
+          </a:xfrm>
+          <a:prstGeom prst="rect">
+            <a:avLst/>
+          </a:prstGeom>
+          <a:noFill/>
+        </p:spPr>
+        <p:txBody>
+          <a:bodyPr wrap="square" anchor="t"/>
+          <a:lstStyle/>
+          <a:p>
+            <a:pPr algn="r"/>
+            <a:r>
+              <a:rPr sz="900" b="0" i="0">
+                <a:solidFill>
+                  <a:srgbClr val="1E1E1E"/>
+                </a:solidFill>
+                <a:latin typeface="Arial"/>
+              </a:rPr>
+              <a:t>$447K</a:t>
+            </a:r>
+          </a:p>
+        </p:txBody>
+      </p:sp>
+      <p:sp>
+        <p:nvSpPr>
+          <p:cNvPr id="77" name="TextBox 76"/>
+          <p:cNvSpPr txBox="1"/>
+          <p:nvPr/>
+        </p:nvSpPr>
+        <p:spPr>
+          <a:xfrm>
+            <a:off x="2743200" y="4133088"/>
+            <a:ext cx="704088" cy="228600"/>
+          </a:xfrm>
+          <a:prstGeom prst="rect">
+            <a:avLst/>
+          </a:prstGeom>
+          <a:noFill/>
+        </p:spPr>
+        <p:txBody>
+          <a:bodyPr wrap="square" anchor="t"/>
+          <a:lstStyle/>
+          <a:p>
+            <a:pPr algn="r"/>
+            <a:r>
+              <a:rPr sz="900" b="0" i="0">
+                <a:solidFill>
+                  <a:srgbClr val="1E1E1E"/>
+                </a:solidFill>
+                <a:latin typeface="Arial"/>
+              </a:rPr>
+              <a:t>$481K</a:t>
+            </a:r>
+          </a:p>
+        </p:txBody>
+      </p:sp>
+      <p:sp>
+        <p:nvSpPr>
+          <p:cNvPr id="78" name="TextBox 77"/>
+          <p:cNvSpPr txBox="1"/>
+          <p:nvPr/>
+        </p:nvSpPr>
+        <p:spPr>
+          <a:xfrm>
+            <a:off x="3520440" y="4133088"/>
+            <a:ext cx="731520" cy="228600"/>
+          </a:xfrm>
+          <a:prstGeom prst="rect">
+            <a:avLst/>
+          </a:prstGeom>
+          <a:noFill/>
+        </p:spPr>
+        <p:txBody>
+          <a:bodyPr wrap="square" anchor="t"/>
+          <a:lstStyle/>
+          <a:p>
+            <a:pPr algn="r"/>
+            <a:r>
+              <a:rPr sz="900" b="0" i="0">
+                <a:solidFill>
+                  <a:srgbClr val="1E1E1E"/>
+                </a:solidFill>
+                <a:latin typeface="Arial"/>
+              </a:rPr>
+              <a:t>$928K</a:t>
+            </a:r>
+          </a:p>
+        </p:txBody>
+      </p:sp>
+      <p:sp>
+        <p:nvSpPr>
+          <p:cNvPr id="79" name="TextBox 78"/>
+          <p:cNvSpPr txBox="1"/>
+          <p:nvPr/>
+        </p:nvSpPr>
+        <p:spPr>
+          <a:xfrm>
+            <a:off x="4325112" y="4133088"/>
+            <a:ext cx="539496" cy="228600"/>
+          </a:xfrm>
+          <a:prstGeom prst="rect">
+            <a:avLst/>
+          </a:prstGeom>
+          <a:noFill/>
+        </p:spPr>
+        <p:txBody>
+          <a:bodyPr wrap="square" anchor="t"/>
+          <a:lstStyle/>
+          <a:p>
+            <a:pPr algn="r"/>
+            <a:r>
+              <a:rPr sz="900" b="0" i="0">
+                <a:solidFill>
+                  <a:srgbClr val="1E1E1E"/>
+                </a:solidFill>
+                <a:latin typeface="Arial"/>
+              </a:rPr>
+              <a:t>2.65x</a:t>
+            </a:r>
+          </a:p>
+        </p:txBody>
+      </p:sp>
+      <p:sp>
+        <p:nvSpPr>
+          <p:cNvPr id="80" name="TextBox 79"/>
+          <p:cNvSpPr txBox="1"/>
+          <p:nvPr/>
+        </p:nvSpPr>
+        <p:spPr>
+          <a:xfrm>
+            <a:off x="4937760" y="4133088"/>
+            <a:ext cx="1030528" cy="228600"/>
+          </a:xfrm>
+          <a:prstGeom prst="rect">
+            <a:avLst/>
+          </a:prstGeom>
+          <a:noFill/>
+        </p:spPr>
+        <p:txBody>
+          <a:bodyPr wrap="square" anchor="t"/>
+          <a:lstStyle/>
+          <a:p>
+            <a:pPr algn="r"/>
+            <a:r>
+              <a:rPr sz="900" b="0" i="0">
+                <a:solidFill>
+                  <a:srgbClr val="1E1E1E"/>
+                </a:solidFill>
+                <a:latin typeface="Arial"/>
+              </a:rPr>
+              <a:t>27.5%</a:t>
+            </a:r>
+          </a:p>
+        </p:txBody>
+      </p:sp>
+      <p:sp>
+        <p:nvSpPr>
+          <p:cNvPr id="81" name="TextBox 80"/>
+          <p:cNvSpPr txBox="1"/>
+          <p:nvPr/>
+        </p:nvSpPr>
+        <p:spPr>
+          <a:xfrm>
+            <a:off x="256032" y="4443984"/>
+            <a:ext cx="5748375" cy="457200"/>
+          </a:xfrm>
+          <a:prstGeom prst="rect">
+            <a:avLst/>
+          </a:prstGeom>
+          <a:noFill/>
+        </p:spPr>
+        <p:txBody>
+          <a:bodyPr wrap="square" anchor="t"/>
+          <a:lstStyle/>
+          <a:p>
+            <a:pPr algn="l"/>
+            <a:r>
+              <a:rPr sz="700" b="0" i="1">
                 <a:solidFill>
                   <a:srgbClr val="8A939C"/>
                 </a:solidFill>
                 <a:latin typeface="Arial"/>
               </a:rPr>
-              <a:t>Annual compounding</a:t>
-            </a:r>
-          </a:p>
-        </p:txBody>
-      </p:sp>
-      <p:sp>
-        <p:nvSpPr>
-          <p:cNvPr id="35" name="Rectangle 34"/>
+              <a:t>PIK accrual: $350K × (1.05)⁴ = $447K.  Equity: 8.75% × exit valuation ($350K / $4M cap).  IRR: (total / $350K)^(0.25) − 1.</a:t>
+            </a:r>
+          </a:p>
+        </p:txBody>
+      </p:sp>
+      <p:sp>
+        <p:nvSpPr>
+          <p:cNvPr id="82" name="Rectangle 81"/>
           <p:cNvSpPr/>
           <p:nvPr/>
         </p:nvSpPr>
         <p:spPr>
           <a:xfrm>
-            <a:off x="256032" y="4471416"/>
-            <a:ext cx="2837611" cy="676656"/>
+            <a:off x="256032" y="4956048"/>
+            <a:ext cx="5748375" cy="658368"/>
           </a:xfrm>
           <a:prstGeom prst="rect">
             <a:avLst/>
           </a:prstGeom>
           <a:solidFill>
-            <a:srgbClr val="E6EBEE"/>
+            <a:srgbClr val="3D4F5C"/>
           </a:solidFill>
           <a:ln>
             <a:noFill/>
@@ -4372,221 +6027,112 @@
       </p:sp>
       <p:sp>
         <p:nvSpPr>
-          <p:cNvPr id="36" name="TextBox 35"/>
-          <p:cNvSpPr txBox="1"/>
-          <p:nvPr/>
-        </p:nvSpPr>
-        <p:spPr>
-          <a:xfrm>
-            <a:off x="310896" y="4544568"/>
-            <a:ext cx="2727883" cy="329184"/>
-          </a:xfrm>
-          <a:prstGeom prst="rect">
-            <a:avLst/>
-          </a:prstGeom>
-          <a:noFill/>
-        </p:spPr>
-        <p:txBody>
-          <a:bodyPr wrap="square" anchor="t"/>
-          <a:lstStyle/>
-          <a:p>
-            <a:pPr algn="ctr"/>
-            <a:r>
-              <a:rPr sz="1500" b="1" i="0">
-                <a:solidFill>
-                  <a:srgbClr val="B84C30"/>
-                </a:solidFill>
-                <a:latin typeface="Arial"/>
-              </a:rPr>
-              <a:t>3 yr</a:t>
-            </a:r>
-          </a:p>
-        </p:txBody>
-      </p:sp>
-      <p:sp>
-        <p:nvSpPr>
-          <p:cNvPr id="37" name="TextBox 36"/>
-          <p:cNvSpPr txBox="1"/>
-          <p:nvPr/>
-        </p:nvSpPr>
-        <p:spPr>
-          <a:xfrm>
-            <a:off x="310896" y="4864608"/>
-            <a:ext cx="2727883" cy="256032"/>
-          </a:xfrm>
-          <a:prstGeom prst="rect">
-            <a:avLst/>
-          </a:prstGeom>
-          <a:noFill/>
-        </p:spPr>
-        <p:txBody>
-          <a:bodyPr wrap="square" anchor="t"/>
-          <a:lstStyle/>
-          <a:p>
-            <a:pPr algn="ctr"/>
-            <a:r>
-              <a:rPr sz="750" b="0" i="0">
-                <a:solidFill>
-                  <a:srgbClr val="8A939C"/>
-                </a:solidFill>
-                <a:latin typeface="Arial"/>
-              </a:rPr>
-              <a:t>Maturity</a:t>
-            </a:r>
-          </a:p>
-        </p:txBody>
-      </p:sp>
-      <p:sp>
-        <p:nvSpPr>
-          <p:cNvPr id="38" name="Rectangle 37"/>
+          <p:cNvPr id="83" name="TextBox 82"/>
+          <p:cNvSpPr txBox="1"/>
+          <p:nvPr/>
+        </p:nvSpPr>
+        <p:spPr>
+          <a:xfrm>
+            <a:off x="365760" y="5029200"/>
+            <a:ext cx="2989155" cy="548640"/>
+          </a:xfrm>
+          <a:prstGeom prst="rect">
+            <a:avLst/>
+          </a:prstGeom>
+          <a:noFill/>
+        </p:spPr>
+        <p:txBody>
+          <a:bodyPr wrap="square" anchor="t"/>
+          <a:lstStyle/>
+          <a:p>
+            <a:pPr algn="l"/>
+            <a:r>
+              <a:rPr sz="900" b="1" i="0">
+                <a:solidFill>
+                  <a:srgbClr val="FFFFFF"/>
+                </a:solidFill>
+                <a:latin typeface="Arial"/>
+              </a:rPr>
+              <a:t>~22.8% IRR at valuation cap  ·  Private equity-level returns on a cash-flowing business</a:t>
+            </a:r>
+          </a:p>
+        </p:txBody>
+      </p:sp>
+      <p:sp>
+        <p:nvSpPr>
+          <p:cNvPr id="84" name="TextBox 83"/>
+          <p:cNvSpPr txBox="1"/>
+          <p:nvPr/>
+        </p:nvSpPr>
+        <p:spPr>
+          <a:xfrm>
+            <a:off x="3475122" y="5029200"/>
+            <a:ext cx="2322877" cy="548640"/>
+          </a:xfrm>
+          <a:prstGeom prst="rect">
+            <a:avLst/>
+          </a:prstGeom>
+          <a:noFill/>
+        </p:spPr>
+        <p:txBody>
+          <a:bodyPr wrap="square" anchor="t"/>
+          <a:lstStyle/>
+          <a:p>
+            <a:pPr algn="l"/>
+            <a:r>
+              <a:rPr sz="750" b="0" i="1">
+                <a:solidFill>
+                  <a:srgbClr val="A8BAC5"/>
+                </a:solidFill>
+                <a:latin typeface="Arial"/>
+              </a:rPr>
+              <a:t>Principal + PIK of $447K fixed regardless of exit valuation. Equity scales with performance. SBA recap at year 4 — founder retains 100% ownership.</a:t>
+            </a:r>
+          </a:p>
+        </p:txBody>
+      </p:sp>
+      <p:sp>
+        <p:nvSpPr>
+          <p:cNvPr id="85" name="TextBox 84"/>
+          <p:cNvSpPr txBox="1"/>
+          <p:nvPr/>
+        </p:nvSpPr>
+        <p:spPr>
+          <a:xfrm>
+            <a:off x="6187287" y="1737360"/>
+            <a:ext cx="5748375" cy="256032"/>
+          </a:xfrm>
+          <a:prstGeom prst="rect">
+            <a:avLst/>
+          </a:prstGeom>
+          <a:noFill/>
+        </p:spPr>
+        <p:txBody>
+          <a:bodyPr wrap="square" anchor="t"/>
+          <a:lstStyle/>
+          <a:p>
+            <a:pPr algn="l"/>
+            <a:r>
+              <a:rPr sz="1000" b="1" i="0">
+                <a:solidFill>
+                  <a:srgbClr val="3D4F5C"/>
+                </a:solidFill>
+                <a:latin typeface="Arial"/>
+              </a:rPr>
+              <a:t>USE OF PROCEEDS</a:t>
+            </a:r>
+          </a:p>
+        </p:txBody>
+      </p:sp>
+      <p:sp>
+        <p:nvSpPr>
+          <p:cNvPr id="86" name="Rectangle 85"/>
           <p:cNvSpPr/>
           <p:nvPr/>
         </p:nvSpPr>
         <p:spPr>
           <a:xfrm>
-            <a:off x="3166795" y="4471416"/>
-            <a:ext cx="2837611" cy="676656"/>
-          </a:xfrm>
-          <a:prstGeom prst="rect">
-            <a:avLst/>
-          </a:prstGeom>
-          <a:solidFill>
-            <a:srgbClr val="E6EBEE"/>
-          </a:solidFill>
-          <a:ln>
-            <a:noFill/>
-          </a:ln>
-        </p:spPr>
-        <p:style>
-          <a:lnRef idx="1">
-            <a:schemeClr val="accent1"/>
-          </a:lnRef>
-          <a:fillRef idx="3">
-            <a:schemeClr val="accent1"/>
-          </a:fillRef>
-          <a:effectRef idx="2">
-            <a:schemeClr val="accent1"/>
-          </a:effectRef>
-          <a:fontRef idx="minor">
-            <a:schemeClr val="lt1"/>
-          </a:fontRef>
-        </p:style>
-        <p:txBody>
-          <a:bodyPr rtlCol="0" anchor="ctr"/>
-          <a:lstStyle/>
-          <a:p>
-            <a:pPr algn="ctr"/>
-          </a:p>
-        </p:txBody>
-      </p:sp>
-      <p:sp>
-        <p:nvSpPr>
-          <p:cNvPr id="39" name="TextBox 38"/>
-          <p:cNvSpPr txBox="1"/>
-          <p:nvPr/>
-        </p:nvSpPr>
-        <p:spPr>
-          <a:xfrm>
-            <a:off x="3221659" y="4544568"/>
-            <a:ext cx="2727883" cy="329184"/>
-          </a:xfrm>
-          <a:prstGeom prst="rect">
-            <a:avLst/>
-          </a:prstGeom>
-          <a:noFill/>
-        </p:spPr>
-        <p:txBody>
-          <a:bodyPr wrap="square" anchor="t"/>
-          <a:lstStyle/>
-          <a:p>
-            <a:pPr algn="ctr"/>
-            <a:r>
-              <a:rPr sz="1500" b="1" i="0">
-                <a:solidFill>
-                  <a:srgbClr val="B84C30"/>
-                </a:solidFill>
-                <a:latin typeface="Arial"/>
-              </a:rPr>
-              <a:t>+2 yr</a:t>
-            </a:r>
-          </a:p>
-        </p:txBody>
-      </p:sp>
-      <p:sp>
-        <p:nvSpPr>
-          <p:cNvPr id="40" name="TextBox 39"/>
-          <p:cNvSpPr txBox="1"/>
-          <p:nvPr/>
-        </p:nvSpPr>
-        <p:spPr>
-          <a:xfrm>
-            <a:off x="3221659" y="4864608"/>
-            <a:ext cx="2727883" cy="256032"/>
-          </a:xfrm>
-          <a:prstGeom prst="rect">
-            <a:avLst/>
-          </a:prstGeom>
-          <a:noFill/>
-        </p:spPr>
-        <p:txBody>
-          <a:bodyPr wrap="square" anchor="t"/>
-          <a:lstStyle/>
-          <a:p>
-            <a:pPr algn="ctr"/>
-            <a:r>
-              <a:rPr sz="750" b="0" i="0">
-                <a:solidFill>
-                  <a:srgbClr val="8A939C"/>
-                </a:solidFill>
-                <a:latin typeface="Arial"/>
-              </a:rPr>
-              <a:t>Investor extension option</a:t>
-            </a:r>
-          </a:p>
-        </p:txBody>
-      </p:sp>
-      <p:sp>
-        <p:nvSpPr>
-          <p:cNvPr id="41" name="TextBox 40"/>
-          <p:cNvSpPr txBox="1"/>
-          <p:nvPr/>
-        </p:nvSpPr>
-        <p:spPr>
-          <a:xfrm>
-            <a:off x="6187287" y="1755648"/>
-            <a:ext cx="5748375" cy="256032"/>
-          </a:xfrm>
-          <a:prstGeom prst="rect">
-            <a:avLst/>
-          </a:prstGeom>
-          <a:noFill/>
-        </p:spPr>
-        <p:txBody>
-          <a:bodyPr wrap="square" anchor="t"/>
-          <a:lstStyle/>
-          <a:p>
-            <a:pPr algn="l"/>
-            <a:r>
-              <a:rPr sz="1100" b="1" i="0">
-                <a:solidFill>
-                  <a:srgbClr val="3D4F5C"/>
-                </a:solidFill>
-                <a:latin typeface="Arial"/>
-              </a:rPr>
-              <a:t>Use of Proceeds</a:t>
-            </a:r>
-          </a:p>
-        </p:txBody>
-      </p:sp>
-      <p:sp>
-        <p:nvSpPr>
-          <p:cNvPr id="42" name="Rectangle 41"/>
-          <p:cNvSpPr/>
-          <p:nvPr/>
-        </p:nvSpPr>
-        <p:spPr>
-          <a:xfrm>
-            <a:off x="6187287" y="2029968"/>
+            <a:off x="6187287" y="2011680"/>
             <a:ext cx="914400" cy="31750"/>
           </a:xfrm>
           <a:prstGeom prst="rect">
@@ -4623,14 +6169,14 @@
       </p:sp>
       <p:sp>
         <p:nvSpPr>
-          <p:cNvPr id="43" name="Rectangle 42"/>
+          <p:cNvPr id="87" name="Rectangle 86"/>
           <p:cNvSpPr/>
           <p:nvPr/>
         </p:nvSpPr>
         <p:spPr>
           <a:xfrm>
-            <a:off x="6187287" y="2121408"/>
-            <a:ext cx="5748375" cy="365760"/>
+            <a:off x="6187287" y="2084832"/>
+            <a:ext cx="5748375" cy="274320"/>
           </a:xfrm>
           <a:prstGeom prst="rect">
             <a:avLst/>
@@ -4666,14 +6212,14 @@
       </p:sp>
       <p:sp>
         <p:nvSpPr>
-          <p:cNvPr id="44" name="TextBox 43"/>
-          <p:cNvSpPr txBox="1"/>
-          <p:nvPr/>
-        </p:nvSpPr>
-        <p:spPr>
-          <a:xfrm>
-            <a:off x="6297015" y="2203704"/>
-            <a:ext cx="4998567" cy="256032"/>
+          <p:cNvPr id="88" name="TextBox 87"/>
+          <p:cNvSpPr txBox="1"/>
+          <p:nvPr/>
+        </p:nvSpPr>
+        <p:spPr>
+          <a:xfrm>
+            <a:off x="6278727" y="2139696"/>
+            <a:ext cx="5016855" cy="201168"/>
           </a:xfrm>
           <a:prstGeom prst="rect">
             <a:avLst/>
@@ -4686,27 +6232,27 @@
           <a:p>
             <a:pPr algn="l"/>
             <a:r>
-              <a:rPr sz="950" b="0" i="0">
+              <a:rPr sz="850" b="0" i="0">
                 <a:solidFill>
                   <a:srgbClr val="1E1E1E"/>
                 </a:solidFill>
                 <a:latin typeface="Arial"/>
               </a:rPr>
-              <a:t>SDR hire Year 1 (base + ramp)</a:t>
-            </a:r>
-          </a:p>
-        </p:txBody>
-      </p:sp>
-      <p:sp>
-        <p:nvSpPr>
-          <p:cNvPr id="45" name="TextBox 44"/>
-          <p:cNvSpPr txBox="1"/>
-          <p:nvPr/>
-        </p:nvSpPr>
-        <p:spPr>
-          <a:xfrm>
-            <a:off x="11277295" y="2203704"/>
-            <a:ext cx="566928" cy="256032"/>
+              <a:t>SDR 1 — Year 1 (base + ramp)</a:t>
+            </a:r>
+          </a:p>
+        </p:txBody>
+      </p:sp>
+      <p:sp>
+        <p:nvSpPr>
+          <p:cNvPr id="89" name="TextBox 88"/>
+          <p:cNvSpPr txBox="1"/>
+          <p:nvPr/>
+        </p:nvSpPr>
+        <p:spPr>
+          <a:xfrm>
+            <a:off x="11295583" y="2139696"/>
+            <a:ext cx="566928" cy="201168"/>
           </a:xfrm>
           <a:prstGeom prst="rect">
             <a:avLst/>
@@ -4719,27 +6265,27 @@
           <a:p>
             <a:pPr algn="r"/>
             <a:r>
-              <a:rPr sz="950" b="0" i="0">
+              <a:rPr sz="850" b="0" i="0">
                 <a:solidFill>
                   <a:srgbClr val="1E1E1E"/>
                 </a:solidFill>
                 <a:latin typeface="Arial"/>
               </a:rPr>
-              <a:t>$110K</a:t>
-            </a:r>
-          </a:p>
-        </p:txBody>
-      </p:sp>
-      <p:sp>
-        <p:nvSpPr>
-          <p:cNvPr id="46" name="Rectangle 45"/>
+              <a:t>$50K</a:t>
+            </a:r>
+          </a:p>
+        </p:txBody>
+      </p:sp>
+      <p:sp>
+        <p:nvSpPr>
+          <p:cNvPr id="90" name="Rectangle 89"/>
           <p:cNvSpPr/>
           <p:nvPr/>
         </p:nvSpPr>
         <p:spPr>
           <a:xfrm>
-            <a:off x="6187287" y="2487168"/>
-            <a:ext cx="5748375" cy="365760"/>
+            <a:off x="6187287" y="2359152"/>
+            <a:ext cx="5748375" cy="274320"/>
           </a:xfrm>
           <a:prstGeom prst="rect">
             <a:avLst/>
@@ -4775,14 +6321,14 @@
       </p:sp>
       <p:sp>
         <p:nvSpPr>
-          <p:cNvPr id="47" name="TextBox 46"/>
-          <p:cNvSpPr txBox="1"/>
-          <p:nvPr/>
-        </p:nvSpPr>
-        <p:spPr>
-          <a:xfrm>
-            <a:off x="6297015" y="2569464"/>
-            <a:ext cx="4998567" cy="256032"/>
+          <p:cNvPr id="91" name="TextBox 90"/>
+          <p:cNvSpPr txBox="1"/>
+          <p:nvPr/>
+        </p:nvSpPr>
+        <p:spPr>
+          <a:xfrm>
+            <a:off x="6278727" y="2414016"/>
+            <a:ext cx="5016855" cy="201168"/>
           </a:xfrm>
           <a:prstGeom prst="rect">
             <a:avLst/>
@@ -4795,27 +6341,27 @@
           <a:p>
             <a:pPr algn="l"/>
             <a:r>
-              <a:rPr sz="950" b="0" i="0">
+              <a:rPr sz="850" b="0" i="0">
                 <a:solidFill>
                   <a:srgbClr val="1E1E1E"/>
                 </a:solidFill>
                 <a:latin typeface="Arial"/>
               </a:rPr>
-              <a:t>M&amp;A dry powder</a:t>
-            </a:r>
-          </a:p>
-        </p:txBody>
-      </p:sp>
-      <p:sp>
-        <p:nvSpPr>
-          <p:cNvPr id="48" name="TextBox 47"/>
-          <p:cNvSpPr txBox="1"/>
-          <p:nvPr/>
-        </p:nvSpPr>
-        <p:spPr>
-          <a:xfrm>
-            <a:off x="11277295" y="2569464"/>
-            <a:ext cx="566928" cy="256032"/>
+              <a:t>SDR 2 — Year 2 reserve</a:t>
+            </a:r>
+          </a:p>
+        </p:txBody>
+      </p:sp>
+      <p:sp>
+        <p:nvSpPr>
+          <p:cNvPr id="92" name="TextBox 91"/>
+          <p:cNvSpPr txBox="1"/>
+          <p:nvPr/>
+        </p:nvSpPr>
+        <p:spPr>
+          <a:xfrm>
+            <a:off x="11295583" y="2414016"/>
+            <a:ext cx="566928" cy="201168"/>
           </a:xfrm>
           <a:prstGeom prst="rect">
             <a:avLst/>
@@ -4828,27 +6374,27 @@
           <a:p>
             <a:pPr algn="r"/>
             <a:r>
-              <a:rPr sz="950" b="0" i="0">
+              <a:rPr sz="850" b="0" i="0">
                 <a:solidFill>
                   <a:srgbClr val="1E1E1E"/>
                 </a:solidFill>
                 <a:latin typeface="Arial"/>
               </a:rPr>
-              <a:t>$130K</a:t>
-            </a:r>
-          </a:p>
-        </p:txBody>
-      </p:sp>
-      <p:sp>
-        <p:nvSpPr>
-          <p:cNvPr id="49" name="Rectangle 48"/>
+              <a:t>$25K</a:t>
+            </a:r>
+          </a:p>
+        </p:txBody>
+      </p:sp>
+      <p:sp>
+        <p:nvSpPr>
+          <p:cNvPr id="93" name="Rectangle 92"/>
           <p:cNvSpPr/>
           <p:nvPr/>
         </p:nvSpPr>
         <p:spPr>
           <a:xfrm>
-            <a:off x="6187287" y="2852928"/>
-            <a:ext cx="5748375" cy="365760"/>
+            <a:off x="6187287" y="2633472"/>
+            <a:ext cx="5748375" cy="274320"/>
           </a:xfrm>
           <a:prstGeom prst="rect">
             <a:avLst/>
@@ -4884,14 +6430,14 @@
       </p:sp>
       <p:sp>
         <p:nvSpPr>
-          <p:cNvPr id="50" name="TextBox 49"/>
-          <p:cNvSpPr txBox="1"/>
-          <p:nvPr/>
-        </p:nvSpPr>
-        <p:spPr>
-          <a:xfrm>
-            <a:off x="6297015" y="2935224"/>
-            <a:ext cx="4998567" cy="256032"/>
+          <p:cNvPr id="94" name="TextBox 93"/>
+          <p:cNvSpPr txBox="1"/>
+          <p:nvPr/>
+        </p:nvSpPr>
+        <p:spPr>
+          <a:xfrm>
+            <a:off x="6278727" y="2688336"/>
+            <a:ext cx="5016855" cy="201168"/>
           </a:xfrm>
           <a:prstGeom prst="rect">
             <a:avLst/>
@@ -4904,27 +6450,27 @@
           <a:p>
             <a:pPr algn="l"/>
             <a:r>
-              <a:rPr sz="950" b="0" i="0">
+              <a:rPr sz="850" b="0" i="0">
                 <a:solidFill>
                   <a:srgbClr val="1E1E1E"/>
                 </a:solidFill>
                 <a:latin typeface="Arial"/>
               </a:rPr>
-              <a:t>Working capital cushion</a:t>
-            </a:r>
-          </a:p>
-        </p:txBody>
-      </p:sp>
-      <p:sp>
-        <p:nvSpPr>
-          <p:cNvPr id="51" name="TextBox 50"/>
-          <p:cNvSpPr txBox="1"/>
-          <p:nvPr/>
-        </p:nvSpPr>
-        <p:spPr>
-          <a:xfrm>
-            <a:off x="11277295" y="2935224"/>
-            <a:ext cx="566928" cy="256032"/>
+              <a:t>Project manager</a:t>
+            </a:r>
+          </a:p>
+        </p:txBody>
+      </p:sp>
+      <p:sp>
+        <p:nvSpPr>
+          <p:cNvPr id="95" name="TextBox 94"/>
+          <p:cNvSpPr txBox="1"/>
+          <p:nvPr/>
+        </p:nvSpPr>
+        <p:spPr>
+          <a:xfrm>
+            <a:off x="11295583" y="2688336"/>
+            <a:ext cx="566928" cy="201168"/>
           </a:xfrm>
           <a:prstGeom prst="rect">
             <a:avLst/>
@@ -4937,27 +6483,27 @@
           <a:p>
             <a:pPr algn="r"/>
             <a:r>
-              <a:rPr sz="950" b="0" i="0">
+              <a:rPr sz="850" b="0" i="0">
                 <a:solidFill>
                   <a:srgbClr val="1E1E1E"/>
                 </a:solidFill>
                 <a:latin typeface="Arial"/>
               </a:rPr>
-              <a:t>$40K</a:t>
-            </a:r>
-          </a:p>
-        </p:txBody>
-      </p:sp>
-      <p:sp>
-        <p:nvSpPr>
-          <p:cNvPr id="52" name="Rectangle 51"/>
+              <a:t>$30K</a:t>
+            </a:r>
+          </a:p>
+        </p:txBody>
+      </p:sp>
+      <p:sp>
+        <p:nvSpPr>
+          <p:cNvPr id="96" name="Rectangle 95"/>
           <p:cNvSpPr/>
           <p:nvPr/>
         </p:nvSpPr>
         <p:spPr>
           <a:xfrm>
-            <a:off x="6187287" y="3218688"/>
-            <a:ext cx="5748375" cy="365760"/>
+            <a:off x="6187287" y="2907792"/>
+            <a:ext cx="5748375" cy="274320"/>
           </a:xfrm>
           <a:prstGeom prst="rect">
             <a:avLst/>
@@ -4993,14 +6539,14 @@
       </p:sp>
       <p:sp>
         <p:nvSpPr>
-          <p:cNvPr id="53" name="TextBox 52"/>
-          <p:cNvSpPr txBox="1"/>
-          <p:nvPr/>
-        </p:nvSpPr>
-        <p:spPr>
-          <a:xfrm>
-            <a:off x="6297015" y="3300984"/>
-            <a:ext cx="4998567" cy="256032"/>
+          <p:cNvPr id="97" name="TextBox 96"/>
+          <p:cNvSpPr txBox="1"/>
+          <p:nvPr/>
+        </p:nvSpPr>
+        <p:spPr>
+          <a:xfrm>
+            <a:off x="6278727" y="2962656"/>
+            <a:ext cx="5016855" cy="201168"/>
           </a:xfrm>
           <a:prstGeom prst="rect">
             <a:avLst/>
@@ -5013,12 +6559,448 @@
           <a:p>
             <a:pPr algn="l"/>
             <a:r>
-              <a:rPr sz="950" b="0" i="0">
+              <a:rPr sz="850" b="0" i="0">
                 <a:solidFill>
                   <a:srgbClr val="1E1E1E"/>
                 </a:solidFill>
                 <a:latin typeface="Arial"/>
               </a:rPr>
+              <a:t>Offshore bookkeeper</a:t>
+            </a:r>
+          </a:p>
+        </p:txBody>
+      </p:sp>
+      <p:sp>
+        <p:nvSpPr>
+          <p:cNvPr id="98" name="TextBox 97"/>
+          <p:cNvSpPr txBox="1"/>
+          <p:nvPr/>
+        </p:nvSpPr>
+        <p:spPr>
+          <a:xfrm>
+            <a:off x="11295583" y="2962656"/>
+            <a:ext cx="566928" cy="201168"/>
+          </a:xfrm>
+          <a:prstGeom prst="rect">
+            <a:avLst/>
+          </a:prstGeom>
+          <a:noFill/>
+        </p:spPr>
+        <p:txBody>
+          <a:bodyPr wrap="square" anchor="t"/>
+          <a:lstStyle/>
+          <a:p>
+            <a:pPr algn="r"/>
+            <a:r>
+              <a:rPr sz="850" b="0" i="0">
+                <a:solidFill>
+                  <a:srgbClr val="1E1E1E"/>
+                </a:solidFill>
+                <a:latin typeface="Arial"/>
+              </a:rPr>
+              <a:t>$15K</a:t>
+            </a:r>
+          </a:p>
+        </p:txBody>
+      </p:sp>
+      <p:sp>
+        <p:nvSpPr>
+          <p:cNvPr id="99" name="Rectangle 98"/>
+          <p:cNvSpPr/>
+          <p:nvPr/>
+        </p:nvSpPr>
+        <p:spPr>
+          <a:xfrm>
+            <a:off x="6187287" y="3182112"/>
+            <a:ext cx="5748375" cy="274320"/>
+          </a:xfrm>
+          <a:prstGeom prst="rect">
+            <a:avLst/>
+          </a:prstGeom>
+          <a:solidFill>
+            <a:srgbClr val="F3F3F3"/>
+          </a:solidFill>
+          <a:ln>
+            <a:noFill/>
+          </a:ln>
+        </p:spPr>
+        <p:style>
+          <a:lnRef idx="1">
+            <a:schemeClr val="accent1"/>
+          </a:lnRef>
+          <a:fillRef idx="3">
+            <a:schemeClr val="accent1"/>
+          </a:fillRef>
+          <a:effectRef idx="2">
+            <a:schemeClr val="accent1"/>
+          </a:effectRef>
+          <a:fontRef idx="minor">
+            <a:schemeClr val="lt1"/>
+          </a:fontRef>
+        </p:style>
+        <p:txBody>
+          <a:bodyPr rtlCol="0" anchor="ctr"/>
+          <a:lstStyle/>
+          <a:p>
+            <a:pPr algn="ctr"/>
+          </a:p>
+        </p:txBody>
+      </p:sp>
+      <p:sp>
+        <p:nvSpPr>
+          <p:cNvPr id="100" name="TextBox 99"/>
+          <p:cNvSpPr txBox="1"/>
+          <p:nvPr/>
+        </p:nvSpPr>
+        <p:spPr>
+          <a:xfrm>
+            <a:off x="6278727" y="3236976"/>
+            <a:ext cx="5016855" cy="201168"/>
+          </a:xfrm>
+          <a:prstGeom prst="rect">
+            <a:avLst/>
+          </a:prstGeom>
+          <a:noFill/>
+        </p:spPr>
+        <p:txBody>
+          <a:bodyPr wrap="square" anchor="t"/>
+          <a:lstStyle/>
+          <a:p>
+            <a:pPr algn="l"/>
+            <a:r>
+              <a:rPr sz="850" b="0" i="0">
+                <a:solidFill>
+                  <a:srgbClr val="1E1E1E"/>
+                </a:solidFill>
+                <a:latin typeface="Arial"/>
+              </a:rPr>
+              <a:t>GovCon analyst</a:t>
+            </a:r>
+          </a:p>
+        </p:txBody>
+      </p:sp>
+      <p:sp>
+        <p:nvSpPr>
+          <p:cNvPr id="101" name="TextBox 100"/>
+          <p:cNvSpPr txBox="1"/>
+          <p:nvPr/>
+        </p:nvSpPr>
+        <p:spPr>
+          <a:xfrm>
+            <a:off x="11295583" y="3236976"/>
+            <a:ext cx="566928" cy="201168"/>
+          </a:xfrm>
+          <a:prstGeom prst="rect">
+            <a:avLst/>
+          </a:prstGeom>
+          <a:noFill/>
+        </p:spPr>
+        <p:txBody>
+          <a:bodyPr wrap="square" anchor="t"/>
+          <a:lstStyle/>
+          <a:p>
+            <a:pPr algn="r"/>
+            <a:r>
+              <a:rPr sz="850" b="0" i="0">
+                <a:solidFill>
+                  <a:srgbClr val="1E1E1E"/>
+                </a:solidFill>
+                <a:latin typeface="Arial"/>
+              </a:rPr>
+              <a:t>$12K</a:t>
+            </a:r>
+          </a:p>
+        </p:txBody>
+      </p:sp>
+      <p:sp>
+        <p:nvSpPr>
+          <p:cNvPr id="102" name="Rectangle 101"/>
+          <p:cNvSpPr/>
+          <p:nvPr/>
+        </p:nvSpPr>
+        <p:spPr>
+          <a:xfrm>
+            <a:off x="6187287" y="3456432"/>
+            <a:ext cx="5748375" cy="274320"/>
+          </a:xfrm>
+          <a:prstGeom prst="rect">
+            <a:avLst/>
+          </a:prstGeom>
+          <a:solidFill>
+            <a:srgbClr val="FFFFFF"/>
+          </a:solidFill>
+          <a:ln>
+            <a:noFill/>
+          </a:ln>
+        </p:spPr>
+        <p:style>
+          <a:lnRef idx="1">
+            <a:schemeClr val="accent1"/>
+          </a:lnRef>
+          <a:fillRef idx="3">
+            <a:schemeClr val="accent1"/>
+          </a:fillRef>
+          <a:effectRef idx="2">
+            <a:schemeClr val="accent1"/>
+          </a:effectRef>
+          <a:fontRef idx="minor">
+            <a:schemeClr val="lt1"/>
+          </a:fontRef>
+        </p:style>
+        <p:txBody>
+          <a:bodyPr rtlCol="0" anchor="ctr"/>
+          <a:lstStyle/>
+          <a:p>
+            <a:pPr algn="ctr"/>
+          </a:p>
+        </p:txBody>
+      </p:sp>
+      <p:sp>
+        <p:nvSpPr>
+          <p:cNvPr id="103" name="TextBox 102"/>
+          <p:cNvSpPr txBox="1"/>
+          <p:nvPr/>
+        </p:nvSpPr>
+        <p:spPr>
+          <a:xfrm>
+            <a:off x="6278727" y="3511296"/>
+            <a:ext cx="5016855" cy="201168"/>
+          </a:xfrm>
+          <a:prstGeom prst="rect">
+            <a:avLst/>
+          </a:prstGeom>
+          <a:noFill/>
+        </p:spPr>
+        <p:txBody>
+          <a:bodyPr wrap="square" anchor="t"/>
+          <a:lstStyle/>
+          <a:p>
+            <a:pPr algn="l"/>
+            <a:r>
+              <a:rPr sz="850" b="0" i="0">
+                <a:solidFill>
+                  <a:srgbClr val="1E1E1E"/>
+                </a:solidFill>
+                <a:latin typeface="Arial"/>
+              </a:rPr>
+              <a:t>Office manager (offshore, part-time)</a:t>
+            </a:r>
+          </a:p>
+        </p:txBody>
+      </p:sp>
+      <p:sp>
+        <p:nvSpPr>
+          <p:cNvPr id="104" name="TextBox 103"/>
+          <p:cNvSpPr txBox="1"/>
+          <p:nvPr/>
+        </p:nvSpPr>
+        <p:spPr>
+          <a:xfrm>
+            <a:off x="11295583" y="3511296"/>
+            <a:ext cx="566928" cy="201168"/>
+          </a:xfrm>
+          <a:prstGeom prst="rect">
+            <a:avLst/>
+          </a:prstGeom>
+          <a:noFill/>
+        </p:spPr>
+        <p:txBody>
+          <a:bodyPr wrap="square" anchor="t"/>
+          <a:lstStyle/>
+          <a:p>
+            <a:pPr algn="r"/>
+            <a:r>
+              <a:rPr sz="850" b="0" i="0">
+                <a:solidFill>
+                  <a:srgbClr val="1E1E1E"/>
+                </a:solidFill>
+                <a:latin typeface="Arial"/>
+              </a:rPr>
+              <a:t>$10K</a:t>
+            </a:r>
+          </a:p>
+        </p:txBody>
+      </p:sp>
+      <p:sp>
+        <p:nvSpPr>
+          <p:cNvPr id="105" name="Rectangle 104"/>
+          <p:cNvSpPr/>
+          <p:nvPr/>
+        </p:nvSpPr>
+        <p:spPr>
+          <a:xfrm>
+            <a:off x="6187287" y="3730752"/>
+            <a:ext cx="5748375" cy="274320"/>
+          </a:xfrm>
+          <a:prstGeom prst="rect">
+            <a:avLst/>
+          </a:prstGeom>
+          <a:solidFill>
+            <a:srgbClr val="F3F3F3"/>
+          </a:solidFill>
+          <a:ln>
+            <a:noFill/>
+          </a:ln>
+        </p:spPr>
+        <p:style>
+          <a:lnRef idx="1">
+            <a:schemeClr val="accent1"/>
+          </a:lnRef>
+          <a:fillRef idx="3">
+            <a:schemeClr val="accent1"/>
+          </a:fillRef>
+          <a:effectRef idx="2">
+            <a:schemeClr val="accent1"/>
+          </a:effectRef>
+          <a:fontRef idx="minor">
+            <a:schemeClr val="lt1"/>
+          </a:fontRef>
+        </p:style>
+        <p:txBody>
+          <a:bodyPr rtlCol="0" anchor="ctr"/>
+          <a:lstStyle/>
+          <a:p>
+            <a:pPr algn="ctr"/>
+          </a:p>
+        </p:txBody>
+      </p:sp>
+      <p:sp>
+        <p:nvSpPr>
+          <p:cNvPr id="106" name="TextBox 105"/>
+          <p:cNvSpPr txBox="1"/>
+          <p:nvPr/>
+        </p:nvSpPr>
+        <p:spPr>
+          <a:xfrm>
+            <a:off x="6278727" y="3785616"/>
+            <a:ext cx="5016855" cy="201168"/>
+          </a:xfrm>
+          <a:prstGeom prst="rect">
+            <a:avLst/>
+          </a:prstGeom>
+          <a:noFill/>
+        </p:spPr>
+        <p:txBody>
+          <a:bodyPr wrap="square" anchor="t"/>
+          <a:lstStyle/>
+          <a:p>
+            <a:pPr algn="l"/>
+            <a:r>
+              <a:rPr sz="850" b="0" i="0">
+                <a:solidFill>
+                  <a:srgbClr val="1E1E1E"/>
+                </a:solidFill>
+                <a:latin typeface="Arial"/>
+              </a:rPr>
+              <a:t>Working capital cushion</a:t>
+            </a:r>
+          </a:p>
+        </p:txBody>
+      </p:sp>
+      <p:sp>
+        <p:nvSpPr>
+          <p:cNvPr id="107" name="TextBox 106"/>
+          <p:cNvSpPr txBox="1"/>
+          <p:nvPr/>
+        </p:nvSpPr>
+        <p:spPr>
+          <a:xfrm>
+            <a:off x="11295583" y="3785616"/>
+            <a:ext cx="566928" cy="201168"/>
+          </a:xfrm>
+          <a:prstGeom prst="rect">
+            <a:avLst/>
+          </a:prstGeom>
+          <a:noFill/>
+        </p:spPr>
+        <p:txBody>
+          <a:bodyPr wrap="square" anchor="t"/>
+          <a:lstStyle/>
+          <a:p>
+            <a:pPr algn="r"/>
+            <a:r>
+              <a:rPr sz="850" b="0" i="0">
+                <a:solidFill>
+                  <a:srgbClr val="1E1E1E"/>
+                </a:solidFill>
+                <a:latin typeface="Arial"/>
+              </a:rPr>
+              <a:t>$30K</a:t>
+            </a:r>
+          </a:p>
+        </p:txBody>
+      </p:sp>
+      <p:sp>
+        <p:nvSpPr>
+          <p:cNvPr id="108" name="Rectangle 107"/>
+          <p:cNvSpPr/>
+          <p:nvPr/>
+        </p:nvSpPr>
+        <p:spPr>
+          <a:xfrm>
+            <a:off x="6187287" y="4005072"/>
+            <a:ext cx="5748375" cy="274320"/>
+          </a:xfrm>
+          <a:prstGeom prst="rect">
+            <a:avLst/>
+          </a:prstGeom>
+          <a:solidFill>
+            <a:srgbClr val="FFFFFF"/>
+          </a:solidFill>
+          <a:ln>
+            <a:noFill/>
+          </a:ln>
+        </p:spPr>
+        <p:style>
+          <a:lnRef idx="1">
+            <a:schemeClr val="accent1"/>
+          </a:lnRef>
+          <a:fillRef idx="3">
+            <a:schemeClr val="accent1"/>
+          </a:fillRef>
+          <a:effectRef idx="2">
+            <a:schemeClr val="accent1"/>
+          </a:effectRef>
+          <a:fontRef idx="minor">
+            <a:schemeClr val="lt1"/>
+          </a:fontRef>
+        </p:style>
+        <p:txBody>
+          <a:bodyPr rtlCol="0" anchor="ctr"/>
+          <a:lstStyle/>
+          <a:p>
+            <a:pPr algn="ctr"/>
+          </a:p>
+        </p:txBody>
+      </p:sp>
+      <p:sp>
+        <p:nvSpPr>
+          <p:cNvPr id="109" name="TextBox 108"/>
+          <p:cNvSpPr txBox="1"/>
+          <p:nvPr/>
+        </p:nvSpPr>
+        <p:spPr>
+          <a:xfrm>
+            <a:off x="6278727" y="4059936"/>
+            <a:ext cx="5016855" cy="201168"/>
+          </a:xfrm>
+          <a:prstGeom prst="rect">
+            <a:avLst/>
+          </a:prstGeom>
+          <a:noFill/>
+        </p:spPr>
+        <p:txBody>
+          <a:bodyPr wrap="square" anchor="t"/>
+          <a:lstStyle/>
+          <a:p>
+            <a:pPr algn="l"/>
+            <a:r>
+              <a:rPr sz="850" b="0" i="0">
+                <a:solidFill>
+                  <a:srgbClr val="1E1E1E"/>
+                </a:solidFill>
+                <a:latin typeface="Arial"/>
+              </a:rPr>
               <a:t>Founder comp increase</a:t>
             </a:r>
           </a:p>
@@ -5026,14 +7008,14 @@
       </p:sp>
       <p:sp>
         <p:nvSpPr>
-          <p:cNvPr id="54" name="TextBox 53"/>
-          <p:cNvSpPr txBox="1"/>
-          <p:nvPr/>
-        </p:nvSpPr>
-        <p:spPr>
-          <a:xfrm>
-            <a:off x="11277295" y="3300984"/>
-            <a:ext cx="566928" cy="256032"/>
+          <p:cNvPr id="110" name="TextBox 109"/>
+          <p:cNvSpPr txBox="1"/>
+          <p:nvPr/>
+        </p:nvSpPr>
+        <p:spPr>
+          <a:xfrm>
+            <a:off x="11295583" y="4059936"/>
+            <a:ext cx="566928" cy="201168"/>
           </a:xfrm>
           <a:prstGeom prst="rect">
             <a:avLst/>
@@ -5046,26 +7028,135 @@
           <a:p>
             <a:pPr algn="r"/>
             <a:r>
-              <a:rPr sz="950" b="0" i="0">
+              <a:rPr sz="850" b="0" i="0">
                 <a:solidFill>
                   <a:srgbClr val="1E1E1E"/>
                 </a:solidFill>
                 <a:latin typeface="Arial"/>
               </a:rPr>
-              <a:t>$20K</a:t>
-            </a:r>
-          </a:p>
-        </p:txBody>
-      </p:sp>
-      <p:sp>
-        <p:nvSpPr>
-          <p:cNvPr id="55" name="Rectangle 54"/>
+              <a:t>$18K</a:t>
+            </a:r>
+          </a:p>
+        </p:txBody>
+      </p:sp>
+      <p:sp>
+        <p:nvSpPr>
+          <p:cNvPr id="111" name="Rectangle 110"/>
           <p:cNvSpPr/>
           <p:nvPr/>
         </p:nvSpPr>
         <p:spPr>
           <a:xfrm>
-            <a:off x="6187287" y="3584448"/>
+            <a:off x="6187287" y="4279392"/>
+            <a:ext cx="5748375" cy="274320"/>
+          </a:xfrm>
+          <a:prstGeom prst="rect">
+            <a:avLst/>
+          </a:prstGeom>
+          <a:solidFill>
+            <a:srgbClr val="F3F3F3"/>
+          </a:solidFill>
+          <a:ln>
+            <a:noFill/>
+          </a:ln>
+        </p:spPr>
+        <p:style>
+          <a:lnRef idx="1">
+            <a:schemeClr val="accent1"/>
+          </a:lnRef>
+          <a:fillRef idx="3">
+            <a:schemeClr val="accent1"/>
+          </a:fillRef>
+          <a:effectRef idx="2">
+            <a:schemeClr val="accent1"/>
+          </a:effectRef>
+          <a:fontRef idx="minor">
+            <a:schemeClr val="lt1"/>
+          </a:fontRef>
+        </p:style>
+        <p:txBody>
+          <a:bodyPr rtlCol="0" anchor="ctr"/>
+          <a:lstStyle/>
+          <a:p>
+            <a:pPr algn="ctr"/>
+          </a:p>
+        </p:txBody>
+      </p:sp>
+      <p:sp>
+        <p:nvSpPr>
+          <p:cNvPr id="112" name="TextBox 111"/>
+          <p:cNvSpPr txBox="1"/>
+          <p:nvPr/>
+        </p:nvSpPr>
+        <p:spPr>
+          <a:xfrm>
+            <a:off x="6278727" y="4334256"/>
+            <a:ext cx="5016855" cy="201168"/>
+          </a:xfrm>
+          <a:prstGeom prst="rect">
+            <a:avLst/>
+          </a:prstGeom>
+          <a:noFill/>
+        </p:spPr>
+        <p:txBody>
+          <a:bodyPr wrap="square" anchor="t"/>
+          <a:lstStyle/>
+          <a:p>
+            <a:pPr algn="l"/>
+            <a:r>
+              <a:rPr sz="850" b="0" i="0">
+                <a:solidFill>
+                  <a:srgbClr val="1E1E1E"/>
+                </a:solidFill>
+                <a:latin typeface="Arial"/>
+              </a:rPr>
+              <a:t>Contingency buffer</a:t>
+            </a:r>
+          </a:p>
+        </p:txBody>
+      </p:sp>
+      <p:sp>
+        <p:nvSpPr>
+          <p:cNvPr id="113" name="TextBox 112"/>
+          <p:cNvSpPr txBox="1"/>
+          <p:nvPr/>
+        </p:nvSpPr>
+        <p:spPr>
+          <a:xfrm>
+            <a:off x="11295583" y="4334256"/>
+            <a:ext cx="566928" cy="201168"/>
+          </a:xfrm>
+          <a:prstGeom prst="rect">
+            <a:avLst/>
+          </a:prstGeom>
+          <a:noFill/>
+        </p:spPr>
+        <p:txBody>
+          <a:bodyPr wrap="square" anchor="t"/>
+          <a:lstStyle/>
+          <a:p>
+            <a:pPr algn="r"/>
+            <a:r>
+              <a:rPr sz="850" b="0" i="0">
+                <a:solidFill>
+                  <a:srgbClr val="1E1E1E"/>
+                </a:solidFill>
+                <a:latin typeface="Arial"/>
+              </a:rPr>
+              <a:t>$10K</a:t>
+            </a:r>
+          </a:p>
+        </p:txBody>
+      </p:sp>
+      <p:sp>
+        <p:nvSpPr>
+          <p:cNvPr id="114" name="Rectangle 113"/>
+          <p:cNvSpPr/>
+          <p:nvPr/>
+        </p:nvSpPr>
+        <p:spPr>
+          <a:xfrm>
+            <a:off x="6187287" y="4553712"/>
             <a:ext cx="5748375" cy="19050"/>
           </a:xfrm>
           <a:prstGeom prst="rect">
@@ -5102,14 +7193,14 @@
       </p:sp>
       <p:sp>
         <p:nvSpPr>
-          <p:cNvPr id="56" name="Rectangle 55"/>
+          <p:cNvPr id="115" name="Rectangle 114"/>
           <p:cNvSpPr/>
           <p:nvPr/>
         </p:nvSpPr>
         <p:spPr>
           <a:xfrm>
-            <a:off x="6187287" y="3584448"/>
-            <a:ext cx="5748375" cy="365760"/>
+            <a:off x="6187287" y="4553712"/>
+            <a:ext cx="5748375" cy="274320"/>
           </a:xfrm>
           <a:prstGeom prst="rect">
             <a:avLst/>
@@ -5145,14 +7236,14 @@
       </p:sp>
       <p:sp>
         <p:nvSpPr>
-          <p:cNvPr id="57" name="TextBox 56"/>
-          <p:cNvSpPr txBox="1"/>
-          <p:nvPr/>
-        </p:nvSpPr>
-        <p:spPr>
-          <a:xfrm>
-            <a:off x="6297015" y="3666744"/>
-            <a:ext cx="4998567" cy="256032"/>
+          <p:cNvPr id="116" name="TextBox 115"/>
+          <p:cNvSpPr txBox="1"/>
+          <p:nvPr/>
+        </p:nvSpPr>
+        <p:spPr>
+          <a:xfrm>
+            <a:off x="6278727" y="4608576"/>
+            <a:ext cx="5016855" cy="201168"/>
           </a:xfrm>
           <a:prstGeom prst="rect">
             <a:avLst/>
@@ -5165,7 +7256,7 @@
           <a:p>
             <a:pPr algn="l"/>
             <a:r>
-              <a:rPr sz="950" b="1" i="0">
+              <a:rPr sz="850" b="1" i="0">
                 <a:solidFill>
                   <a:srgbClr val="B84C30"/>
                 </a:solidFill>
@@ -5178,14 +7269,14 @@
       </p:sp>
       <p:sp>
         <p:nvSpPr>
-          <p:cNvPr id="58" name="TextBox 57"/>
-          <p:cNvSpPr txBox="1"/>
-          <p:nvPr/>
-        </p:nvSpPr>
-        <p:spPr>
-          <a:xfrm>
-            <a:off x="11277295" y="3666744"/>
-            <a:ext cx="566928" cy="256032"/>
+          <p:cNvPr id="117" name="TextBox 116"/>
+          <p:cNvSpPr txBox="1"/>
+          <p:nvPr/>
+        </p:nvSpPr>
+        <p:spPr>
+          <a:xfrm>
+            <a:off x="11295583" y="4608576"/>
+            <a:ext cx="566928" cy="201168"/>
           </a:xfrm>
           <a:prstGeom prst="rect">
             <a:avLst/>
@@ -5198,27 +7289,27 @@
           <a:p>
             <a:pPr algn="r"/>
             <a:r>
-              <a:rPr sz="950" b="1" i="0">
+              <a:rPr sz="850" b="1" i="0">
                 <a:solidFill>
                   <a:srgbClr val="B84C30"/>
                 </a:solidFill>
                 <a:latin typeface="Arial"/>
               </a:rPr>
-              <a:t>$300K</a:t>
-            </a:r>
-          </a:p>
-        </p:txBody>
-      </p:sp>
-      <p:sp>
-        <p:nvSpPr>
-          <p:cNvPr id="59" name="Rectangle 58"/>
+              <a:t>$200K</a:t>
+            </a:r>
+          </a:p>
+        </p:txBody>
+      </p:sp>
+      <p:sp>
+        <p:nvSpPr>
+          <p:cNvPr id="118" name="Rectangle 117"/>
           <p:cNvSpPr/>
           <p:nvPr/>
         </p:nvSpPr>
         <p:spPr>
           <a:xfrm>
-            <a:off x="6187287" y="4133088"/>
-            <a:ext cx="5748375" cy="1243584"/>
+            <a:off x="6187287" y="4956048"/>
+            <a:ext cx="5748375" cy="1005840"/>
           </a:xfrm>
           <a:prstGeom prst="rect">
             <a:avLst/>
@@ -5256,14 +7347,14 @@
       </p:sp>
       <p:sp>
         <p:nvSpPr>
-          <p:cNvPr id="60" name="TextBox 59"/>
-          <p:cNvSpPr txBox="1"/>
-          <p:nvPr/>
-        </p:nvSpPr>
-        <p:spPr>
-          <a:xfrm>
-            <a:off x="6315303" y="4224528"/>
-            <a:ext cx="1280160" cy="201168"/>
+          <p:cNvPr id="119" name="TextBox 118"/>
+          <p:cNvSpPr txBox="1"/>
+          <p:nvPr/>
+        </p:nvSpPr>
+        <p:spPr>
+          <a:xfrm>
+            <a:off x="6297015" y="5038344"/>
+            <a:ext cx="1097280" cy="201168"/>
           </a:xfrm>
           <a:prstGeom prst="rect">
             <a:avLst/>
@@ -5289,14 +7380,14 @@
       </p:sp>
       <p:sp>
         <p:nvSpPr>
-          <p:cNvPr id="61" name="TextBox 60"/>
-          <p:cNvSpPr txBox="1"/>
-          <p:nvPr/>
-        </p:nvSpPr>
-        <p:spPr>
-          <a:xfrm>
-            <a:off x="6315303" y="4462272"/>
-            <a:ext cx="5547207" cy="256032"/>
+          <p:cNvPr id="120" name="TextBox 119"/>
+          <p:cNvSpPr txBox="1"/>
+          <p:nvPr/>
+        </p:nvSpPr>
+        <p:spPr>
+          <a:xfrm>
+            <a:off x="6297015" y="5266944"/>
+            <a:ext cx="5547207" cy="219456"/>
           </a:xfrm>
           <a:prstGeom prst="rect">
             <a:avLst/>
@@ -5322,14 +7413,14 @@
       </p:sp>
       <p:sp>
         <p:nvSpPr>
-          <p:cNvPr id="62" name="TextBox 61"/>
-          <p:cNvSpPr txBox="1"/>
-          <p:nvPr/>
-        </p:nvSpPr>
-        <p:spPr>
-          <a:xfrm>
-            <a:off x="6315303" y="4718304"/>
-            <a:ext cx="5547207" cy="256032"/>
+          <p:cNvPr id="121" name="TextBox 120"/>
+          <p:cNvSpPr txBox="1"/>
+          <p:nvPr/>
+        </p:nvSpPr>
+        <p:spPr>
+          <a:xfrm>
+            <a:off x="6297015" y="5486400"/>
+            <a:ext cx="5547207" cy="219456"/>
           </a:xfrm>
           <a:prstGeom prst="rect">
             <a:avLst/>
@@ -5355,14 +7446,14 @@
       </p:sp>
       <p:sp>
         <p:nvSpPr>
-          <p:cNvPr id="63" name="TextBox 62"/>
-          <p:cNvSpPr txBox="1"/>
-          <p:nvPr/>
-        </p:nvSpPr>
-        <p:spPr>
-          <a:xfrm>
-            <a:off x="6315303" y="4974336"/>
-            <a:ext cx="5547207" cy="256032"/>
+          <p:cNvPr id="122" name="TextBox 121"/>
+          <p:cNvSpPr txBox="1"/>
+          <p:nvPr/>
+        </p:nvSpPr>
+        <p:spPr>
+          <a:xfrm>
+            <a:off x="6297015" y="5705856"/>
+            <a:ext cx="5547207" cy="219456"/>
           </a:xfrm>
           <a:prstGeom prst="rect">
             <a:avLst/>
@@ -5388,7 +7479,7 @@
       </p:sp>
       <p:sp>
         <p:nvSpPr>
-          <p:cNvPr id="64" name="Rectangle 63"/>
+          <p:cNvPr id="123" name="Rectangle 122"/>
           <p:cNvSpPr/>
           <p:nvPr/>
         </p:nvSpPr>
@@ -5431,27 +7522,27 @@
       </p:sp>
       <p:sp>
         <p:nvSpPr>
-          <p:cNvPr id="65" name="TextBox 64"/>
+          <p:cNvPr id="124" name="TextBox 123"/>
           <p:cNvSpPr txBox="1"/>
           <p:nvPr/>
         </p:nvSpPr>
         <p:spPr>
           <a:xfrm>
             <a:off x="182880" y="6592824"/>
-            <a:ext cx="11825935" cy="219456"/>
-          </a:xfrm>
-          <a:prstGeom prst="rect">
-            <a:avLst/>
-          </a:prstGeom>
-          <a:noFill/>
-        </p:spPr>
-        <p:txBody>
-          <a:bodyPr wrap="square" anchor="t"/>
-          <a:lstStyle/>
-          <a:p>
-            <a:pPr algn="ctr"/>
-            <a:r>
-              <a:rPr sz="750" b="0" i="0">
+            <a:ext cx="11825935" cy="246888"/>
+          </a:xfrm>
+          <a:prstGeom prst="rect">
+            <a:avLst/>
+          </a:prstGeom>
+          <a:noFill/>
+        </p:spPr>
+        <p:txBody>
+          <a:bodyPr wrap="square" anchor="t"/>
+          <a:lstStyle/>
+          <a:p>
+            <a:pPr algn="ctr"/>
+            <a:r>
+              <a:rPr sz="700" b="0" i="0">
                 <a:solidFill>
                   <a:srgbClr val="A8BAC5"/>
                 </a:solidFill>
@@ -5618,7 +7709,7 @@
         <p:spPr>
           <a:xfrm>
             <a:off x="256032" y="82296"/>
-            <a:ext cx="8686800" cy="365760"/>
+            <a:ext cx="8229600" cy="365760"/>
           </a:xfrm>
           <a:prstGeom prst="rect">
             <a:avLst/>
@@ -5631,7 +7722,7 @@
           <a:p>
             <a:pPr algn="l"/>
             <a:r>
-              <a:rPr sz="2000" b="1" i="0">
+              <a:rPr sz="1600" b="1" i="0">
                 <a:solidFill>
                   <a:srgbClr val="FFFFFF"/>
                 </a:solidFill>
@@ -5664,7 +7755,7 @@
           <a:p>
             <a:pPr algn="l"/>
             <a:r>
-              <a:rPr sz="1000" b="0" i="0">
+              <a:rPr sz="900" b="0" i="0">
                 <a:solidFill>
                   <a:srgbClr val="A8BAC5"/>
                 </a:solidFill>
@@ -7459,7 +9550,7 @@
                 </a:solidFill>
                 <a:latin typeface="Arial"/>
               </a:rPr>
-              <a:t>SDR 1 (this raise): $50–75K MRR growth per quarter</a:t>
+              <a:t>SDR 1 (raise funded): $50–75K MRR growth per quarter</a:t>
             </a:r>
           </a:p>
         </p:txBody>
@@ -7513,7 +9604,7 @@
                 </a:solidFill>
                 <a:latin typeface="Arial"/>
               </a:rPr>
-              <a:t>SDR 2 (yr 1–2, self-funded): +$50–75K+ MRR/qtr</a:t>
+              <a:t>SDR 2 (raise funded): additional $50–75K+ MRR/qtr</a:t>
             </a:r>
           </a:p>
         </p:txBody>
@@ -7643,7 +9734,7 @@
                 </a:solidFill>
                 <a:latin typeface="Arial"/>
               </a:rPr>
-              <a:t>Active acquisition closes, adding EBITDA to platform</a:t>
+              <a:t>SDR 3 added yr 3, ops-cash funded</a:t>
             </a:r>
           </a:p>
         </p:txBody>
@@ -7656,7 +9747,7 @@
         </p:nvSpPr>
         <p:spPr>
           <a:xfrm>
-            <a:off x="8246668" y="4448556"/>
+            <a:off x="8246668" y="4421124"/>
             <a:ext cx="54864" cy="54864"/>
           </a:xfrm>
           <a:prstGeom prst="rect">
@@ -7699,7 +9790,7 @@
         </p:nvSpPr>
         <p:spPr>
           <a:xfrm>
-            <a:off x="8356396" y="4389120"/>
+            <a:off x="8356396" y="4361688"/>
             <a:ext cx="3597554" cy="475488"/>
           </a:xfrm>
           <a:prstGeom prst="rect">
@@ -7719,7 +9810,7 @@
                 </a:solidFill>
                 <a:latin typeface="Arial"/>
               </a:rPr>
-              <a:t>Infrastructure scaled to handle and retain growth volume</a:t>
+              <a:t>Active acquisition closes mid yr 3 — EBITDA accretive at NewCo level</a:t>
             </a:r>
           </a:p>
         </p:txBody>
@@ -7732,7 +9823,7 @@
         </p:nvSpPr>
         <p:spPr>
           <a:xfrm>
-            <a:off x="8246668" y="4951476"/>
+            <a:off x="8246668" y="4896612"/>
             <a:ext cx="54864" cy="54864"/>
           </a:xfrm>
           <a:prstGeom prst="rect">
@@ -7775,7 +9866,7 @@
         </p:nvSpPr>
         <p:spPr>
           <a:xfrm>
-            <a:off x="8356396" y="4892040"/>
+            <a:off x="8356396" y="4837176"/>
             <a:ext cx="3597554" cy="475488"/>
           </a:xfrm>
           <a:prstGeom prst="rect">
@@ -7795,7 +9886,7 @@
                 </a:solidFill>
                 <a:latin typeface="Arial"/>
               </a:rPr>
-              <a:t>Path to $1M EBITDA in 5 years, organic + M&amp;A</a:t>
+              <a:t>Infrastructure scaled to handle and retain volume</a:t>
             </a:r>
           </a:p>
         </p:txBody>
@@ -7803,6 +9894,82 @@
       <p:sp>
         <p:nvSpPr>
           <p:cNvPr id="61" name="Rectangle 60"/>
+          <p:cNvSpPr/>
+          <p:nvPr/>
+        </p:nvSpPr>
+        <p:spPr>
+          <a:xfrm>
+            <a:off x="8246668" y="5372100"/>
+            <a:ext cx="54864" cy="54864"/>
+          </a:xfrm>
+          <a:prstGeom prst="rect">
+            <a:avLst/>
+          </a:prstGeom>
+          <a:solidFill>
+            <a:srgbClr val="B84C30"/>
+          </a:solidFill>
+          <a:ln>
+            <a:noFill/>
+          </a:ln>
+        </p:spPr>
+        <p:style>
+          <a:lnRef idx="1">
+            <a:schemeClr val="accent1"/>
+          </a:lnRef>
+          <a:fillRef idx="3">
+            <a:schemeClr val="accent1"/>
+          </a:fillRef>
+          <a:effectRef idx="2">
+            <a:schemeClr val="accent1"/>
+          </a:effectRef>
+          <a:fontRef idx="minor">
+            <a:schemeClr val="lt1"/>
+          </a:fontRef>
+        </p:style>
+        <p:txBody>
+          <a:bodyPr rtlCol="0" anchor="ctr"/>
+          <a:lstStyle/>
+          <a:p>
+            <a:pPr algn="ctr"/>
+          </a:p>
+        </p:txBody>
+      </p:sp>
+      <p:sp>
+        <p:nvSpPr>
+          <p:cNvPr id="62" name="TextBox 61"/>
+          <p:cNvSpPr txBox="1"/>
+          <p:nvPr/>
+        </p:nvSpPr>
+        <p:spPr>
+          <a:xfrm>
+            <a:off x="8356396" y="5312664"/>
+            <a:ext cx="3597554" cy="475488"/>
+          </a:xfrm>
+          <a:prstGeom prst="rect">
+            <a:avLst/>
+          </a:prstGeom>
+          <a:noFill/>
+        </p:spPr>
+        <p:txBody>
+          <a:bodyPr wrap="square" anchor="t"/>
+          <a:lstStyle/>
+          <a:p>
+            <a:pPr algn="l"/>
+            <a:r>
+              <a:rPr sz="900" b="0" i="0">
+                <a:solidFill>
+                  <a:srgbClr val="1E1E1E"/>
+                </a:solidFill>
+                <a:latin typeface="Arial"/>
+              </a:rPr>
+              <a:t>Path to $1M EBITDA in 4–5 years, organic + M&amp;A</a:t>
+            </a:r>
+          </a:p>
+        </p:txBody>
+      </p:sp>
+      <p:sp>
+        <p:nvSpPr>
+          <p:cNvPr id="63" name="Rectangle 62"/>
           <p:cNvSpPr/>
           <p:nvPr/>
         </p:nvSpPr>
@@ -7845,33 +10012,3722 @@
       </p:sp>
       <p:sp>
         <p:nvSpPr>
+          <p:cNvPr id="64" name="TextBox 63"/>
+          <p:cNvSpPr txBox="1"/>
+          <p:nvPr/>
+        </p:nvSpPr>
+        <p:spPr>
+          <a:xfrm>
+            <a:off x="182880" y="6592824"/>
+            <a:ext cx="11825935" cy="246888"/>
+          </a:xfrm>
+          <a:prstGeom prst="rect">
+            <a:avLst/>
+          </a:prstGeom>
+          <a:noFill/>
+        </p:spPr>
+        <p:txBody>
+          <a:bodyPr wrap="square" anchor="t"/>
+          <a:lstStyle/>
+          <a:p>
+            <a:pPr algn="ctr"/>
+            <a:r>
+              <a:rPr sz="700" b="0" i="0">
+                <a:solidFill>
+                  <a:srgbClr val="A8BAC5"/>
+                </a:solidFill>
+                <a:latin typeface="Arial"/>
+              </a:rPr>
+              <a:t>partnerships@maddogcleaning.com  ·  Confidential — not an offer to sell securities  ·  March 2026</a:t>
+            </a:r>
+          </a:p>
+        </p:txBody>
+      </p:sp>
+    </p:spTree>
+  </p:cSld>
+  <p:clrMapOvr>
+    <a:masterClrMapping/>
+  </p:clrMapOvr>
+</p:sld>
+</file>
+
+<file path=ppt/slides/slide3.xml><?xml version="1.0" encoding="utf-8"?>
+<p:sld xmlns:a="http://schemas.openxmlformats.org/drawingml/2006/main" xmlns:p="http://schemas.openxmlformats.org/presentationml/2006/main" xmlns:r="http://schemas.openxmlformats.org/officeDocument/2006/relationships">
+  <p:cSld>
+    <p:spTree>
+      <p:nvGrpSpPr>
+        <p:cNvPr id="1" name=""/>
+        <p:cNvGrpSpPr/>
+        <p:nvPr/>
+      </p:nvGrpSpPr>
+      <p:grpSpPr/>
+      <p:sp>
+        <p:nvSpPr>
+          <p:cNvPr id="2" name="Rectangle 1"/>
+          <p:cNvSpPr/>
+          <p:nvPr/>
+        </p:nvSpPr>
+        <p:spPr>
+          <a:xfrm>
+            <a:off x="0" y="0"/>
+            <a:ext cx="12191695" cy="6858000"/>
+          </a:xfrm>
+          <a:prstGeom prst="rect">
+            <a:avLst/>
+          </a:prstGeom>
+          <a:solidFill>
+            <a:srgbClr val="FFFFFF"/>
+          </a:solidFill>
+          <a:ln>
+            <a:noFill/>
+          </a:ln>
+        </p:spPr>
+        <p:style>
+          <a:lnRef idx="1">
+            <a:schemeClr val="accent1"/>
+          </a:lnRef>
+          <a:fillRef idx="3">
+            <a:schemeClr val="accent1"/>
+          </a:fillRef>
+          <a:effectRef idx="2">
+            <a:schemeClr val="accent1"/>
+          </a:effectRef>
+          <a:fontRef idx="minor">
+            <a:schemeClr val="lt1"/>
+          </a:fontRef>
+        </p:style>
+        <p:txBody>
+          <a:bodyPr rtlCol="0" anchor="ctr"/>
+          <a:lstStyle/>
+          <a:p>
+            <a:pPr algn="ctr"/>
+          </a:p>
+        </p:txBody>
+      </p:sp>
+      <p:sp>
+        <p:nvSpPr>
+          <p:cNvPr id="3" name="Rectangle 2"/>
+          <p:cNvSpPr/>
+          <p:nvPr/>
+        </p:nvSpPr>
+        <p:spPr>
+          <a:xfrm>
+            <a:off x="0" y="0"/>
+            <a:ext cx="12191695" cy="800100"/>
+          </a:xfrm>
+          <a:prstGeom prst="rect">
+            <a:avLst/>
+          </a:prstGeom>
+          <a:solidFill>
+            <a:srgbClr val="3D4F5C"/>
+          </a:solidFill>
+          <a:ln>
+            <a:noFill/>
+          </a:ln>
+        </p:spPr>
+        <p:style>
+          <a:lnRef idx="1">
+            <a:schemeClr val="accent1"/>
+          </a:lnRef>
+          <a:fillRef idx="3">
+            <a:schemeClr val="accent1"/>
+          </a:fillRef>
+          <a:effectRef idx="2">
+            <a:schemeClr val="accent1"/>
+          </a:effectRef>
+          <a:fontRef idx="minor">
+            <a:schemeClr val="lt1"/>
+          </a:fontRef>
+        </p:style>
+        <p:txBody>
+          <a:bodyPr rtlCol="0" anchor="ctr"/>
+          <a:lstStyle/>
+          <a:p>
+            <a:pPr algn="ctr"/>
+          </a:p>
+        </p:txBody>
+      </p:sp>
+      <p:sp>
+        <p:nvSpPr>
+          <p:cNvPr id="4" name="Rectangle 3"/>
+          <p:cNvSpPr/>
+          <p:nvPr/>
+        </p:nvSpPr>
+        <p:spPr>
+          <a:xfrm>
+            <a:off x="0" y="800100"/>
+            <a:ext cx="12191695" cy="38100"/>
+          </a:xfrm>
+          <a:prstGeom prst="rect">
+            <a:avLst/>
+          </a:prstGeom>
+          <a:solidFill>
+            <a:srgbClr val="B84C30"/>
+          </a:solidFill>
+          <a:ln>
+            <a:noFill/>
+          </a:ln>
+        </p:spPr>
+        <p:style>
+          <a:lnRef idx="1">
+            <a:schemeClr val="accent1"/>
+          </a:lnRef>
+          <a:fillRef idx="3">
+            <a:schemeClr val="accent1"/>
+          </a:fillRef>
+          <a:effectRef idx="2">
+            <a:schemeClr val="accent1"/>
+          </a:effectRef>
+          <a:fontRef idx="minor">
+            <a:schemeClr val="lt1"/>
+          </a:fontRef>
+        </p:style>
+        <p:txBody>
+          <a:bodyPr rtlCol="0" anchor="ctr"/>
+          <a:lstStyle/>
+          <a:p>
+            <a:pPr algn="ctr"/>
+          </a:p>
+        </p:txBody>
+      </p:sp>
+      <p:sp>
+        <p:nvSpPr>
+          <p:cNvPr id="5" name="TextBox 4"/>
+          <p:cNvSpPr txBox="1"/>
+          <p:nvPr/>
+        </p:nvSpPr>
+        <p:spPr>
+          <a:xfrm>
+            <a:off x="256032" y="82296"/>
+            <a:ext cx="8229600" cy="365760"/>
+          </a:xfrm>
+          <a:prstGeom prst="rect">
+            <a:avLst/>
+          </a:prstGeom>
+          <a:noFill/>
+        </p:spPr>
+        <p:txBody>
+          <a:bodyPr wrap="square" anchor="t"/>
+          <a:lstStyle/>
+          <a:p>
+            <a:pPr algn="l"/>
+            <a:r>
+              <a:rPr sz="1600" b="1" i="0">
+                <a:solidFill>
+                  <a:srgbClr val="FFFFFF"/>
+                </a:solidFill>
+                <a:latin typeface="Arial"/>
+              </a:rPr>
+              <a:t>4–5 year path to $1M+ EBITDA</a:t>
+            </a:r>
+          </a:p>
+        </p:txBody>
+      </p:sp>
+      <p:sp>
+        <p:nvSpPr>
+          <p:cNvPr id="6" name="TextBox 5"/>
+          <p:cNvSpPr txBox="1"/>
+          <p:nvPr/>
+        </p:nvSpPr>
+        <p:spPr>
+          <a:xfrm>
+            <a:off x="256032" y="475488"/>
+            <a:ext cx="8686800" cy="237744"/>
+          </a:xfrm>
+          <a:prstGeom prst="rect">
+            <a:avLst/>
+          </a:prstGeom>
+          <a:noFill/>
+        </p:spPr>
+        <p:txBody>
+          <a:bodyPr wrap="square" anchor="t"/>
+          <a:lstStyle/>
+          <a:p>
+            <a:pPr algn="l"/>
+            <a:r>
+              <a:rPr sz="900" b="0" i="0">
+                <a:solidFill>
+                  <a:srgbClr val="A8BAC5"/>
+                </a:solidFill>
+                <a:latin typeface="Arial"/>
+              </a:rPr>
+              <a:t>Organic base case (3 SDR + GovCon compounding) + opportunistic acquisition</a:t>
+            </a:r>
+          </a:p>
+        </p:txBody>
+      </p:sp>
+      <p:sp>
+        <p:nvSpPr>
+          <p:cNvPr id="7" name="Rounded Rectangle 6"/>
+          <p:cNvSpPr/>
+          <p:nvPr/>
+        </p:nvSpPr>
+        <p:spPr>
+          <a:xfrm>
+            <a:off x="8918143" y="244602"/>
+            <a:ext cx="3017520" cy="310896"/>
+          </a:xfrm>
+          <a:prstGeom prst="roundRect">
+            <a:avLst>
+              <a:gd name="adj" fmla="val 50000"/>
+            </a:avLst>
+          </a:prstGeom>
+          <a:solidFill>
+            <a:srgbClr val="A8BAC5"/>
+          </a:solidFill>
+          <a:ln>
+            <a:noFill/>
+          </a:ln>
+        </p:spPr>
+        <p:style>
+          <a:lnRef idx="1">
+            <a:schemeClr val="accent1"/>
+          </a:lnRef>
+          <a:fillRef idx="3">
+            <a:schemeClr val="accent1"/>
+          </a:fillRef>
+          <a:effectRef idx="2">
+            <a:schemeClr val="accent1"/>
+          </a:effectRef>
+          <a:fontRef idx="minor">
+            <a:schemeClr val="lt1"/>
+          </a:fontRef>
+        </p:style>
+        <p:txBody>
+          <a:bodyPr rtlCol="0" anchor="ctr" wrap="square"/>
+          <a:lstStyle/>
+          <a:p>
+            <a:pPr algn="ctr"/>
+            <a:r>
+              <a:rPr sz="750" b="0" i="1">
+                <a:solidFill>
+                  <a:srgbClr val="3D4F5C"/>
+                </a:solidFill>
+                <a:latin typeface="Arial"/>
+              </a:rPr>
+              <a:t>Illustrative — not a guarantee of performance</a:t>
+            </a:r>
+          </a:p>
+        </p:txBody>
+      </p:sp>
+      <p:sp>
+        <p:nvSpPr>
+          <p:cNvPr id="8" name="Rectangle 7"/>
+          <p:cNvSpPr/>
+          <p:nvPr/>
+        </p:nvSpPr>
+        <p:spPr>
+          <a:xfrm>
+            <a:off x="256032" y="918972"/>
+            <a:ext cx="118872" cy="118872"/>
+          </a:xfrm>
+          <a:prstGeom prst="rect">
+            <a:avLst/>
+          </a:prstGeom>
+          <a:solidFill>
+            <a:srgbClr val="3D4F5C"/>
+          </a:solidFill>
+          <a:ln>
+            <a:noFill/>
+          </a:ln>
+        </p:spPr>
+        <p:style>
+          <a:lnRef idx="1">
+            <a:schemeClr val="accent1"/>
+          </a:lnRef>
+          <a:fillRef idx="3">
+            <a:schemeClr val="accent1"/>
+          </a:fillRef>
+          <a:effectRef idx="2">
+            <a:schemeClr val="accent1"/>
+          </a:effectRef>
+          <a:fontRef idx="minor">
+            <a:schemeClr val="lt1"/>
+          </a:fontRef>
+        </p:style>
+        <p:txBody>
+          <a:bodyPr rtlCol="0" anchor="ctr"/>
+          <a:lstStyle/>
+          <a:p>
+            <a:pPr algn="ctr"/>
+          </a:p>
+        </p:txBody>
+      </p:sp>
+      <p:sp>
+        <p:nvSpPr>
+          <p:cNvPr id="9" name="TextBox 8"/>
+          <p:cNvSpPr txBox="1"/>
+          <p:nvPr/>
+        </p:nvSpPr>
+        <p:spPr>
+          <a:xfrm>
+            <a:off x="429768" y="850392"/>
+            <a:ext cx="1453896" cy="256032"/>
+          </a:xfrm>
+          <a:prstGeom prst="rect">
+            <a:avLst/>
+          </a:prstGeom>
+          <a:noFill/>
+        </p:spPr>
+        <p:txBody>
+          <a:bodyPr wrap="square" anchor="t"/>
+          <a:lstStyle/>
+          <a:p>
+            <a:pPr algn="l"/>
+            <a:r>
+              <a:rPr sz="800" b="0" i="0">
+                <a:solidFill>
+                  <a:srgbClr val="8A939C"/>
+                </a:solidFill>
+                <a:latin typeface="Arial"/>
+              </a:rPr>
+              <a:t>Current base</a:t>
+            </a:r>
+          </a:p>
+        </p:txBody>
+      </p:sp>
+      <p:sp>
+        <p:nvSpPr>
+          <p:cNvPr id="10" name="Rectangle 9"/>
+          <p:cNvSpPr/>
+          <p:nvPr/>
+        </p:nvSpPr>
+        <p:spPr>
+          <a:xfrm>
+            <a:off x="1901952" y="918972"/>
+            <a:ext cx="118872" cy="118872"/>
+          </a:xfrm>
+          <a:prstGeom prst="rect">
+            <a:avLst/>
+          </a:prstGeom>
+          <a:solidFill>
+            <a:srgbClr val="B84C30"/>
+          </a:solidFill>
+          <a:ln>
+            <a:noFill/>
+          </a:ln>
+        </p:spPr>
+        <p:style>
+          <a:lnRef idx="1">
+            <a:schemeClr val="accent1"/>
+          </a:lnRef>
+          <a:fillRef idx="3">
+            <a:schemeClr val="accent1"/>
+          </a:fillRef>
+          <a:effectRef idx="2">
+            <a:schemeClr val="accent1"/>
+          </a:effectRef>
+          <a:fontRef idx="minor">
+            <a:schemeClr val="lt1"/>
+          </a:fontRef>
+        </p:style>
+        <p:txBody>
+          <a:bodyPr rtlCol="0" anchor="ctr"/>
+          <a:lstStyle/>
+          <a:p>
+            <a:pPr algn="ctr"/>
+          </a:p>
+        </p:txBody>
+      </p:sp>
+      <p:sp>
+        <p:nvSpPr>
+          <p:cNvPr id="11" name="TextBox 10"/>
+          <p:cNvSpPr txBox="1"/>
+          <p:nvPr/>
+        </p:nvSpPr>
+        <p:spPr>
+          <a:xfrm>
+            <a:off x="2075688" y="850392"/>
+            <a:ext cx="1956816" cy="256032"/>
+          </a:xfrm>
+          <a:prstGeom prst="rect">
+            <a:avLst/>
+          </a:prstGeom>
+          <a:noFill/>
+        </p:spPr>
+        <p:txBody>
+          <a:bodyPr wrap="square" anchor="t"/>
+          <a:lstStyle/>
+          <a:p>
+            <a:pPr algn="l"/>
+            <a:r>
+              <a:rPr sz="800" b="0" i="0">
+                <a:solidFill>
+                  <a:srgbClr val="8A939C"/>
+                </a:solidFill>
+                <a:latin typeface="Arial"/>
+              </a:rPr>
+              <a:t>SDR channel (raise funded)</a:t>
+            </a:r>
+          </a:p>
+        </p:txBody>
+      </p:sp>
+      <p:sp>
+        <p:nvSpPr>
+          <p:cNvPr id="12" name="Rectangle 11"/>
+          <p:cNvSpPr/>
+          <p:nvPr/>
+        </p:nvSpPr>
+        <p:spPr>
+          <a:xfrm>
+            <a:off x="4050792" y="918972"/>
+            <a:ext cx="118872" cy="118872"/>
+          </a:xfrm>
+          <a:prstGeom prst="rect">
+            <a:avLst/>
+          </a:prstGeom>
+          <a:solidFill>
+            <a:srgbClr val="8A939C"/>
+          </a:solidFill>
+          <a:ln>
+            <a:noFill/>
+          </a:ln>
+        </p:spPr>
+        <p:style>
+          <a:lnRef idx="1">
+            <a:schemeClr val="accent1"/>
+          </a:lnRef>
+          <a:fillRef idx="3">
+            <a:schemeClr val="accent1"/>
+          </a:fillRef>
+          <a:effectRef idx="2">
+            <a:schemeClr val="accent1"/>
+          </a:effectRef>
+          <a:fontRef idx="minor">
+            <a:schemeClr val="lt1"/>
+          </a:fontRef>
+        </p:style>
+        <p:txBody>
+          <a:bodyPr rtlCol="0" anchor="ctr"/>
+          <a:lstStyle/>
+          <a:p>
+            <a:pPr algn="ctr"/>
+          </a:p>
+        </p:txBody>
+      </p:sp>
+      <p:sp>
+        <p:nvSpPr>
+          <p:cNvPr id="13" name="TextBox 12"/>
+          <p:cNvSpPr txBox="1"/>
+          <p:nvPr/>
+        </p:nvSpPr>
+        <p:spPr>
+          <a:xfrm>
+            <a:off x="4224528" y="850392"/>
+            <a:ext cx="1636776" cy="256032"/>
+          </a:xfrm>
+          <a:prstGeom prst="rect">
+            <a:avLst/>
+          </a:prstGeom>
+          <a:noFill/>
+        </p:spPr>
+        <p:txBody>
+          <a:bodyPr wrap="square" anchor="t"/>
+          <a:lstStyle/>
+          <a:p>
+            <a:pPr algn="l"/>
+            <a:r>
+              <a:rPr sz="800" b="0" i="0">
+                <a:solidFill>
+                  <a:srgbClr val="8A939C"/>
+                </a:solidFill>
+                <a:latin typeface="Arial"/>
+              </a:rPr>
+              <a:t>SDR 3 (ops funded)</a:t>
+            </a:r>
+          </a:p>
+        </p:txBody>
+      </p:sp>
+      <p:sp>
+        <p:nvSpPr>
+          <p:cNvPr id="14" name="Rectangle 13"/>
+          <p:cNvSpPr/>
+          <p:nvPr/>
+        </p:nvSpPr>
+        <p:spPr>
+          <a:xfrm>
+            <a:off x="5879592" y="918972"/>
+            <a:ext cx="118872" cy="118872"/>
+          </a:xfrm>
+          <a:prstGeom prst="rect">
+            <a:avLst/>
+          </a:prstGeom>
+          <a:solidFill>
+            <a:srgbClr val="5E7280"/>
+          </a:solidFill>
+          <a:ln>
+            <a:noFill/>
+          </a:ln>
+        </p:spPr>
+        <p:style>
+          <a:lnRef idx="1">
+            <a:schemeClr val="accent1"/>
+          </a:lnRef>
+          <a:fillRef idx="3">
+            <a:schemeClr val="accent1"/>
+          </a:fillRef>
+          <a:effectRef idx="2">
+            <a:schemeClr val="accent1"/>
+          </a:effectRef>
+          <a:fontRef idx="minor">
+            <a:schemeClr val="lt1"/>
+          </a:fontRef>
+        </p:style>
+        <p:txBody>
+          <a:bodyPr rtlCol="0" anchor="ctr"/>
+          <a:lstStyle/>
+          <a:p>
+            <a:pPr algn="ctr"/>
+          </a:p>
+        </p:txBody>
+      </p:sp>
+      <p:sp>
+        <p:nvSpPr>
+          <p:cNvPr id="15" name="TextBox 14"/>
+          <p:cNvSpPr txBox="1"/>
+          <p:nvPr/>
+        </p:nvSpPr>
+        <p:spPr>
+          <a:xfrm>
+            <a:off x="6053328" y="850392"/>
+            <a:ext cx="1636776" cy="256032"/>
+          </a:xfrm>
+          <a:prstGeom prst="rect">
+            <a:avLst/>
+          </a:prstGeom>
+          <a:noFill/>
+        </p:spPr>
+        <p:txBody>
+          <a:bodyPr wrap="square" anchor="t"/>
+          <a:lstStyle/>
+          <a:p>
+            <a:pPr algn="l"/>
+            <a:r>
+              <a:rPr sz="800" b="0" i="0">
+                <a:solidFill>
+                  <a:srgbClr val="8A939C"/>
+                </a:solidFill>
+                <a:latin typeface="Arial"/>
+              </a:rPr>
+              <a:t>GovCon / set-aside</a:t>
+            </a:r>
+          </a:p>
+        </p:txBody>
+      </p:sp>
+      <p:sp>
+        <p:nvSpPr>
+          <p:cNvPr id="16" name="Rectangle 15"/>
+          <p:cNvSpPr/>
+          <p:nvPr/>
+        </p:nvSpPr>
+        <p:spPr>
+          <a:xfrm>
+            <a:off x="7708392" y="918972"/>
+            <a:ext cx="118872" cy="118872"/>
+          </a:xfrm>
+          <a:prstGeom prst="rect">
+            <a:avLst/>
+          </a:prstGeom>
+          <a:solidFill>
+            <a:srgbClr val="2E7D32"/>
+          </a:solidFill>
+          <a:ln>
+            <a:noFill/>
+          </a:ln>
+        </p:spPr>
+        <p:style>
+          <a:lnRef idx="1">
+            <a:schemeClr val="accent1"/>
+          </a:lnRef>
+          <a:fillRef idx="3">
+            <a:schemeClr val="accent1"/>
+          </a:fillRef>
+          <a:effectRef idx="2">
+            <a:schemeClr val="accent1"/>
+          </a:effectRef>
+          <a:fontRef idx="minor">
+            <a:schemeClr val="lt1"/>
+          </a:fontRef>
+        </p:style>
+        <p:txBody>
+          <a:bodyPr rtlCol="0" anchor="ctr"/>
+          <a:lstStyle/>
+          <a:p>
+            <a:pPr algn="ctr"/>
+          </a:p>
+        </p:txBody>
+      </p:sp>
+      <p:sp>
+        <p:nvSpPr>
+          <p:cNvPr id="17" name="TextBox 16"/>
+          <p:cNvSpPr txBox="1"/>
+          <p:nvPr/>
+        </p:nvSpPr>
+        <p:spPr>
+          <a:xfrm>
+            <a:off x="7882128" y="850392"/>
+            <a:ext cx="1819656" cy="256032"/>
+          </a:xfrm>
+          <a:prstGeom prst="rect">
+            <a:avLst/>
+          </a:prstGeom>
+          <a:noFill/>
+        </p:spPr>
+        <p:txBody>
+          <a:bodyPr wrap="square" anchor="t"/>
+          <a:lstStyle/>
+          <a:p>
+            <a:pPr algn="l"/>
+            <a:r>
+              <a:rPr sz="800" b="0" i="0">
+                <a:solidFill>
+                  <a:srgbClr val="8A939C"/>
+                </a:solidFill>
+                <a:latin typeface="Arial"/>
+              </a:rPr>
+              <a:t>Opportunistic acquisition</a:t>
+            </a:r>
+          </a:p>
+        </p:txBody>
+      </p:sp>
+      <p:sp>
+        <p:nvSpPr>
+          <p:cNvPr id="18" name="Rectangle 17"/>
+          <p:cNvSpPr/>
+          <p:nvPr/>
+        </p:nvSpPr>
+        <p:spPr>
+          <a:xfrm>
+            <a:off x="201168" y="1170432"/>
+            <a:ext cx="11789359" cy="347472"/>
+          </a:xfrm>
+          <a:prstGeom prst="rect">
+            <a:avLst/>
+          </a:prstGeom>
+          <a:solidFill>
+            <a:srgbClr val="3D4F5C"/>
+          </a:solidFill>
+          <a:ln>
+            <a:noFill/>
+          </a:ln>
+        </p:spPr>
+        <p:style>
+          <a:lnRef idx="1">
+            <a:schemeClr val="accent1"/>
+          </a:lnRef>
+          <a:fillRef idx="3">
+            <a:schemeClr val="accent1"/>
+          </a:fillRef>
+          <a:effectRef idx="2">
+            <a:schemeClr val="accent1"/>
+          </a:effectRef>
+          <a:fontRef idx="minor">
+            <a:schemeClr val="lt1"/>
+          </a:fontRef>
+        </p:style>
+        <p:txBody>
+          <a:bodyPr rtlCol="0" anchor="ctr"/>
+          <a:lstStyle/>
+          <a:p>
+            <a:pPr algn="ctr"/>
+          </a:p>
+        </p:txBody>
+      </p:sp>
+      <p:sp>
+        <p:nvSpPr>
+          <p:cNvPr id="19" name="TextBox 18"/>
+          <p:cNvSpPr txBox="1"/>
+          <p:nvPr/>
+        </p:nvSpPr>
+        <p:spPr>
+          <a:xfrm>
+            <a:off x="292608" y="1252728"/>
+            <a:ext cx="2359152" cy="265176"/>
+          </a:xfrm>
+          <a:prstGeom prst="rect">
+            <a:avLst/>
+          </a:prstGeom>
+          <a:noFill/>
+        </p:spPr>
+        <p:txBody>
+          <a:bodyPr wrap="square" anchor="t"/>
+          <a:lstStyle/>
+          <a:p>
+            <a:pPr algn="l"/>
+            <a:r>
+              <a:rPr sz="850" b="1" i="0">
+                <a:solidFill>
+                  <a:srgbClr val="FFFFFF"/>
+                </a:solidFill>
+                <a:latin typeface="Arial"/>
+              </a:rPr>
+              <a:t>EBITDA Driver</a:t>
+            </a:r>
+          </a:p>
+        </p:txBody>
+      </p:sp>
+      <p:sp>
+        <p:nvSpPr>
+          <p:cNvPr id="20" name="TextBox 19"/>
+          <p:cNvSpPr txBox="1"/>
+          <p:nvPr/>
+        </p:nvSpPr>
+        <p:spPr>
+          <a:xfrm>
+            <a:off x="2706624" y="1252728"/>
+            <a:ext cx="1443685" cy="265176"/>
+          </a:xfrm>
+          <a:prstGeom prst="rect">
+            <a:avLst/>
+          </a:prstGeom>
+          <a:noFill/>
+        </p:spPr>
+        <p:txBody>
+          <a:bodyPr wrap="square" anchor="t"/>
+          <a:lstStyle/>
+          <a:p>
+            <a:pPr algn="ctr"/>
+            <a:r>
+              <a:rPr sz="850" b="1" i="0">
+                <a:solidFill>
+                  <a:srgbClr val="FFFFFF"/>
+                </a:solidFill>
+                <a:latin typeface="Arial"/>
+              </a:rPr>
+              <a:t>Today</a:t>
+            </a:r>
+          </a:p>
+        </p:txBody>
+      </p:sp>
+      <p:sp>
+        <p:nvSpPr>
+          <p:cNvPr id="21" name="TextBox 20"/>
+          <p:cNvSpPr txBox="1"/>
+          <p:nvPr/>
+        </p:nvSpPr>
+        <p:spPr>
+          <a:xfrm>
+            <a:off x="4260037" y="1252728"/>
+            <a:ext cx="1443685" cy="265176"/>
+          </a:xfrm>
+          <a:prstGeom prst="rect">
+            <a:avLst/>
+          </a:prstGeom>
+          <a:noFill/>
+        </p:spPr>
+        <p:txBody>
+          <a:bodyPr wrap="square" anchor="t"/>
+          <a:lstStyle/>
+          <a:p>
+            <a:pPr algn="ctr"/>
+            <a:r>
+              <a:rPr sz="850" b="1" i="0">
+                <a:solidFill>
+                  <a:srgbClr val="FFFFFF"/>
+                </a:solidFill>
+                <a:latin typeface="Arial"/>
+              </a:rPr>
+              <a:t>Yr 1</a:t>
+            </a:r>
+          </a:p>
+        </p:txBody>
+      </p:sp>
+      <p:sp>
+        <p:nvSpPr>
+          <p:cNvPr id="22" name="TextBox 21"/>
+          <p:cNvSpPr txBox="1"/>
+          <p:nvPr/>
+        </p:nvSpPr>
+        <p:spPr>
+          <a:xfrm>
+            <a:off x="5813450" y="1252728"/>
+            <a:ext cx="1443685" cy="265176"/>
+          </a:xfrm>
+          <a:prstGeom prst="rect">
+            <a:avLst/>
+          </a:prstGeom>
+          <a:noFill/>
+        </p:spPr>
+        <p:txBody>
+          <a:bodyPr wrap="square" anchor="t"/>
+          <a:lstStyle/>
+          <a:p>
+            <a:pPr algn="ctr"/>
+            <a:r>
+              <a:rPr sz="850" b="1" i="0">
+                <a:solidFill>
+                  <a:srgbClr val="FFFFFF"/>
+                </a:solidFill>
+                <a:latin typeface="Arial"/>
+              </a:rPr>
+              <a:t>Yr 2</a:t>
+            </a:r>
+          </a:p>
+        </p:txBody>
+      </p:sp>
+      <p:sp>
+        <p:nvSpPr>
+          <p:cNvPr id="23" name="TextBox 22"/>
+          <p:cNvSpPr txBox="1"/>
+          <p:nvPr/>
+        </p:nvSpPr>
+        <p:spPr>
+          <a:xfrm>
+            <a:off x="7366863" y="1252728"/>
+            <a:ext cx="1443685" cy="265176"/>
+          </a:xfrm>
+          <a:prstGeom prst="rect">
+            <a:avLst/>
+          </a:prstGeom>
+          <a:noFill/>
+        </p:spPr>
+        <p:txBody>
+          <a:bodyPr wrap="square" anchor="t"/>
+          <a:lstStyle/>
+          <a:p>
+            <a:pPr algn="ctr"/>
+            <a:r>
+              <a:rPr sz="850" b="1" i="0">
+                <a:solidFill>
+                  <a:srgbClr val="FFFFFF"/>
+                </a:solidFill>
+                <a:latin typeface="Arial"/>
+              </a:rPr>
+              <a:t>Yr 3</a:t>
+            </a:r>
+          </a:p>
+        </p:txBody>
+      </p:sp>
+      <p:sp>
+        <p:nvSpPr>
+          <p:cNvPr id="24" name="TextBox 23"/>
+          <p:cNvSpPr txBox="1"/>
+          <p:nvPr/>
+        </p:nvSpPr>
+        <p:spPr>
+          <a:xfrm>
+            <a:off x="8920276" y="1252728"/>
+            <a:ext cx="1443685" cy="265176"/>
+          </a:xfrm>
+          <a:prstGeom prst="rect">
+            <a:avLst/>
+          </a:prstGeom>
+          <a:noFill/>
+        </p:spPr>
+        <p:txBody>
+          <a:bodyPr wrap="square" anchor="t"/>
+          <a:lstStyle/>
+          <a:p>
+            <a:pPr algn="ctr"/>
+            <a:r>
+              <a:rPr sz="850" b="1" i="0">
+                <a:solidFill>
+                  <a:srgbClr val="FFFFFF"/>
+                </a:solidFill>
+                <a:latin typeface="Arial"/>
+              </a:rPr>
+              <a:t>Yr 4</a:t>
+            </a:r>
+          </a:p>
+        </p:txBody>
+      </p:sp>
+      <p:sp>
+        <p:nvSpPr>
+          <p:cNvPr id="25" name="TextBox 24"/>
+          <p:cNvSpPr txBox="1"/>
+          <p:nvPr/>
+        </p:nvSpPr>
+        <p:spPr>
+          <a:xfrm>
+            <a:off x="10473689" y="1252728"/>
+            <a:ext cx="1443685" cy="265176"/>
+          </a:xfrm>
+          <a:prstGeom prst="rect">
+            <a:avLst/>
+          </a:prstGeom>
+          <a:noFill/>
+        </p:spPr>
+        <p:txBody>
+          <a:bodyPr wrap="square" anchor="t"/>
+          <a:lstStyle/>
+          <a:p>
+            <a:pPr algn="ctr"/>
+            <a:r>
+              <a:rPr sz="850" b="1" i="0">
+                <a:solidFill>
+                  <a:srgbClr val="FFFFFF"/>
+                </a:solidFill>
+                <a:latin typeface="Arial"/>
+              </a:rPr>
+              <a:t>Yr 5</a:t>
+            </a:r>
+          </a:p>
+        </p:txBody>
+      </p:sp>
+      <p:sp>
+        <p:nvSpPr>
+          <p:cNvPr id="26" name="Rectangle 25"/>
+          <p:cNvSpPr/>
+          <p:nvPr/>
+        </p:nvSpPr>
+        <p:spPr>
+          <a:xfrm>
+            <a:off x="201168" y="1517904"/>
+            <a:ext cx="11789359" cy="365760"/>
+          </a:xfrm>
+          <a:prstGeom prst="rect">
+            <a:avLst/>
+          </a:prstGeom>
+          <a:solidFill>
+            <a:srgbClr val="F3F3F3"/>
+          </a:solidFill>
+          <a:ln>
+            <a:noFill/>
+          </a:ln>
+        </p:spPr>
+        <p:style>
+          <a:lnRef idx="1">
+            <a:schemeClr val="accent1"/>
+          </a:lnRef>
+          <a:fillRef idx="3">
+            <a:schemeClr val="accent1"/>
+          </a:fillRef>
+          <a:effectRef idx="2">
+            <a:schemeClr val="accent1"/>
+          </a:effectRef>
+          <a:fontRef idx="minor">
+            <a:schemeClr val="lt1"/>
+          </a:fontRef>
+        </p:style>
+        <p:txBody>
+          <a:bodyPr rtlCol="0" anchor="ctr"/>
+          <a:lstStyle/>
+          <a:p>
+            <a:pPr algn="ctr"/>
+          </a:p>
+        </p:txBody>
+      </p:sp>
+      <p:sp>
+        <p:nvSpPr>
+          <p:cNvPr id="27" name="TextBox 26"/>
+          <p:cNvSpPr txBox="1"/>
+          <p:nvPr/>
+        </p:nvSpPr>
+        <p:spPr>
+          <a:xfrm>
+            <a:off x="292608" y="1609344"/>
+            <a:ext cx="2340864" cy="274320"/>
+          </a:xfrm>
+          <a:prstGeom prst="rect">
+            <a:avLst/>
+          </a:prstGeom>
+          <a:noFill/>
+        </p:spPr>
+        <p:txBody>
+          <a:bodyPr wrap="square" anchor="t"/>
+          <a:lstStyle/>
+          <a:p>
+            <a:pPr algn="l"/>
+            <a:r>
+              <a:rPr sz="850" b="0" i="0">
+                <a:solidFill>
+                  <a:srgbClr val="1E1E1E"/>
+                </a:solidFill>
+                <a:latin typeface="Arial"/>
+              </a:rPr>
+              <a:t>Current base (95% retention/yr)</a:t>
+            </a:r>
+          </a:p>
+        </p:txBody>
+      </p:sp>
+      <p:sp>
+        <p:nvSpPr>
+          <p:cNvPr id="28" name="TextBox 27"/>
+          <p:cNvSpPr txBox="1"/>
+          <p:nvPr/>
+        </p:nvSpPr>
+        <p:spPr>
+          <a:xfrm>
+            <a:off x="2706624" y="1609344"/>
+            <a:ext cx="1480261" cy="274320"/>
+          </a:xfrm>
+          <a:prstGeom prst="rect">
+            <a:avLst/>
+          </a:prstGeom>
+          <a:noFill/>
+        </p:spPr>
+        <p:txBody>
+          <a:bodyPr wrap="square" anchor="t"/>
+          <a:lstStyle/>
+          <a:p>
+            <a:pPr algn="ctr"/>
+            <a:r>
+              <a:rPr sz="900" b="0" i="0">
+                <a:solidFill>
+                  <a:srgbClr val="1E1E1E"/>
+                </a:solidFill>
+                <a:latin typeface="Arial"/>
+              </a:rPr>
+              <a:t>$150K</a:t>
+            </a:r>
+          </a:p>
+        </p:txBody>
+      </p:sp>
+      <p:sp>
+        <p:nvSpPr>
+          <p:cNvPr id="29" name="TextBox 28"/>
+          <p:cNvSpPr txBox="1"/>
+          <p:nvPr/>
+        </p:nvSpPr>
+        <p:spPr>
+          <a:xfrm>
+            <a:off x="4260037" y="1609344"/>
+            <a:ext cx="1480261" cy="274320"/>
+          </a:xfrm>
+          <a:prstGeom prst="rect">
+            <a:avLst/>
+          </a:prstGeom>
+          <a:noFill/>
+        </p:spPr>
+        <p:txBody>
+          <a:bodyPr wrap="square" anchor="t"/>
+          <a:lstStyle/>
+          <a:p>
+            <a:pPr algn="ctr"/>
+            <a:r>
+              <a:rPr sz="900" b="0" i="0">
+                <a:solidFill>
+                  <a:srgbClr val="1E1E1E"/>
+                </a:solidFill>
+                <a:latin typeface="Arial"/>
+              </a:rPr>
+              <a:t>$143K</a:t>
+            </a:r>
+          </a:p>
+        </p:txBody>
+      </p:sp>
+      <p:sp>
+        <p:nvSpPr>
+          <p:cNvPr id="30" name="TextBox 29"/>
+          <p:cNvSpPr txBox="1"/>
+          <p:nvPr/>
+        </p:nvSpPr>
+        <p:spPr>
+          <a:xfrm>
+            <a:off x="5813450" y="1609344"/>
+            <a:ext cx="1480261" cy="274320"/>
+          </a:xfrm>
+          <a:prstGeom prst="rect">
+            <a:avLst/>
+          </a:prstGeom>
+          <a:noFill/>
+        </p:spPr>
+        <p:txBody>
+          <a:bodyPr wrap="square" anchor="t"/>
+          <a:lstStyle/>
+          <a:p>
+            <a:pPr algn="ctr"/>
+            <a:r>
+              <a:rPr sz="900" b="0" i="0">
+                <a:solidFill>
+                  <a:srgbClr val="1E1E1E"/>
+                </a:solidFill>
+                <a:latin typeface="Arial"/>
+              </a:rPr>
+              <a:t>$136K</a:t>
+            </a:r>
+          </a:p>
+        </p:txBody>
+      </p:sp>
+      <p:sp>
+        <p:nvSpPr>
+          <p:cNvPr id="31" name="TextBox 30"/>
+          <p:cNvSpPr txBox="1"/>
+          <p:nvPr/>
+        </p:nvSpPr>
+        <p:spPr>
+          <a:xfrm>
+            <a:off x="7366863" y="1609344"/>
+            <a:ext cx="1480261" cy="274320"/>
+          </a:xfrm>
+          <a:prstGeom prst="rect">
+            <a:avLst/>
+          </a:prstGeom>
+          <a:noFill/>
+        </p:spPr>
+        <p:txBody>
+          <a:bodyPr wrap="square" anchor="t"/>
+          <a:lstStyle/>
+          <a:p>
+            <a:pPr algn="ctr"/>
+            <a:r>
+              <a:rPr sz="900" b="0" i="0">
+                <a:solidFill>
+                  <a:srgbClr val="1E1E1E"/>
+                </a:solidFill>
+                <a:latin typeface="Arial"/>
+              </a:rPr>
+              <a:t>$129K</a:t>
+            </a:r>
+          </a:p>
+        </p:txBody>
+      </p:sp>
+      <p:sp>
+        <p:nvSpPr>
+          <p:cNvPr id="32" name="TextBox 31"/>
+          <p:cNvSpPr txBox="1"/>
+          <p:nvPr/>
+        </p:nvSpPr>
+        <p:spPr>
+          <a:xfrm>
+            <a:off x="8920276" y="1609344"/>
+            <a:ext cx="1480261" cy="274320"/>
+          </a:xfrm>
+          <a:prstGeom prst="rect">
+            <a:avLst/>
+          </a:prstGeom>
+          <a:noFill/>
+        </p:spPr>
+        <p:txBody>
+          <a:bodyPr wrap="square" anchor="t"/>
+          <a:lstStyle/>
+          <a:p>
+            <a:pPr algn="ctr"/>
+            <a:r>
+              <a:rPr sz="900" b="0" i="0">
+                <a:solidFill>
+                  <a:srgbClr val="1E1E1E"/>
+                </a:solidFill>
+                <a:latin typeface="Arial"/>
+              </a:rPr>
+              <a:t>$122K</a:t>
+            </a:r>
+          </a:p>
+        </p:txBody>
+      </p:sp>
+      <p:sp>
+        <p:nvSpPr>
+          <p:cNvPr id="33" name="TextBox 32"/>
+          <p:cNvSpPr txBox="1"/>
+          <p:nvPr/>
+        </p:nvSpPr>
+        <p:spPr>
+          <a:xfrm>
+            <a:off x="10473689" y="1609344"/>
+            <a:ext cx="1480261" cy="274320"/>
+          </a:xfrm>
+          <a:prstGeom prst="rect">
+            <a:avLst/>
+          </a:prstGeom>
+          <a:noFill/>
+        </p:spPr>
+        <p:txBody>
+          <a:bodyPr wrap="square" anchor="t"/>
+          <a:lstStyle/>
+          <a:p>
+            <a:pPr algn="ctr"/>
+            <a:r>
+              <a:rPr sz="900" b="0" i="0">
+                <a:solidFill>
+                  <a:srgbClr val="1E1E1E"/>
+                </a:solidFill>
+                <a:latin typeface="Arial"/>
+              </a:rPr>
+              <a:t>$116K</a:t>
+            </a:r>
+          </a:p>
+        </p:txBody>
+      </p:sp>
+      <p:sp>
+        <p:nvSpPr>
+          <p:cNvPr id="34" name="Rectangle 33"/>
+          <p:cNvSpPr/>
+          <p:nvPr/>
+        </p:nvSpPr>
+        <p:spPr>
+          <a:xfrm>
+            <a:off x="201168" y="1883664"/>
+            <a:ext cx="11789359" cy="365760"/>
+          </a:xfrm>
+          <a:prstGeom prst="rect">
+            <a:avLst/>
+          </a:prstGeom>
+          <a:solidFill>
+            <a:srgbClr val="FFFFFF"/>
+          </a:solidFill>
+          <a:ln>
+            <a:noFill/>
+          </a:ln>
+        </p:spPr>
+        <p:style>
+          <a:lnRef idx="1">
+            <a:schemeClr val="accent1"/>
+          </a:lnRef>
+          <a:fillRef idx="3">
+            <a:schemeClr val="accent1"/>
+          </a:fillRef>
+          <a:effectRef idx="2">
+            <a:schemeClr val="accent1"/>
+          </a:effectRef>
+          <a:fontRef idx="minor">
+            <a:schemeClr val="lt1"/>
+          </a:fontRef>
+        </p:style>
+        <p:txBody>
+          <a:bodyPr rtlCol="0" anchor="ctr"/>
+          <a:lstStyle/>
+          <a:p>
+            <a:pPr algn="ctr"/>
+          </a:p>
+        </p:txBody>
+      </p:sp>
+      <p:sp>
+        <p:nvSpPr>
+          <p:cNvPr id="35" name="TextBox 34"/>
+          <p:cNvSpPr txBox="1"/>
+          <p:nvPr/>
+        </p:nvSpPr>
+        <p:spPr>
+          <a:xfrm>
+            <a:off x="292608" y="1975104"/>
+            <a:ext cx="1883664" cy="274320"/>
+          </a:xfrm>
+          <a:prstGeom prst="rect">
+            <a:avLst/>
+          </a:prstGeom>
+          <a:noFill/>
+        </p:spPr>
+        <p:txBody>
+          <a:bodyPr wrap="square" anchor="t"/>
+          <a:lstStyle/>
+          <a:p>
+            <a:pPr algn="l"/>
+            <a:r>
+              <a:rPr sz="850" b="0" i="0">
+                <a:solidFill>
+                  <a:srgbClr val="1E1E1E"/>
+                </a:solidFill>
+                <a:latin typeface="Arial"/>
+              </a:rPr>
+              <a:t>SDR 1 — cumulative book</a:t>
+            </a:r>
+          </a:p>
+        </p:txBody>
+      </p:sp>
+      <p:sp>
+        <p:nvSpPr>
+          <p:cNvPr id="36" name="Rounded Rectangle 35"/>
+          <p:cNvSpPr/>
+          <p:nvPr/>
+        </p:nvSpPr>
+        <p:spPr>
+          <a:xfrm>
+            <a:off x="2121408" y="1988820"/>
+            <a:ext cx="475488" cy="155448"/>
+          </a:xfrm>
+          <a:prstGeom prst="roundRect">
+            <a:avLst>
+              <a:gd name="adj" fmla="val 35000"/>
+            </a:avLst>
+          </a:prstGeom>
+          <a:solidFill>
+            <a:srgbClr val="B84C30"/>
+          </a:solidFill>
+          <a:ln>
+            <a:noFill/>
+          </a:ln>
+        </p:spPr>
+        <p:style>
+          <a:lnRef idx="1">
+            <a:schemeClr val="accent1"/>
+          </a:lnRef>
+          <a:fillRef idx="3">
+            <a:schemeClr val="accent1"/>
+          </a:fillRef>
+          <a:effectRef idx="2">
+            <a:schemeClr val="accent1"/>
+          </a:effectRef>
+          <a:fontRef idx="minor">
+            <a:schemeClr val="lt1"/>
+          </a:fontRef>
+        </p:style>
+        <p:txBody>
+          <a:bodyPr rtlCol="0" anchor="ctr" wrap="square"/>
+          <a:lstStyle/>
+          <a:p>
+            <a:pPr algn="ctr"/>
+            <a:r>
+              <a:rPr sz="650" b="1" i="0">
+                <a:solidFill>
+                  <a:srgbClr val="FFFFFF"/>
+                </a:solidFill>
+                <a:latin typeface="Arial"/>
+              </a:rPr>
+              <a:t>raise</a:t>
+            </a:r>
+          </a:p>
+        </p:txBody>
+      </p:sp>
+      <p:sp>
+        <p:nvSpPr>
+          <p:cNvPr id="37" name="TextBox 36"/>
+          <p:cNvSpPr txBox="1"/>
+          <p:nvPr/>
+        </p:nvSpPr>
+        <p:spPr>
+          <a:xfrm>
+            <a:off x="2706624" y="1975104"/>
+            <a:ext cx="1480261" cy="274320"/>
+          </a:xfrm>
+          <a:prstGeom prst="rect">
+            <a:avLst/>
+          </a:prstGeom>
+          <a:noFill/>
+        </p:spPr>
+        <p:txBody>
+          <a:bodyPr wrap="square" anchor="t"/>
+          <a:lstStyle/>
+          <a:p>
+            <a:pPr algn="ctr"/>
+            <a:r>
+              <a:rPr sz="900" b="0" i="0">
+                <a:solidFill>
+                  <a:srgbClr val="1E1E1E"/>
+                </a:solidFill>
+                <a:latin typeface="Arial"/>
+              </a:rPr>
+              <a:t>—</a:t>
+            </a:r>
+          </a:p>
+        </p:txBody>
+      </p:sp>
+      <p:sp>
+        <p:nvSpPr>
+          <p:cNvPr id="38" name="TextBox 37"/>
+          <p:cNvSpPr txBox="1"/>
+          <p:nvPr/>
+        </p:nvSpPr>
+        <p:spPr>
+          <a:xfrm>
+            <a:off x="4260037" y="1975104"/>
+            <a:ext cx="1480261" cy="274320"/>
+          </a:xfrm>
+          <a:prstGeom prst="rect">
+            <a:avLst/>
+          </a:prstGeom>
+          <a:noFill/>
+        </p:spPr>
+        <p:txBody>
+          <a:bodyPr wrap="square" anchor="t"/>
+          <a:lstStyle/>
+          <a:p>
+            <a:pPr algn="ctr"/>
+            <a:r>
+              <a:rPr sz="900" b="0" i="0">
+                <a:solidFill>
+                  <a:srgbClr val="1E1E1E"/>
+                </a:solidFill>
+                <a:latin typeface="Arial"/>
+              </a:rPr>
+              <a:t>$40K</a:t>
+            </a:r>
+          </a:p>
+        </p:txBody>
+      </p:sp>
+      <p:sp>
+        <p:nvSpPr>
+          <p:cNvPr id="39" name="TextBox 38"/>
+          <p:cNvSpPr txBox="1"/>
+          <p:nvPr/>
+        </p:nvSpPr>
+        <p:spPr>
+          <a:xfrm>
+            <a:off x="5813450" y="1975104"/>
+            <a:ext cx="1480261" cy="274320"/>
+          </a:xfrm>
+          <a:prstGeom prst="rect">
+            <a:avLst/>
+          </a:prstGeom>
+          <a:noFill/>
+        </p:spPr>
+        <p:txBody>
+          <a:bodyPr wrap="square" anchor="t"/>
+          <a:lstStyle/>
+          <a:p>
+            <a:pPr algn="ctr"/>
+            <a:r>
+              <a:rPr sz="900" b="0" i="0">
+                <a:solidFill>
+                  <a:srgbClr val="1E1E1E"/>
+                </a:solidFill>
+                <a:latin typeface="Arial"/>
+              </a:rPr>
+              <a:t>$98K</a:t>
+            </a:r>
+          </a:p>
+        </p:txBody>
+      </p:sp>
+      <p:sp>
+        <p:nvSpPr>
+          <p:cNvPr id="40" name="TextBox 39"/>
+          <p:cNvSpPr txBox="1"/>
+          <p:nvPr/>
+        </p:nvSpPr>
+        <p:spPr>
+          <a:xfrm>
+            <a:off x="7366863" y="1975104"/>
+            <a:ext cx="1480261" cy="274320"/>
+          </a:xfrm>
+          <a:prstGeom prst="rect">
+            <a:avLst/>
+          </a:prstGeom>
+          <a:noFill/>
+        </p:spPr>
+        <p:txBody>
+          <a:bodyPr wrap="square" anchor="t"/>
+          <a:lstStyle/>
+          <a:p>
+            <a:pPr algn="ctr"/>
+            <a:r>
+              <a:rPr sz="900" b="0" i="0">
+                <a:solidFill>
+                  <a:srgbClr val="1E1E1E"/>
+                </a:solidFill>
+                <a:latin typeface="Arial"/>
+              </a:rPr>
+              <a:t>$155K</a:t>
+            </a:r>
+          </a:p>
+        </p:txBody>
+      </p:sp>
+      <p:sp>
+        <p:nvSpPr>
+          <p:cNvPr id="41" name="TextBox 40"/>
+          <p:cNvSpPr txBox="1"/>
+          <p:nvPr/>
+        </p:nvSpPr>
+        <p:spPr>
+          <a:xfrm>
+            <a:off x="8920276" y="1975104"/>
+            <a:ext cx="1480261" cy="274320"/>
+          </a:xfrm>
+          <a:prstGeom prst="rect">
+            <a:avLst/>
+          </a:prstGeom>
+          <a:noFill/>
+        </p:spPr>
+        <p:txBody>
+          <a:bodyPr wrap="square" anchor="t"/>
+          <a:lstStyle/>
+          <a:p>
+            <a:pPr algn="ctr"/>
+            <a:r>
+              <a:rPr sz="900" b="0" i="0">
+                <a:solidFill>
+                  <a:srgbClr val="1E1E1E"/>
+                </a:solidFill>
+                <a:latin typeface="Arial"/>
+              </a:rPr>
+              <a:t>$210K</a:t>
+            </a:r>
+          </a:p>
+        </p:txBody>
+      </p:sp>
+      <p:sp>
+        <p:nvSpPr>
+          <p:cNvPr id="42" name="TextBox 41"/>
+          <p:cNvSpPr txBox="1"/>
+          <p:nvPr/>
+        </p:nvSpPr>
+        <p:spPr>
+          <a:xfrm>
+            <a:off x="10473689" y="1975104"/>
+            <a:ext cx="1480261" cy="274320"/>
+          </a:xfrm>
+          <a:prstGeom prst="rect">
+            <a:avLst/>
+          </a:prstGeom>
+          <a:noFill/>
+        </p:spPr>
+        <p:txBody>
+          <a:bodyPr wrap="square" anchor="t"/>
+          <a:lstStyle/>
+          <a:p>
+            <a:pPr algn="ctr"/>
+            <a:r>
+              <a:rPr sz="900" b="0" i="0">
+                <a:solidFill>
+                  <a:srgbClr val="1E1E1E"/>
+                </a:solidFill>
+                <a:latin typeface="Arial"/>
+              </a:rPr>
+              <a:t>$260K</a:t>
+            </a:r>
+          </a:p>
+        </p:txBody>
+      </p:sp>
+      <p:sp>
+        <p:nvSpPr>
+          <p:cNvPr id="43" name="Rectangle 42"/>
+          <p:cNvSpPr/>
+          <p:nvPr/>
+        </p:nvSpPr>
+        <p:spPr>
+          <a:xfrm>
+            <a:off x="201168" y="2249424"/>
+            <a:ext cx="11789359" cy="365760"/>
+          </a:xfrm>
+          <a:prstGeom prst="rect">
+            <a:avLst/>
+          </a:prstGeom>
+          <a:solidFill>
+            <a:srgbClr val="F3F3F3"/>
+          </a:solidFill>
+          <a:ln>
+            <a:noFill/>
+          </a:ln>
+        </p:spPr>
+        <p:style>
+          <a:lnRef idx="1">
+            <a:schemeClr val="accent1"/>
+          </a:lnRef>
+          <a:fillRef idx="3">
+            <a:schemeClr val="accent1"/>
+          </a:fillRef>
+          <a:effectRef idx="2">
+            <a:schemeClr val="accent1"/>
+          </a:effectRef>
+          <a:fontRef idx="minor">
+            <a:schemeClr val="lt1"/>
+          </a:fontRef>
+        </p:style>
+        <p:txBody>
+          <a:bodyPr rtlCol="0" anchor="ctr"/>
+          <a:lstStyle/>
+          <a:p>
+            <a:pPr algn="ctr"/>
+          </a:p>
+        </p:txBody>
+      </p:sp>
+      <p:sp>
+        <p:nvSpPr>
+          <p:cNvPr id="44" name="TextBox 43"/>
+          <p:cNvSpPr txBox="1"/>
+          <p:nvPr/>
+        </p:nvSpPr>
+        <p:spPr>
+          <a:xfrm>
+            <a:off x="292608" y="2340864"/>
+            <a:ext cx="1883664" cy="274320"/>
+          </a:xfrm>
+          <a:prstGeom prst="rect">
+            <a:avLst/>
+          </a:prstGeom>
+          <a:noFill/>
+        </p:spPr>
+        <p:txBody>
+          <a:bodyPr wrap="square" anchor="t"/>
+          <a:lstStyle/>
+          <a:p>
+            <a:pPr algn="l"/>
+            <a:r>
+              <a:rPr sz="850" b="0" i="0">
+                <a:solidFill>
+                  <a:srgbClr val="1E1E1E"/>
+                </a:solidFill>
+                <a:latin typeface="Arial"/>
+              </a:rPr>
+              <a:t>SDR 2 — cumulative book</a:t>
+            </a:r>
+          </a:p>
+        </p:txBody>
+      </p:sp>
+      <p:sp>
+        <p:nvSpPr>
+          <p:cNvPr id="45" name="Rounded Rectangle 44"/>
+          <p:cNvSpPr/>
+          <p:nvPr/>
+        </p:nvSpPr>
+        <p:spPr>
+          <a:xfrm>
+            <a:off x="2121408" y="2354580"/>
+            <a:ext cx="475488" cy="155448"/>
+          </a:xfrm>
+          <a:prstGeom prst="roundRect">
+            <a:avLst>
+              <a:gd name="adj" fmla="val 35000"/>
+            </a:avLst>
+          </a:prstGeom>
+          <a:solidFill>
+            <a:srgbClr val="B84C30"/>
+          </a:solidFill>
+          <a:ln>
+            <a:noFill/>
+          </a:ln>
+        </p:spPr>
+        <p:style>
+          <a:lnRef idx="1">
+            <a:schemeClr val="accent1"/>
+          </a:lnRef>
+          <a:fillRef idx="3">
+            <a:schemeClr val="accent1"/>
+          </a:fillRef>
+          <a:effectRef idx="2">
+            <a:schemeClr val="accent1"/>
+          </a:effectRef>
+          <a:fontRef idx="minor">
+            <a:schemeClr val="lt1"/>
+          </a:fontRef>
+        </p:style>
+        <p:txBody>
+          <a:bodyPr rtlCol="0" anchor="ctr" wrap="square"/>
+          <a:lstStyle/>
+          <a:p>
+            <a:pPr algn="ctr"/>
+            <a:r>
+              <a:rPr sz="650" b="1" i="0">
+                <a:solidFill>
+                  <a:srgbClr val="FFFFFF"/>
+                </a:solidFill>
+                <a:latin typeface="Arial"/>
+              </a:rPr>
+              <a:t>raise</a:t>
+            </a:r>
+          </a:p>
+        </p:txBody>
+      </p:sp>
+      <p:sp>
+        <p:nvSpPr>
+          <p:cNvPr id="46" name="TextBox 45"/>
+          <p:cNvSpPr txBox="1"/>
+          <p:nvPr/>
+        </p:nvSpPr>
+        <p:spPr>
+          <a:xfrm>
+            <a:off x="2706624" y="2340864"/>
+            <a:ext cx="1480261" cy="274320"/>
+          </a:xfrm>
+          <a:prstGeom prst="rect">
+            <a:avLst/>
+          </a:prstGeom>
+          <a:noFill/>
+        </p:spPr>
+        <p:txBody>
+          <a:bodyPr wrap="square" anchor="t"/>
+          <a:lstStyle/>
+          <a:p>
+            <a:pPr algn="ctr"/>
+            <a:r>
+              <a:rPr sz="900" b="0" i="0">
+                <a:solidFill>
+                  <a:srgbClr val="1E1E1E"/>
+                </a:solidFill>
+                <a:latin typeface="Arial"/>
+              </a:rPr>
+              <a:t>—</a:t>
+            </a:r>
+          </a:p>
+        </p:txBody>
+      </p:sp>
+      <p:sp>
+        <p:nvSpPr>
+          <p:cNvPr id="47" name="TextBox 46"/>
+          <p:cNvSpPr txBox="1"/>
+          <p:nvPr/>
+        </p:nvSpPr>
+        <p:spPr>
+          <a:xfrm>
+            <a:off x="4260037" y="2340864"/>
+            <a:ext cx="1480261" cy="274320"/>
+          </a:xfrm>
+          <a:prstGeom prst="rect">
+            <a:avLst/>
+          </a:prstGeom>
+          <a:noFill/>
+        </p:spPr>
+        <p:txBody>
+          <a:bodyPr wrap="square" anchor="t"/>
+          <a:lstStyle/>
+          <a:p>
+            <a:pPr algn="ctr"/>
+            <a:r>
+              <a:rPr sz="900" b="0" i="0">
+                <a:solidFill>
+                  <a:srgbClr val="1E1E1E"/>
+                </a:solidFill>
+                <a:latin typeface="Arial"/>
+              </a:rPr>
+              <a:t>—</a:t>
+            </a:r>
+          </a:p>
+        </p:txBody>
+      </p:sp>
+      <p:sp>
+        <p:nvSpPr>
+          <p:cNvPr id="48" name="TextBox 47"/>
+          <p:cNvSpPr txBox="1"/>
+          <p:nvPr/>
+        </p:nvSpPr>
+        <p:spPr>
+          <a:xfrm>
+            <a:off x="5813450" y="2340864"/>
+            <a:ext cx="1480261" cy="274320"/>
+          </a:xfrm>
+          <a:prstGeom prst="rect">
+            <a:avLst/>
+          </a:prstGeom>
+          <a:noFill/>
+        </p:spPr>
+        <p:txBody>
+          <a:bodyPr wrap="square" anchor="t"/>
+          <a:lstStyle/>
+          <a:p>
+            <a:pPr algn="ctr"/>
+            <a:r>
+              <a:rPr sz="900" b="0" i="0">
+                <a:solidFill>
+                  <a:srgbClr val="1E1E1E"/>
+                </a:solidFill>
+                <a:latin typeface="Arial"/>
+              </a:rPr>
+              <a:t>$40K</a:t>
+            </a:r>
+          </a:p>
+        </p:txBody>
+      </p:sp>
+      <p:sp>
+        <p:nvSpPr>
+          <p:cNvPr id="49" name="TextBox 48"/>
+          <p:cNvSpPr txBox="1"/>
+          <p:nvPr/>
+        </p:nvSpPr>
+        <p:spPr>
+          <a:xfrm>
+            <a:off x="7366863" y="2340864"/>
+            <a:ext cx="1480261" cy="274320"/>
+          </a:xfrm>
+          <a:prstGeom prst="rect">
+            <a:avLst/>
+          </a:prstGeom>
+          <a:noFill/>
+        </p:spPr>
+        <p:txBody>
+          <a:bodyPr wrap="square" anchor="t"/>
+          <a:lstStyle/>
+          <a:p>
+            <a:pPr algn="ctr"/>
+            <a:r>
+              <a:rPr sz="900" b="0" i="0">
+                <a:solidFill>
+                  <a:srgbClr val="1E1E1E"/>
+                </a:solidFill>
+                <a:latin typeface="Arial"/>
+              </a:rPr>
+              <a:t>$98K</a:t>
+            </a:r>
+          </a:p>
+        </p:txBody>
+      </p:sp>
+      <p:sp>
+        <p:nvSpPr>
+          <p:cNvPr id="50" name="TextBox 49"/>
+          <p:cNvSpPr txBox="1"/>
+          <p:nvPr/>
+        </p:nvSpPr>
+        <p:spPr>
+          <a:xfrm>
+            <a:off x="8920276" y="2340864"/>
+            <a:ext cx="1480261" cy="274320"/>
+          </a:xfrm>
+          <a:prstGeom prst="rect">
+            <a:avLst/>
+          </a:prstGeom>
+          <a:noFill/>
+        </p:spPr>
+        <p:txBody>
+          <a:bodyPr wrap="square" anchor="t"/>
+          <a:lstStyle/>
+          <a:p>
+            <a:pPr algn="ctr"/>
+            <a:r>
+              <a:rPr sz="900" b="0" i="0">
+                <a:solidFill>
+                  <a:srgbClr val="1E1E1E"/>
+                </a:solidFill>
+                <a:latin typeface="Arial"/>
+              </a:rPr>
+              <a:t>$155K</a:t>
+            </a:r>
+          </a:p>
+        </p:txBody>
+      </p:sp>
+      <p:sp>
+        <p:nvSpPr>
+          <p:cNvPr id="51" name="TextBox 50"/>
+          <p:cNvSpPr txBox="1"/>
+          <p:nvPr/>
+        </p:nvSpPr>
+        <p:spPr>
+          <a:xfrm>
+            <a:off x="10473689" y="2340864"/>
+            <a:ext cx="1480261" cy="274320"/>
+          </a:xfrm>
+          <a:prstGeom prst="rect">
+            <a:avLst/>
+          </a:prstGeom>
+          <a:noFill/>
+        </p:spPr>
+        <p:txBody>
+          <a:bodyPr wrap="square" anchor="t"/>
+          <a:lstStyle/>
+          <a:p>
+            <a:pPr algn="ctr"/>
+            <a:r>
+              <a:rPr sz="900" b="0" i="0">
+                <a:solidFill>
+                  <a:srgbClr val="1E1E1E"/>
+                </a:solidFill>
+                <a:latin typeface="Arial"/>
+              </a:rPr>
+              <a:t>$210K</a:t>
+            </a:r>
+          </a:p>
+        </p:txBody>
+      </p:sp>
+      <p:sp>
+        <p:nvSpPr>
+          <p:cNvPr id="52" name="Rectangle 51"/>
+          <p:cNvSpPr/>
+          <p:nvPr/>
+        </p:nvSpPr>
+        <p:spPr>
+          <a:xfrm>
+            <a:off x="201168" y="2615184"/>
+            <a:ext cx="11789359" cy="365760"/>
+          </a:xfrm>
+          <a:prstGeom prst="rect">
+            <a:avLst/>
+          </a:prstGeom>
+          <a:solidFill>
+            <a:srgbClr val="FFFFFF"/>
+          </a:solidFill>
+          <a:ln>
+            <a:noFill/>
+          </a:ln>
+        </p:spPr>
+        <p:style>
+          <a:lnRef idx="1">
+            <a:schemeClr val="accent1"/>
+          </a:lnRef>
+          <a:fillRef idx="3">
+            <a:schemeClr val="accent1"/>
+          </a:fillRef>
+          <a:effectRef idx="2">
+            <a:schemeClr val="accent1"/>
+          </a:effectRef>
+          <a:fontRef idx="minor">
+            <a:schemeClr val="lt1"/>
+          </a:fontRef>
+        </p:style>
+        <p:txBody>
+          <a:bodyPr rtlCol="0" anchor="ctr"/>
+          <a:lstStyle/>
+          <a:p>
+            <a:pPr algn="ctr"/>
+          </a:p>
+        </p:txBody>
+      </p:sp>
+      <p:sp>
+        <p:nvSpPr>
+          <p:cNvPr id="53" name="TextBox 52"/>
+          <p:cNvSpPr txBox="1"/>
+          <p:nvPr/>
+        </p:nvSpPr>
+        <p:spPr>
+          <a:xfrm>
+            <a:off x="292608" y="2706624"/>
+            <a:ext cx="1883664" cy="274320"/>
+          </a:xfrm>
+          <a:prstGeom prst="rect">
+            <a:avLst/>
+          </a:prstGeom>
+          <a:noFill/>
+        </p:spPr>
+        <p:txBody>
+          <a:bodyPr wrap="square" anchor="t"/>
+          <a:lstStyle/>
+          <a:p>
+            <a:pPr algn="l"/>
+            <a:r>
+              <a:rPr sz="850" b="0" i="0">
+                <a:solidFill>
+                  <a:srgbClr val="1E1E1E"/>
+                </a:solidFill>
+                <a:latin typeface="Arial"/>
+              </a:rPr>
+              <a:t>SDR 3 — cumulative book</a:t>
+            </a:r>
+          </a:p>
+        </p:txBody>
+      </p:sp>
+      <p:sp>
+        <p:nvSpPr>
+          <p:cNvPr id="54" name="Rounded Rectangle 53"/>
+          <p:cNvSpPr/>
+          <p:nvPr/>
+        </p:nvSpPr>
+        <p:spPr>
+          <a:xfrm>
+            <a:off x="2121408" y="2720340"/>
+            <a:ext cx="475488" cy="155448"/>
+          </a:xfrm>
+          <a:prstGeom prst="roundRect">
+            <a:avLst>
+              <a:gd name="adj" fmla="val 35000"/>
+            </a:avLst>
+          </a:prstGeom>
+          <a:solidFill>
+            <a:srgbClr val="3D4F5C"/>
+          </a:solidFill>
+          <a:ln>
+            <a:noFill/>
+          </a:ln>
+        </p:spPr>
+        <p:style>
+          <a:lnRef idx="1">
+            <a:schemeClr val="accent1"/>
+          </a:lnRef>
+          <a:fillRef idx="3">
+            <a:schemeClr val="accent1"/>
+          </a:fillRef>
+          <a:effectRef idx="2">
+            <a:schemeClr val="accent1"/>
+          </a:effectRef>
+          <a:fontRef idx="minor">
+            <a:schemeClr val="lt1"/>
+          </a:fontRef>
+        </p:style>
+        <p:txBody>
+          <a:bodyPr rtlCol="0" anchor="ctr" wrap="square"/>
+          <a:lstStyle/>
+          <a:p>
+            <a:pPr algn="ctr"/>
+            <a:r>
+              <a:rPr sz="650" b="1" i="0">
+                <a:solidFill>
+                  <a:srgbClr val="FFFFFF"/>
+                </a:solidFill>
+                <a:latin typeface="Arial"/>
+              </a:rPr>
+              <a:t>ops</a:t>
+            </a:r>
+          </a:p>
+        </p:txBody>
+      </p:sp>
+      <p:sp>
+        <p:nvSpPr>
+          <p:cNvPr id="55" name="TextBox 54"/>
+          <p:cNvSpPr txBox="1"/>
+          <p:nvPr/>
+        </p:nvSpPr>
+        <p:spPr>
+          <a:xfrm>
+            <a:off x="2706624" y="2706624"/>
+            <a:ext cx="1480261" cy="274320"/>
+          </a:xfrm>
+          <a:prstGeom prst="rect">
+            <a:avLst/>
+          </a:prstGeom>
+          <a:noFill/>
+        </p:spPr>
+        <p:txBody>
+          <a:bodyPr wrap="square" anchor="t"/>
+          <a:lstStyle/>
+          <a:p>
+            <a:pPr algn="ctr"/>
+            <a:r>
+              <a:rPr sz="900" b="0" i="0">
+                <a:solidFill>
+                  <a:srgbClr val="1E1E1E"/>
+                </a:solidFill>
+                <a:latin typeface="Arial"/>
+              </a:rPr>
+              <a:t>—</a:t>
+            </a:r>
+          </a:p>
+        </p:txBody>
+      </p:sp>
+      <p:sp>
+        <p:nvSpPr>
+          <p:cNvPr id="56" name="TextBox 55"/>
+          <p:cNvSpPr txBox="1"/>
+          <p:nvPr/>
+        </p:nvSpPr>
+        <p:spPr>
+          <a:xfrm>
+            <a:off x="4260037" y="2706624"/>
+            <a:ext cx="1480261" cy="274320"/>
+          </a:xfrm>
+          <a:prstGeom prst="rect">
+            <a:avLst/>
+          </a:prstGeom>
+          <a:noFill/>
+        </p:spPr>
+        <p:txBody>
+          <a:bodyPr wrap="square" anchor="t"/>
+          <a:lstStyle/>
+          <a:p>
+            <a:pPr algn="ctr"/>
+            <a:r>
+              <a:rPr sz="900" b="0" i="0">
+                <a:solidFill>
+                  <a:srgbClr val="1E1E1E"/>
+                </a:solidFill>
+                <a:latin typeface="Arial"/>
+              </a:rPr>
+              <a:t>—</a:t>
+            </a:r>
+          </a:p>
+        </p:txBody>
+      </p:sp>
+      <p:sp>
+        <p:nvSpPr>
+          <p:cNvPr id="57" name="TextBox 56"/>
+          <p:cNvSpPr txBox="1"/>
+          <p:nvPr/>
+        </p:nvSpPr>
+        <p:spPr>
+          <a:xfrm>
+            <a:off x="5813450" y="2706624"/>
+            <a:ext cx="1480261" cy="274320"/>
+          </a:xfrm>
+          <a:prstGeom prst="rect">
+            <a:avLst/>
+          </a:prstGeom>
+          <a:noFill/>
+        </p:spPr>
+        <p:txBody>
+          <a:bodyPr wrap="square" anchor="t"/>
+          <a:lstStyle/>
+          <a:p>
+            <a:pPr algn="ctr"/>
+            <a:r>
+              <a:rPr sz="900" b="0" i="0">
+                <a:solidFill>
+                  <a:srgbClr val="1E1E1E"/>
+                </a:solidFill>
+                <a:latin typeface="Arial"/>
+              </a:rPr>
+              <a:t>—</a:t>
+            </a:r>
+          </a:p>
+        </p:txBody>
+      </p:sp>
+      <p:sp>
+        <p:nvSpPr>
+          <p:cNvPr id="58" name="TextBox 57"/>
+          <p:cNvSpPr txBox="1"/>
+          <p:nvPr/>
+        </p:nvSpPr>
+        <p:spPr>
+          <a:xfrm>
+            <a:off x="7366863" y="2706624"/>
+            <a:ext cx="1480261" cy="274320"/>
+          </a:xfrm>
+          <a:prstGeom prst="rect">
+            <a:avLst/>
+          </a:prstGeom>
+          <a:noFill/>
+        </p:spPr>
+        <p:txBody>
+          <a:bodyPr wrap="square" anchor="t"/>
+          <a:lstStyle/>
+          <a:p>
+            <a:pPr algn="ctr"/>
+            <a:r>
+              <a:rPr sz="900" b="0" i="0">
+                <a:solidFill>
+                  <a:srgbClr val="1E1E1E"/>
+                </a:solidFill>
+                <a:latin typeface="Arial"/>
+              </a:rPr>
+              <a:t>$40K</a:t>
+            </a:r>
+          </a:p>
+        </p:txBody>
+      </p:sp>
+      <p:sp>
+        <p:nvSpPr>
+          <p:cNvPr id="59" name="TextBox 58"/>
+          <p:cNvSpPr txBox="1"/>
+          <p:nvPr/>
+        </p:nvSpPr>
+        <p:spPr>
+          <a:xfrm>
+            <a:off x="8920276" y="2706624"/>
+            <a:ext cx="1480261" cy="274320"/>
+          </a:xfrm>
+          <a:prstGeom prst="rect">
+            <a:avLst/>
+          </a:prstGeom>
+          <a:noFill/>
+        </p:spPr>
+        <p:txBody>
+          <a:bodyPr wrap="square" anchor="t"/>
+          <a:lstStyle/>
+          <a:p>
+            <a:pPr algn="ctr"/>
+            <a:r>
+              <a:rPr sz="900" b="0" i="0">
+                <a:solidFill>
+                  <a:srgbClr val="1E1E1E"/>
+                </a:solidFill>
+                <a:latin typeface="Arial"/>
+              </a:rPr>
+              <a:t>$98K</a:t>
+            </a:r>
+          </a:p>
+        </p:txBody>
+      </p:sp>
+      <p:sp>
+        <p:nvSpPr>
+          <p:cNvPr id="60" name="TextBox 59"/>
+          <p:cNvSpPr txBox="1"/>
+          <p:nvPr/>
+        </p:nvSpPr>
+        <p:spPr>
+          <a:xfrm>
+            <a:off x="10473689" y="2706624"/>
+            <a:ext cx="1480261" cy="274320"/>
+          </a:xfrm>
+          <a:prstGeom prst="rect">
+            <a:avLst/>
+          </a:prstGeom>
+          <a:noFill/>
+        </p:spPr>
+        <p:txBody>
+          <a:bodyPr wrap="square" anchor="t"/>
+          <a:lstStyle/>
+          <a:p>
+            <a:pPr algn="ctr"/>
+            <a:r>
+              <a:rPr sz="900" b="0" i="0">
+                <a:solidFill>
+                  <a:srgbClr val="1E1E1E"/>
+                </a:solidFill>
+                <a:latin typeface="Arial"/>
+              </a:rPr>
+              <a:t>$155K</a:t>
+            </a:r>
+          </a:p>
+        </p:txBody>
+      </p:sp>
+      <p:sp>
+        <p:nvSpPr>
+          <p:cNvPr id="61" name="Rectangle 60"/>
+          <p:cNvSpPr/>
+          <p:nvPr/>
+        </p:nvSpPr>
+        <p:spPr>
+          <a:xfrm>
+            <a:off x="201168" y="2980944"/>
+            <a:ext cx="11789359" cy="365760"/>
+          </a:xfrm>
+          <a:prstGeom prst="rect">
+            <a:avLst/>
+          </a:prstGeom>
+          <a:solidFill>
+            <a:srgbClr val="F3F3F3"/>
+          </a:solidFill>
+          <a:ln>
+            <a:noFill/>
+          </a:ln>
+        </p:spPr>
+        <p:style>
+          <a:lnRef idx="1">
+            <a:schemeClr val="accent1"/>
+          </a:lnRef>
+          <a:fillRef idx="3">
+            <a:schemeClr val="accent1"/>
+          </a:fillRef>
+          <a:effectRef idx="2">
+            <a:schemeClr val="accent1"/>
+          </a:effectRef>
+          <a:fontRef idx="minor">
+            <a:schemeClr val="lt1"/>
+          </a:fontRef>
+        </p:style>
+        <p:txBody>
+          <a:bodyPr rtlCol="0" anchor="ctr"/>
+          <a:lstStyle/>
+          <a:p>
+            <a:pPr algn="ctr"/>
+          </a:p>
+        </p:txBody>
+      </p:sp>
+      <p:sp>
+        <p:nvSpPr>
           <p:cNvPr id="62" name="TextBox 61"/>
           <p:cNvSpPr txBox="1"/>
           <p:nvPr/>
         </p:nvSpPr>
         <p:spPr>
           <a:xfrm>
+            <a:off x="292608" y="3072384"/>
+            <a:ext cx="2340864" cy="274320"/>
+          </a:xfrm>
+          <a:prstGeom prst="rect">
+            <a:avLst/>
+          </a:prstGeom>
+          <a:noFill/>
+        </p:spPr>
+        <p:txBody>
+          <a:bodyPr wrap="square" anchor="t"/>
+          <a:lstStyle/>
+          <a:p>
+            <a:pPr algn="l"/>
+            <a:r>
+              <a:rPr sz="850" b="0" i="0">
+                <a:solidFill>
+                  <a:srgbClr val="1E1E1E"/>
+                </a:solidFill>
+                <a:latin typeface="Arial"/>
+              </a:rPr>
+              <a:t>GovCon / set-aside (compounding)</a:t>
+            </a:r>
+          </a:p>
+        </p:txBody>
+      </p:sp>
+      <p:sp>
+        <p:nvSpPr>
+          <p:cNvPr id="63" name="TextBox 62"/>
+          <p:cNvSpPr txBox="1"/>
+          <p:nvPr/>
+        </p:nvSpPr>
+        <p:spPr>
+          <a:xfrm>
+            <a:off x="2706624" y="3072384"/>
+            <a:ext cx="1480261" cy="274320"/>
+          </a:xfrm>
+          <a:prstGeom prst="rect">
+            <a:avLst/>
+          </a:prstGeom>
+          <a:noFill/>
+        </p:spPr>
+        <p:txBody>
+          <a:bodyPr wrap="square" anchor="t"/>
+          <a:lstStyle/>
+          <a:p>
+            <a:pPr algn="ctr"/>
+            <a:r>
+              <a:rPr sz="900" b="0" i="0">
+                <a:solidFill>
+                  <a:srgbClr val="1E1E1E"/>
+                </a:solidFill>
+                <a:latin typeface="Arial"/>
+              </a:rPr>
+              <a:t>—</a:t>
+            </a:r>
+          </a:p>
+        </p:txBody>
+      </p:sp>
+      <p:sp>
+        <p:nvSpPr>
+          <p:cNvPr id="64" name="TextBox 63"/>
+          <p:cNvSpPr txBox="1"/>
+          <p:nvPr/>
+        </p:nvSpPr>
+        <p:spPr>
+          <a:xfrm>
+            <a:off x="4260037" y="3072384"/>
+            <a:ext cx="1480261" cy="274320"/>
+          </a:xfrm>
+          <a:prstGeom prst="rect">
+            <a:avLst/>
+          </a:prstGeom>
+          <a:noFill/>
+        </p:spPr>
+        <p:txBody>
+          <a:bodyPr wrap="square" anchor="t"/>
+          <a:lstStyle/>
+          <a:p>
+            <a:pPr algn="ctr"/>
+            <a:r>
+              <a:rPr sz="900" b="0" i="0">
+                <a:solidFill>
+                  <a:srgbClr val="1E1E1E"/>
+                </a:solidFill>
+                <a:latin typeface="Arial"/>
+              </a:rPr>
+              <a:t>$30K</a:t>
+            </a:r>
+          </a:p>
+        </p:txBody>
+      </p:sp>
+      <p:sp>
+        <p:nvSpPr>
+          <p:cNvPr id="65" name="TextBox 64"/>
+          <p:cNvSpPr txBox="1"/>
+          <p:nvPr/>
+        </p:nvSpPr>
+        <p:spPr>
+          <a:xfrm>
+            <a:off x="5813450" y="3072384"/>
+            <a:ext cx="1480261" cy="274320"/>
+          </a:xfrm>
+          <a:prstGeom prst="rect">
+            <a:avLst/>
+          </a:prstGeom>
+          <a:noFill/>
+        </p:spPr>
+        <p:txBody>
+          <a:bodyPr wrap="square" anchor="t"/>
+          <a:lstStyle/>
+          <a:p>
+            <a:pPr algn="ctr"/>
+            <a:r>
+              <a:rPr sz="900" b="0" i="0">
+                <a:solidFill>
+                  <a:srgbClr val="1E1E1E"/>
+                </a:solidFill>
+                <a:latin typeface="Arial"/>
+              </a:rPr>
+              <a:t>$64K</a:t>
+            </a:r>
+          </a:p>
+        </p:txBody>
+      </p:sp>
+      <p:sp>
+        <p:nvSpPr>
+          <p:cNvPr id="66" name="TextBox 65"/>
+          <p:cNvSpPr txBox="1"/>
+          <p:nvPr/>
+        </p:nvSpPr>
+        <p:spPr>
+          <a:xfrm>
+            <a:off x="7366863" y="3072384"/>
+            <a:ext cx="1480261" cy="274320"/>
+          </a:xfrm>
+          <a:prstGeom prst="rect">
+            <a:avLst/>
+          </a:prstGeom>
+          <a:noFill/>
+        </p:spPr>
+        <p:txBody>
+          <a:bodyPr wrap="square" anchor="t"/>
+          <a:lstStyle/>
+          <a:p>
+            <a:pPr algn="ctr"/>
+            <a:r>
+              <a:rPr sz="900" b="0" i="0">
+                <a:solidFill>
+                  <a:srgbClr val="1E1E1E"/>
+                </a:solidFill>
+                <a:latin typeface="Arial"/>
+              </a:rPr>
+              <a:t>$101K</a:t>
+            </a:r>
+          </a:p>
+        </p:txBody>
+      </p:sp>
+      <p:sp>
+        <p:nvSpPr>
+          <p:cNvPr id="67" name="TextBox 66"/>
+          <p:cNvSpPr txBox="1"/>
+          <p:nvPr/>
+        </p:nvSpPr>
+        <p:spPr>
+          <a:xfrm>
+            <a:off x="8920276" y="3072384"/>
+            <a:ext cx="1480261" cy="274320"/>
+          </a:xfrm>
+          <a:prstGeom prst="rect">
+            <a:avLst/>
+          </a:prstGeom>
+          <a:noFill/>
+        </p:spPr>
+        <p:txBody>
+          <a:bodyPr wrap="square" anchor="t"/>
+          <a:lstStyle/>
+          <a:p>
+            <a:pPr algn="ctr"/>
+            <a:r>
+              <a:rPr sz="900" b="0" i="0">
+                <a:solidFill>
+                  <a:srgbClr val="1E1E1E"/>
+                </a:solidFill>
+                <a:latin typeface="Arial"/>
+              </a:rPr>
+              <a:t>$141K</a:t>
+            </a:r>
+          </a:p>
+        </p:txBody>
+      </p:sp>
+      <p:sp>
+        <p:nvSpPr>
+          <p:cNvPr id="68" name="TextBox 67"/>
+          <p:cNvSpPr txBox="1"/>
+          <p:nvPr/>
+        </p:nvSpPr>
+        <p:spPr>
+          <a:xfrm>
+            <a:off x="10473689" y="3072384"/>
+            <a:ext cx="1480261" cy="274320"/>
+          </a:xfrm>
+          <a:prstGeom prst="rect">
+            <a:avLst/>
+          </a:prstGeom>
+          <a:noFill/>
+        </p:spPr>
+        <p:txBody>
+          <a:bodyPr wrap="square" anchor="t"/>
+          <a:lstStyle/>
+          <a:p>
+            <a:pPr algn="ctr"/>
+            <a:r>
+              <a:rPr sz="900" b="0" i="0">
+                <a:solidFill>
+                  <a:srgbClr val="1E1E1E"/>
+                </a:solidFill>
+                <a:latin typeface="Arial"/>
+              </a:rPr>
+              <a:t>$184K</a:t>
+            </a:r>
+          </a:p>
+        </p:txBody>
+      </p:sp>
+      <p:sp>
+        <p:nvSpPr>
+          <p:cNvPr id="69" name="Rectangle 68"/>
+          <p:cNvSpPr/>
+          <p:nvPr/>
+        </p:nvSpPr>
+        <p:spPr>
+          <a:xfrm>
+            <a:off x="201168" y="3346704"/>
+            <a:ext cx="11789359" cy="365760"/>
+          </a:xfrm>
+          <a:prstGeom prst="rect">
+            <a:avLst/>
+          </a:prstGeom>
+          <a:solidFill>
+            <a:srgbClr val="2C3A44"/>
+          </a:solidFill>
+          <a:ln>
+            <a:noFill/>
+          </a:ln>
+        </p:spPr>
+        <p:style>
+          <a:lnRef idx="1">
+            <a:schemeClr val="accent1"/>
+          </a:lnRef>
+          <a:fillRef idx="3">
+            <a:schemeClr val="accent1"/>
+          </a:fillRef>
+          <a:effectRef idx="2">
+            <a:schemeClr val="accent1"/>
+          </a:effectRef>
+          <a:fontRef idx="minor">
+            <a:schemeClr val="lt1"/>
+          </a:fontRef>
+        </p:style>
+        <p:txBody>
+          <a:bodyPr rtlCol="0" anchor="ctr"/>
+          <a:lstStyle/>
+          <a:p>
+            <a:pPr algn="ctr"/>
+          </a:p>
+        </p:txBody>
+      </p:sp>
+      <p:sp>
+        <p:nvSpPr>
+          <p:cNvPr id="70" name="TextBox 69"/>
+          <p:cNvSpPr txBox="1"/>
+          <p:nvPr/>
+        </p:nvSpPr>
+        <p:spPr>
+          <a:xfrm>
+            <a:off x="292608" y="3438144"/>
+            <a:ext cx="2340864" cy="274320"/>
+          </a:xfrm>
+          <a:prstGeom prst="rect">
+            <a:avLst/>
+          </a:prstGeom>
+          <a:noFill/>
+        </p:spPr>
+        <p:txBody>
+          <a:bodyPr wrap="square" anchor="t"/>
+          <a:lstStyle/>
+          <a:p>
+            <a:pPr algn="l"/>
+            <a:r>
+              <a:rPr sz="850" b="1" i="0">
+                <a:solidFill>
+                  <a:srgbClr val="FFFFFF"/>
+                </a:solidFill>
+                <a:latin typeface="Arial"/>
+              </a:rPr>
+              <a:t>Organic EBITDA</a:t>
+            </a:r>
+          </a:p>
+        </p:txBody>
+      </p:sp>
+      <p:sp>
+        <p:nvSpPr>
+          <p:cNvPr id="71" name="TextBox 70"/>
+          <p:cNvSpPr txBox="1"/>
+          <p:nvPr/>
+        </p:nvSpPr>
+        <p:spPr>
+          <a:xfrm>
+            <a:off x="2706624" y="3438144"/>
+            <a:ext cx="1480261" cy="274320"/>
+          </a:xfrm>
+          <a:prstGeom prst="rect">
+            <a:avLst/>
+          </a:prstGeom>
+          <a:noFill/>
+        </p:spPr>
+        <p:txBody>
+          <a:bodyPr wrap="square" anchor="t"/>
+          <a:lstStyle/>
+          <a:p>
+            <a:pPr algn="ctr"/>
+            <a:r>
+              <a:rPr sz="900" b="1" i="0">
+                <a:solidFill>
+                  <a:srgbClr val="FFFFFF"/>
+                </a:solidFill>
+                <a:latin typeface="Arial"/>
+              </a:rPr>
+              <a:t>$150K</a:t>
+            </a:r>
+          </a:p>
+        </p:txBody>
+      </p:sp>
+      <p:sp>
+        <p:nvSpPr>
+          <p:cNvPr id="72" name="TextBox 71"/>
+          <p:cNvSpPr txBox="1"/>
+          <p:nvPr/>
+        </p:nvSpPr>
+        <p:spPr>
+          <a:xfrm>
+            <a:off x="4260037" y="3438144"/>
+            <a:ext cx="1480261" cy="274320"/>
+          </a:xfrm>
+          <a:prstGeom prst="rect">
+            <a:avLst/>
+          </a:prstGeom>
+          <a:noFill/>
+        </p:spPr>
+        <p:txBody>
+          <a:bodyPr wrap="square" anchor="t"/>
+          <a:lstStyle/>
+          <a:p>
+            <a:pPr algn="ctr"/>
+            <a:r>
+              <a:rPr sz="900" b="1" i="0">
+                <a:solidFill>
+                  <a:srgbClr val="FFFFFF"/>
+                </a:solidFill>
+                <a:latin typeface="Arial"/>
+              </a:rPr>
+              <a:t>$213K</a:t>
+            </a:r>
+          </a:p>
+        </p:txBody>
+      </p:sp>
+      <p:sp>
+        <p:nvSpPr>
+          <p:cNvPr id="73" name="TextBox 72"/>
+          <p:cNvSpPr txBox="1"/>
+          <p:nvPr/>
+        </p:nvSpPr>
+        <p:spPr>
+          <a:xfrm>
+            <a:off x="5813450" y="3438144"/>
+            <a:ext cx="1480261" cy="274320"/>
+          </a:xfrm>
+          <a:prstGeom prst="rect">
+            <a:avLst/>
+          </a:prstGeom>
+          <a:noFill/>
+        </p:spPr>
+        <p:txBody>
+          <a:bodyPr wrap="square" anchor="t"/>
+          <a:lstStyle/>
+          <a:p>
+            <a:pPr algn="ctr"/>
+            <a:r>
+              <a:rPr sz="900" b="1" i="0">
+                <a:solidFill>
+                  <a:srgbClr val="FFFFFF"/>
+                </a:solidFill>
+                <a:latin typeface="Arial"/>
+              </a:rPr>
+              <a:t>$338K</a:t>
+            </a:r>
+          </a:p>
+        </p:txBody>
+      </p:sp>
+      <p:sp>
+        <p:nvSpPr>
+          <p:cNvPr id="74" name="TextBox 73"/>
+          <p:cNvSpPr txBox="1"/>
+          <p:nvPr/>
+        </p:nvSpPr>
+        <p:spPr>
+          <a:xfrm>
+            <a:off x="7366863" y="3438144"/>
+            <a:ext cx="1480261" cy="274320"/>
+          </a:xfrm>
+          <a:prstGeom prst="rect">
+            <a:avLst/>
+          </a:prstGeom>
+          <a:noFill/>
+        </p:spPr>
+        <p:txBody>
+          <a:bodyPr wrap="square" anchor="t"/>
+          <a:lstStyle/>
+          <a:p>
+            <a:pPr algn="ctr"/>
+            <a:r>
+              <a:rPr sz="900" b="1" i="0">
+                <a:solidFill>
+                  <a:srgbClr val="FFFFFF"/>
+                </a:solidFill>
+                <a:latin typeface="Arial"/>
+              </a:rPr>
+              <a:t>$523K</a:t>
+            </a:r>
+          </a:p>
+        </p:txBody>
+      </p:sp>
+      <p:sp>
+        <p:nvSpPr>
+          <p:cNvPr id="75" name="TextBox 74"/>
+          <p:cNvSpPr txBox="1"/>
+          <p:nvPr/>
+        </p:nvSpPr>
+        <p:spPr>
+          <a:xfrm>
+            <a:off x="8920276" y="3438144"/>
+            <a:ext cx="1480261" cy="274320"/>
+          </a:xfrm>
+          <a:prstGeom prst="rect">
+            <a:avLst/>
+          </a:prstGeom>
+          <a:noFill/>
+        </p:spPr>
+        <p:txBody>
+          <a:bodyPr wrap="square" anchor="t"/>
+          <a:lstStyle/>
+          <a:p>
+            <a:pPr algn="ctr"/>
+            <a:r>
+              <a:rPr sz="900" b="1" i="0">
+                <a:solidFill>
+                  <a:srgbClr val="FFFFFF"/>
+                </a:solidFill>
+                <a:latin typeface="Arial"/>
+              </a:rPr>
+              <a:t>$726K</a:t>
+            </a:r>
+          </a:p>
+        </p:txBody>
+      </p:sp>
+      <p:sp>
+        <p:nvSpPr>
+          <p:cNvPr id="76" name="TextBox 75"/>
+          <p:cNvSpPr txBox="1"/>
+          <p:nvPr/>
+        </p:nvSpPr>
+        <p:spPr>
+          <a:xfrm>
+            <a:off x="10473689" y="3438144"/>
+            <a:ext cx="1480261" cy="274320"/>
+          </a:xfrm>
+          <a:prstGeom prst="rect">
+            <a:avLst/>
+          </a:prstGeom>
+          <a:noFill/>
+        </p:spPr>
+        <p:txBody>
+          <a:bodyPr wrap="square" anchor="t"/>
+          <a:lstStyle/>
+          <a:p>
+            <a:pPr algn="ctr"/>
+            <a:r>
+              <a:rPr sz="900" b="1" i="0">
+                <a:solidFill>
+                  <a:srgbClr val="FFFFFF"/>
+                </a:solidFill>
+                <a:latin typeface="Arial"/>
+              </a:rPr>
+              <a:t>$925K</a:t>
+            </a:r>
+          </a:p>
+        </p:txBody>
+      </p:sp>
+      <p:sp>
+        <p:nvSpPr>
+          <p:cNvPr id="77" name="Rectangle 76"/>
+          <p:cNvSpPr/>
+          <p:nvPr/>
+        </p:nvSpPr>
+        <p:spPr>
+          <a:xfrm>
+            <a:off x="201168" y="3712464"/>
+            <a:ext cx="11789359" cy="365760"/>
+          </a:xfrm>
+          <a:prstGeom prst="rect">
+            <a:avLst/>
+          </a:prstGeom>
+          <a:solidFill>
+            <a:srgbClr val="E8F5E9"/>
+          </a:solidFill>
+          <a:ln>
+            <a:noFill/>
+          </a:ln>
+        </p:spPr>
+        <p:style>
+          <a:lnRef idx="1">
+            <a:schemeClr val="accent1"/>
+          </a:lnRef>
+          <a:fillRef idx="3">
+            <a:schemeClr val="accent1"/>
+          </a:fillRef>
+          <a:effectRef idx="2">
+            <a:schemeClr val="accent1"/>
+          </a:effectRef>
+          <a:fontRef idx="minor">
+            <a:schemeClr val="lt1"/>
+          </a:fontRef>
+        </p:style>
+        <p:txBody>
+          <a:bodyPr rtlCol="0" anchor="ctr"/>
+          <a:lstStyle/>
+          <a:p>
+            <a:pPr algn="ctr"/>
+          </a:p>
+        </p:txBody>
+      </p:sp>
+      <p:sp>
+        <p:nvSpPr>
+          <p:cNvPr id="78" name="TextBox 77"/>
+          <p:cNvSpPr txBox="1"/>
+          <p:nvPr/>
+        </p:nvSpPr>
+        <p:spPr>
+          <a:xfrm>
+            <a:off x="292608" y="3803904"/>
+            <a:ext cx="1883664" cy="274320"/>
+          </a:xfrm>
+          <a:prstGeom prst="rect">
+            <a:avLst/>
+          </a:prstGeom>
+          <a:noFill/>
+        </p:spPr>
+        <p:txBody>
+          <a:bodyPr wrap="square" anchor="t"/>
+          <a:lstStyle/>
+          <a:p>
+            <a:pPr algn="l"/>
+            <a:r>
+              <a:rPr sz="850" b="1" i="0">
+                <a:solidFill>
+                  <a:srgbClr val="2E7D32"/>
+                </a:solidFill>
+                <a:latin typeface="Arial"/>
+              </a:rPr>
+              <a:t>Acquisition (opportunistic, mid yr 3)</a:t>
+            </a:r>
+          </a:p>
+        </p:txBody>
+      </p:sp>
+      <p:sp>
+        <p:nvSpPr>
+          <p:cNvPr id="79" name="Rounded Rectangle 78"/>
+          <p:cNvSpPr/>
+          <p:nvPr/>
+        </p:nvSpPr>
+        <p:spPr>
+          <a:xfrm>
+            <a:off x="2121408" y="3817620"/>
+            <a:ext cx="475488" cy="155448"/>
+          </a:xfrm>
+          <a:prstGeom prst="roundRect">
+            <a:avLst>
+              <a:gd name="adj" fmla="val 35000"/>
+            </a:avLst>
+          </a:prstGeom>
+          <a:solidFill>
+            <a:srgbClr val="2E7D32"/>
+          </a:solidFill>
+          <a:ln>
+            <a:noFill/>
+          </a:ln>
+        </p:spPr>
+        <p:style>
+          <a:lnRef idx="1">
+            <a:schemeClr val="accent1"/>
+          </a:lnRef>
+          <a:fillRef idx="3">
+            <a:schemeClr val="accent1"/>
+          </a:fillRef>
+          <a:effectRef idx="2">
+            <a:schemeClr val="accent1"/>
+          </a:effectRef>
+          <a:fontRef idx="minor">
+            <a:schemeClr val="lt1"/>
+          </a:fontRef>
+        </p:style>
+        <p:txBody>
+          <a:bodyPr rtlCol="0" anchor="ctr" wrap="square"/>
+          <a:lstStyle/>
+          <a:p>
+            <a:pPr algn="ctr"/>
+            <a:r>
+              <a:rPr sz="650" b="1" i="0">
+                <a:solidFill>
+                  <a:srgbClr val="FFFFFF"/>
+                </a:solidFill>
+                <a:latin typeface="Arial"/>
+              </a:rPr>
+              <a:t>NewCo</a:t>
+            </a:r>
+          </a:p>
+        </p:txBody>
+      </p:sp>
+      <p:sp>
+        <p:nvSpPr>
+          <p:cNvPr id="80" name="TextBox 79"/>
+          <p:cNvSpPr txBox="1"/>
+          <p:nvPr/>
+        </p:nvSpPr>
+        <p:spPr>
+          <a:xfrm>
+            <a:off x="2706624" y="3803904"/>
+            <a:ext cx="1480261" cy="274320"/>
+          </a:xfrm>
+          <a:prstGeom prst="rect">
+            <a:avLst/>
+          </a:prstGeom>
+          <a:noFill/>
+        </p:spPr>
+        <p:txBody>
+          <a:bodyPr wrap="square" anchor="t"/>
+          <a:lstStyle/>
+          <a:p>
+            <a:pPr algn="ctr"/>
+            <a:r>
+              <a:rPr sz="900" b="1" i="0">
+                <a:solidFill>
+                  <a:srgbClr val="2E7D32"/>
+                </a:solidFill>
+                <a:latin typeface="Arial"/>
+              </a:rPr>
+              <a:t>—</a:t>
+            </a:r>
+          </a:p>
+        </p:txBody>
+      </p:sp>
+      <p:sp>
+        <p:nvSpPr>
+          <p:cNvPr id="81" name="TextBox 80"/>
+          <p:cNvSpPr txBox="1"/>
+          <p:nvPr/>
+        </p:nvSpPr>
+        <p:spPr>
+          <a:xfrm>
+            <a:off x="4260037" y="3803904"/>
+            <a:ext cx="1480261" cy="274320"/>
+          </a:xfrm>
+          <a:prstGeom prst="rect">
+            <a:avLst/>
+          </a:prstGeom>
+          <a:noFill/>
+        </p:spPr>
+        <p:txBody>
+          <a:bodyPr wrap="square" anchor="t"/>
+          <a:lstStyle/>
+          <a:p>
+            <a:pPr algn="ctr"/>
+            <a:r>
+              <a:rPr sz="900" b="1" i="0">
+                <a:solidFill>
+                  <a:srgbClr val="2E7D32"/>
+                </a:solidFill>
+                <a:latin typeface="Arial"/>
+              </a:rPr>
+              <a:t>—</a:t>
+            </a:r>
+          </a:p>
+        </p:txBody>
+      </p:sp>
+      <p:sp>
+        <p:nvSpPr>
+          <p:cNvPr id="82" name="TextBox 81"/>
+          <p:cNvSpPr txBox="1"/>
+          <p:nvPr/>
+        </p:nvSpPr>
+        <p:spPr>
+          <a:xfrm>
+            <a:off x="5813450" y="3803904"/>
+            <a:ext cx="1480261" cy="274320"/>
+          </a:xfrm>
+          <a:prstGeom prst="rect">
+            <a:avLst/>
+          </a:prstGeom>
+          <a:noFill/>
+        </p:spPr>
+        <p:txBody>
+          <a:bodyPr wrap="square" anchor="t"/>
+          <a:lstStyle/>
+          <a:p>
+            <a:pPr algn="ctr"/>
+            <a:r>
+              <a:rPr sz="900" b="1" i="0">
+                <a:solidFill>
+                  <a:srgbClr val="2E7D32"/>
+                </a:solidFill>
+                <a:latin typeface="Arial"/>
+              </a:rPr>
+              <a:t>—</a:t>
+            </a:r>
+          </a:p>
+        </p:txBody>
+      </p:sp>
+      <p:sp>
+        <p:nvSpPr>
+          <p:cNvPr id="83" name="TextBox 82"/>
+          <p:cNvSpPr txBox="1"/>
+          <p:nvPr/>
+        </p:nvSpPr>
+        <p:spPr>
+          <a:xfrm>
+            <a:off x="7366863" y="3803904"/>
+            <a:ext cx="1480261" cy="274320"/>
+          </a:xfrm>
+          <a:prstGeom prst="rect">
+            <a:avLst/>
+          </a:prstGeom>
+          <a:noFill/>
+        </p:spPr>
+        <p:txBody>
+          <a:bodyPr wrap="square" anchor="t"/>
+          <a:lstStyle/>
+          <a:p>
+            <a:pPr algn="ctr"/>
+            <a:r>
+              <a:rPr sz="900" b="1" i="0">
+                <a:solidFill>
+                  <a:srgbClr val="2E7D32"/>
+                </a:solidFill>
+                <a:latin typeface="Arial"/>
+              </a:rPr>
+              <a:t>$200K</a:t>
+            </a:r>
+          </a:p>
+        </p:txBody>
+      </p:sp>
+      <p:sp>
+        <p:nvSpPr>
+          <p:cNvPr id="84" name="TextBox 83"/>
+          <p:cNvSpPr txBox="1"/>
+          <p:nvPr/>
+        </p:nvSpPr>
+        <p:spPr>
+          <a:xfrm>
+            <a:off x="8920276" y="3803904"/>
+            <a:ext cx="1480261" cy="274320"/>
+          </a:xfrm>
+          <a:prstGeom prst="rect">
+            <a:avLst/>
+          </a:prstGeom>
+          <a:noFill/>
+        </p:spPr>
+        <p:txBody>
+          <a:bodyPr wrap="square" anchor="t"/>
+          <a:lstStyle/>
+          <a:p>
+            <a:pPr algn="ctr"/>
+            <a:r>
+              <a:rPr sz="900" b="1" i="0">
+                <a:solidFill>
+                  <a:srgbClr val="2E7D32"/>
+                </a:solidFill>
+                <a:latin typeface="Arial"/>
+              </a:rPr>
+              <a:t>$400K</a:t>
+            </a:r>
+          </a:p>
+        </p:txBody>
+      </p:sp>
+      <p:sp>
+        <p:nvSpPr>
+          <p:cNvPr id="85" name="TextBox 84"/>
+          <p:cNvSpPr txBox="1"/>
+          <p:nvPr/>
+        </p:nvSpPr>
+        <p:spPr>
+          <a:xfrm>
+            <a:off x="10473689" y="3803904"/>
+            <a:ext cx="1480261" cy="274320"/>
+          </a:xfrm>
+          <a:prstGeom prst="rect">
+            <a:avLst/>
+          </a:prstGeom>
+          <a:noFill/>
+        </p:spPr>
+        <p:txBody>
+          <a:bodyPr wrap="square" anchor="t"/>
+          <a:lstStyle/>
+          <a:p>
+            <a:pPr algn="ctr"/>
+            <a:r>
+              <a:rPr sz="900" b="1" i="0">
+                <a:solidFill>
+                  <a:srgbClr val="2E7D32"/>
+                </a:solidFill>
+                <a:latin typeface="Arial"/>
+              </a:rPr>
+              <a:t>$400K</a:t>
+            </a:r>
+          </a:p>
+        </p:txBody>
+      </p:sp>
+      <p:sp>
+        <p:nvSpPr>
+          <p:cNvPr id="86" name="Rectangle 85"/>
+          <p:cNvSpPr/>
+          <p:nvPr/>
+        </p:nvSpPr>
+        <p:spPr>
+          <a:xfrm>
+            <a:off x="201168" y="4078224"/>
+            <a:ext cx="11789359" cy="365760"/>
+          </a:xfrm>
+          <a:prstGeom prst="rect">
+            <a:avLst/>
+          </a:prstGeom>
+          <a:solidFill>
+            <a:srgbClr val="B84C30"/>
+          </a:solidFill>
+          <a:ln>
+            <a:noFill/>
+          </a:ln>
+        </p:spPr>
+        <p:style>
+          <a:lnRef idx="1">
+            <a:schemeClr val="accent1"/>
+          </a:lnRef>
+          <a:fillRef idx="3">
+            <a:schemeClr val="accent1"/>
+          </a:fillRef>
+          <a:effectRef idx="2">
+            <a:schemeClr val="accent1"/>
+          </a:effectRef>
+          <a:fontRef idx="minor">
+            <a:schemeClr val="lt1"/>
+          </a:fontRef>
+        </p:style>
+        <p:txBody>
+          <a:bodyPr rtlCol="0" anchor="ctr"/>
+          <a:lstStyle/>
+          <a:p>
+            <a:pPr algn="ctr"/>
+          </a:p>
+        </p:txBody>
+      </p:sp>
+      <p:sp>
+        <p:nvSpPr>
+          <p:cNvPr id="87" name="TextBox 86"/>
+          <p:cNvSpPr txBox="1"/>
+          <p:nvPr/>
+        </p:nvSpPr>
+        <p:spPr>
+          <a:xfrm>
+            <a:off x="292608" y="4169664"/>
+            <a:ext cx="2340864" cy="274320"/>
+          </a:xfrm>
+          <a:prstGeom prst="rect">
+            <a:avLst/>
+          </a:prstGeom>
+          <a:noFill/>
+        </p:spPr>
+        <p:txBody>
+          <a:bodyPr wrap="square" anchor="t"/>
+          <a:lstStyle/>
+          <a:p>
+            <a:pPr algn="l"/>
+            <a:r>
+              <a:rPr sz="850" b="1" i="0">
+                <a:solidFill>
+                  <a:srgbClr val="FFFFFF"/>
+                </a:solidFill>
+                <a:latin typeface="Arial"/>
+              </a:rPr>
+              <a:t>Organic + Inorganic EBITDA</a:t>
+            </a:r>
+          </a:p>
+        </p:txBody>
+      </p:sp>
+      <p:sp>
+        <p:nvSpPr>
+          <p:cNvPr id="88" name="TextBox 87"/>
+          <p:cNvSpPr txBox="1"/>
+          <p:nvPr/>
+        </p:nvSpPr>
+        <p:spPr>
+          <a:xfrm>
+            <a:off x="2706624" y="4169664"/>
+            <a:ext cx="1480261" cy="274320"/>
+          </a:xfrm>
+          <a:prstGeom prst="rect">
+            <a:avLst/>
+          </a:prstGeom>
+          <a:noFill/>
+        </p:spPr>
+        <p:txBody>
+          <a:bodyPr wrap="square" anchor="t"/>
+          <a:lstStyle/>
+          <a:p>
+            <a:pPr algn="ctr"/>
+            <a:r>
+              <a:rPr sz="900" b="1" i="0">
+                <a:solidFill>
+                  <a:srgbClr val="FFFFFF"/>
+                </a:solidFill>
+                <a:latin typeface="Arial"/>
+              </a:rPr>
+              <a:t>$150K</a:t>
+            </a:r>
+          </a:p>
+        </p:txBody>
+      </p:sp>
+      <p:sp>
+        <p:nvSpPr>
+          <p:cNvPr id="89" name="TextBox 88"/>
+          <p:cNvSpPr txBox="1"/>
+          <p:nvPr/>
+        </p:nvSpPr>
+        <p:spPr>
+          <a:xfrm>
+            <a:off x="4260037" y="4169664"/>
+            <a:ext cx="1480261" cy="274320"/>
+          </a:xfrm>
+          <a:prstGeom prst="rect">
+            <a:avLst/>
+          </a:prstGeom>
+          <a:noFill/>
+        </p:spPr>
+        <p:txBody>
+          <a:bodyPr wrap="square" anchor="t"/>
+          <a:lstStyle/>
+          <a:p>
+            <a:pPr algn="ctr"/>
+            <a:r>
+              <a:rPr sz="900" b="1" i="0">
+                <a:solidFill>
+                  <a:srgbClr val="FFFFFF"/>
+                </a:solidFill>
+                <a:latin typeface="Arial"/>
+              </a:rPr>
+              <a:t>$213K</a:t>
+            </a:r>
+          </a:p>
+        </p:txBody>
+      </p:sp>
+      <p:sp>
+        <p:nvSpPr>
+          <p:cNvPr id="90" name="TextBox 89"/>
+          <p:cNvSpPr txBox="1"/>
+          <p:nvPr/>
+        </p:nvSpPr>
+        <p:spPr>
+          <a:xfrm>
+            <a:off x="5813450" y="4169664"/>
+            <a:ext cx="1480261" cy="274320"/>
+          </a:xfrm>
+          <a:prstGeom prst="rect">
+            <a:avLst/>
+          </a:prstGeom>
+          <a:noFill/>
+        </p:spPr>
+        <p:txBody>
+          <a:bodyPr wrap="square" anchor="t"/>
+          <a:lstStyle/>
+          <a:p>
+            <a:pPr algn="ctr"/>
+            <a:r>
+              <a:rPr sz="900" b="1" i="0">
+                <a:solidFill>
+                  <a:srgbClr val="FFFFFF"/>
+                </a:solidFill>
+                <a:latin typeface="Arial"/>
+              </a:rPr>
+              <a:t>$338K</a:t>
+            </a:r>
+          </a:p>
+        </p:txBody>
+      </p:sp>
+      <p:sp>
+        <p:nvSpPr>
+          <p:cNvPr id="91" name="TextBox 90"/>
+          <p:cNvSpPr txBox="1"/>
+          <p:nvPr/>
+        </p:nvSpPr>
+        <p:spPr>
+          <a:xfrm>
+            <a:off x="7366863" y="4169664"/>
+            <a:ext cx="1480261" cy="274320"/>
+          </a:xfrm>
+          <a:prstGeom prst="rect">
+            <a:avLst/>
+          </a:prstGeom>
+          <a:noFill/>
+        </p:spPr>
+        <p:txBody>
+          <a:bodyPr wrap="square" anchor="t"/>
+          <a:lstStyle/>
+          <a:p>
+            <a:pPr algn="ctr"/>
+            <a:r>
+              <a:rPr sz="900" b="1" i="0">
+                <a:solidFill>
+                  <a:srgbClr val="FFFFFF"/>
+                </a:solidFill>
+                <a:latin typeface="Arial"/>
+              </a:rPr>
+              <a:t>$723K</a:t>
+            </a:r>
+          </a:p>
+        </p:txBody>
+      </p:sp>
+      <p:sp>
+        <p:nvSpPr>
+          <p:cNvPr id="92" name="TextBox 91"/>
+          <p:cNvSpPr txBox="1"/>
+          <p:nvPr/>
+        </p:nvSpPr>
+        <p:spPr>
+          <a:xfrm>
+            <a:off x="8920276" y="4169664"/>
+            <a:ext cx="1480261" cy="274320"/>
+          </a:xfrm>
+          <a:prstGeom prst="rect">
+            <a:avLst/>
+          </a:prstGeom>
+          <a:noFill/>
+        </p:spPr>
+        <p:txBody>
+          <a:bodyPr wrap="square" anchor="t"/>
+          <a:lstStyle/>
+          <a:p>
+            <a:pPr algn="ctr"/>
+            <a:r>
+              <a:rPr sz="900" b="1" i="0">
+                <a:solidFill>
+                  <a:srgbClr val="FFFFFF"/>
+                </a:solidFill>
+                <a:latin typeface="Arial"/>
+              </a:rPr>
+              <a:t>$1.13M</a:t>
+            </a:r>
+          </a:p>
+        </p:txBody>
+      </p:sp>
+      <p:sp>
+        <p:nvSpPr>
+          <p:cNvPr id="93" name="TextBox 92"/>
+          <p:cNvSpPr txBox="1"/>
+          <p:nvPr/>
+        </p:nvSpPr>
+        <p:spPr>
+          <a:xfrm>
+            <a:off x="10473689" y="4169664"/>
+            <a:ext cx="1480261" cy="274320"/>
+          </a:xfrm>
+          <a:prstGeom prst="rect">
+            <a:avLst/>
+          </a:prstGeom>
+          <a:noFill/>
+        </p:spPr>
+        <p:txBody>
+          <a:bodyPr wrap="square" anchor="t"/>
+          <a:lstStyle/>
+          <a:p>
+            <a:pPr algn="ctr"/>
+            <a:r>
+              <a:rPr sz="900" b="1" i="0">
+                <a:solidFill>
+                  <a:srgbClr val="FFFFFF"/>
+                </a:solidFill>
+                <a:latin typeface="Arial"/>
+              </a:rPr>
+              <a:t>$1.32M</a:t>
+            </a:r>
+          </a:p>
+        </p:txBody>
+      </p:sp>
+      <p:sp>
+        <p:nvSpPr>
+          <p:cNvPr id="94" name="Rectangle 93"/>
+          <p:cNvSpPr/>
+          <p:nvPr/>
+        </p:nvSpPr>
+        <p:spPr>
+          <a:xfrm>
+            <a:off x="201168" y="4572000"/>
+            <a:ext cx="5830671" cy="1207008"/>
+          </a:xfrm>
+          <a:prstGeom prst="rect">
+            <a:avLst/>
+          </a:prstGeom>
+          <a:solidFill>
+            <a:srgbClr val="3D4F5C"/>
+          </a:solidFill>
+          <a:ln>
+            <a:noFill/>
+          </a:ln>
+        </p:spPr>
+        <p:style>
+          <a:lnRef idx="1">
+            <a:schemeClr val="accent1"/>
+          </a:lnRef>
+          <a:fillRef idx="3">
+            <a:schemeClr val="accent1"/>
+          </a:fillRef>
+          <a:effectRef idx="2">
+            <a:schemeClr val="accent1"/>
+          </a:effectRef>
+          <a:fontRef idx="minor">
+            <a:schemeClr val="lt1"/>
+          </a:fontRef>
+        </p:style>
+        <p:txBody>
+          <a:bodyPr rtlCol="0" anchor="ctr"/>
+          <a:lstStyle/>
+          <a:p>
+            <a:pPr algn="ctr"/>
+          </a:p>
+        </p:txBody>
+      </p:sp>
+      <p:sp>
+        <p:nvSpPr>
+          <p:cNvPr id="95" name="TextBox 94"/>
+          <p:cNvSpPr txBox="1"/>
+          <p:nvPr/>
+        </p:nvSpPr>
+        <p:spPr>
+          <a:xfrm>
+            <a:off x="338328" y="4645152"/>
+            <a:ext cx="5602071" cy="201168"/>
+          </a:xfrm>
+          <a:prstGeom prst="rect">
+            <a:avLst/>
+          </a:prstGeom>
+          <a:noFill/>
+        </p:spPr>
+        <p:txBody>
+          <a:bodyPr wrap="square" anchor="t"/>
+          <a:lstStyle/>
+          <a:p>
+            <a:pPr algn="l"/>
+            <a:r>
+              <a:rPr sz="900" b="0" i="0">
+                <a:solidFill>
+                  <a:srgbClr val="A8BAC5"/>
+                </a:solidFill>
+                <a:latin typeface="Arial"/>
+              </a:rPr>
+              <a:t>Organic only — Year 5</a:t>
+            </a:r>
+          </a:p>
+        </p:txBody>
+      </p:sp>
+      <p:sp>
+        <p:nvSpPr>
+          <p:cNvPr id="96" name="TextBox 95"/>
+          <p:cNvSpPr txBox="1"/>
+          <p:nvPr/>
+        </p:nvSpPr>
+        <p:spPr>
+          <a:xfrm>
+            <a:off x="338328" y="4846320"/>
+            <a:ext cx="5602071" cy="402336"/>
+          </a:xfrm>
+          <a:prstGeom prst="rect">
+            <a:avLst/>
+          </a:prstGeom>
+          <a:noFill/>
+        </p:spPr>
+        <p:txBody>
+          <a:bodyPr wrap="square" anchor="t"/>
+          <a:lstStyle/>
+          <a:p>
+            <a:pPr algn="l"/>
+            <a:r>
+              <a:rPr sz="2200" b="1" i="0">
+                <a:solidFill>
+                  <a:srgbClr val="FFFFFF"/>
+                </a:solidFill>
+                <a:latin typeface="Arial"/>
+              </a:rPr>
+              <a:t>$925K EBITDA</a:t>
+            </a:r>
+          </a:p>
+        </p:txBody>
+      </p:sp>
+      <p:sp>
+        <p:nvSpPr>
+          <p:cNvPr id="97" name="TextBox 96"/>
+          <p:cNvSpPr txBox="1"/>
+          <p:nvPr/>
+        </p:nvSpPr>
+        <p:spPr>
+          <a:xfrm>
+            <a:off x="338328" y="5266944"/>
+            <a:ext cx="5602071" cy="438912"/>
+          </a:xfrm>
+          <a:prstGeom prst="rect">
+            <a:avLst/>
+          </a:prstGeom>
+          <a:noFill/>
+        </p:spPr>
+        <p:txBody>
+          <a:bodyPr wrap="square" anchor="t"/>
+          <a:lstStyle/>
+          <a:p>
+            <a:pPr algn="l"/>
+            <a:r>
+              <a:rPr sz="900" b="0" i="1">
+                <a:solidFill>
+                  <a:srgbClr val="A8BAC5"/>
+                </a:solidFill>
+                <a:latin typeface="Arial"/>
+              </a:rPr>
+              <a:t>~$4.6M valuation at 5x  ·  above the $4M cap  ·  clean investor exit</a:t>
+            </a:r>
+          </a:p>
+        </p:txBody>
+      </p:sp>
+      <p:sp>
+        <p:nvSpPr>
+          <p:cNvPr id="98" name="Rectangle 97"/>
+          <p:cNvSpPr/>
+          <p:nvPr/>
+        </p:nvSpPr>
+        <p:spPr>
+          <a:xfrm>
+            <a:off x="6159855" y="4572000"/>
+            <a:ext cx="5830671" cy="1207008"/>
+          </a:xfrm>
+          <a:prstGeom prst="rect">
+            <a:avLst/>
+          </a:prstGeom>
+          <a:solidFill>
+            <a:srgbClr val="B84C30"/>
+          </a:solidFill>
+          <a:ln>
+            <a:noFill/>
+          </a:ln>
+        </p:spPr>
+        <p:style>
+          <a:lnRef idx="1">
+            <a:schemeClr val="accent1"/>
+          </a:lnRef>
+          <a:fillRef idx="3">
+            <a:schemeClr val="accent1"/>
+          </a:fillRef>
+          <a:effectRef idx="2">
+            <a:schemeClr val="accent1"/>
+          </a:effectRef>
+          <a:fontRef idx="minor">
+            <a:schemeClr val="lt1"/>
+          </a:fontRef>
+        </p:style>
+        <p:txBody>
+          <a:bodyPr rtlCol="0" anchor="ctr"/>
+          <a:lstStyle/>
+          <a:p>
+            <a:pPr algn="ctr"/>
+          </a:p>
+        </p:txBody>
+      </p:sp>
+      <p:sp>
+        <p:nvSpPr>
+          <p:cNvPr id="99" name="TextBox 98"/>
+          <p:cNvSpPr txBox="1"/>
+          <p:nvPr/>
+        </p:nvSpPr>
+        <p:spPr>
+          <a:xfrm>
+            <a:off x="6297015" y="4645152"/>
+            <a:ext cx="5602071" cy="201168"/>
+          </a:xfrm>
+          <a:prstGeom prst="rect">
+            <a:avLst/>
+          </a:prstGeom>
+          <a:noFill/>
+        </p:spPr>
+        <p:txBody>
+          <a:bodyPr wrap="square" anchor="t"/>
+          <a:lstStyle/>
+          <a:p>
+            <a:pPr algn="l"/>
+            <a:r>
+              <a:rPr sz="900" b="0" i="0">
+                <a:solidFill>
+                  <a:srgbClr val="F5C5B8"/>
+                </a:solidFill>
+                <a:latin typeface="Arial"/>
+              </a:rPr>
+              <a:t>Organic + Acquisition — Year 4</a:t>
+            </a:r>
+          </a:p>
+        </p:txBody>
+      </p:sp>
+      <p:sp>
+        <p:nvSpPr>
+          <p:cNvPr id="100" name="TextBox 99"/>
+          <p:cNvSpPr txBox="1"/>
+          <p:nvPr/>
+        </p:nvSpPr>
+        <p:spPr>
+          <a:xfrm>
+            <a:off x="6297015" y="4846320"/>
+            <a:ext cx="5602071" cy="402336"/>
+          </a:xfrm>
+          <a:prstGeom prst="rect">
+            <a:avLst/>
+          </a:prstGeom>
+          <a:noFill/>
+        </p:spPr>
+        <p:txBody>
+          <a:bodyPr wrap="square" anchor="t"/>
+          <a:lstStyle/>
+          <a:p>
+            <a:pPr algn="l"/>
+            <a:r>
+              <a:rPr sz="2200" b="1" i="0">
+                <a:solidFill>
+                  <a:srgbClr val="FFFFFF"/>
+                </a:solidFill>
+                <a:latin typeface="Arial"/>
+              </a:rPr>
+              <a:t>$1.13M EBITDA</a:t>
+            </a:r>
+          </a:p>
+        </p:txBody>
+      </p:sp>
+      <p:sp>
+        <p:nvSpPr>
+          <p:cNvPr id="101" name="TextBox 100"/>
+          <p:cNvSpPr txBox="1"/>
+          <p:nvPr/>
+        </p:nvSpPr>
+        <p:spPr>
+          <a:xfrm>
+            <a:off x="6297015" y="5266944"/>
+            <a:ext cx="5602071" cy="438912"/>
+          </a:xfrm>
+          <a:prstGeom prst="rect">
+            <a:avLst/>
+          </a:prstGeom>
+          <a:noFill/>
+        </p:spPr>
+        <p:txBody>
+          <a:bodyPr wrap="square" anchor="t"/>
+          <a:lstStyle/>
+          <a:p>
+            <a:pPr algn="l"/>
+            <a:r>
+              <a:rPr sz="900" b="0" i="1">
+                <a:solidFill>
+                  <a:srgbClr val="F5C5B8"/>
+                </a:solidFill>
+                <a:latin typeface="Arial"/>
+              </a:rPr>
+              <a:t>~$5.6M valuation at 5x  ·  well above cap  ·  one year earlier</a:t>
+            </a:r>
+          </a:p>
+        </p:txBody>
+      </p:sp>
+      <p:sp>
+        <p:nvSpPr>
+          <p:cNvPr id="102" name="Rectangle 101"/>
+          <p:cNvSpPr/>
+          <p:nvPr/>
+        </p:nvSpPr>
+        <p:spPr>
+          <a:xfrm>
+            <a:off x="0" y="6528816"/>
+            <a:ext cx="12191695" cy="329184"/>
+          </a:xfrm>
+          <a:prstGeom prst="rect">
+            <a:avLst/>
+          </a:prstGeom>
+          <a:solidFill>
+            <a:srgbClr val="3D4F5C"/>
+          </a:solidFill>
+          <a:ln>
+            <a:noFill/>
+          </a:ln>
+        </p:spPr>
+        <p:style>
+          <a:lnRef idx="1">
+            <a:schemeClr val="accent1"/>
+          </a:lnRef>
+          <a:fillRef idx="3">
+            <a:schemeClr val="accent1"/>
+          </a:fillRef>
+          <a:effectRef idx="2">
+            <a:schemeClr val="accent1"/>
+          </a:effectRef>
+          <a:fontRef idx="minor">
+            <a:schemeClr val="lt1"/>
+          </a:fontRef>
+        </p:style>
+        <p:txBody>
+          <a:bodyPr rtlCol="0" anchor="ctr"/>
+          <a:lstStyle/>
+          <a:p>
+            <a:pPr algn="ctr"/>
+          </a:p>
+        </p:txBody>
+      </p:sp>
+      <p:sp>
+        <p:nvSpPr>
+          <p:cNvPr id="103" name="TextBox 102"/>
+          <p:cNvSpPr txBox="1"/>
+          <p:nvPr/>
+        </p:nvSpPr>
+        <p:spPr>
+          <a:xfrm>
             <a:off x="182880" y="6592824"/>
-            <a:ext cx="11825935" cy="219456"/>
-          </a:xfrm>
-          <a:prstGeom prst="rect">
-            <a:avLst/>
-          </a:prstGeom>
-          <a:noFill/>
-        </p:spPr>
-        <p:txBody>
-          <a:bodyPr wrap="square" anchor="t"/>
-          <a:lstStyle/>
-          <a:p>
-            <a:pPr algn="ctr"/>
-            <a:r>
-              <a:rPr sz="750" b="0" i="0">
+            <a:ext cx="11825935" cy="246888"/>
+          </a:xfrm>
+          <a:prstGeom prst="rect">
+            <a:avLst/>
+          </a:prstGeom>
+          <a:noFill/>
+        </p:spPr>
+        <p:txBody>
+          <a:bodyPr wrap="square" anchor="t"/>
+          <a:lstStyle/>
+          <a:p>
+            <a:pPr algn="ctr"/>
+            <a:r>
+              <a:rPr sz="650" b="0" i="0">
                 <a:solidFill>
                   <a:srgbClr val="A8BAC5"/>
                 </a:solidFill>
                 <a:latin typeface="Arial"/>
               </a:rPr>
-              <a:t>partnerships@maddogcleaning.com  ·  Confidential — not an offer to sell securities  ·  March 2026</a:t>
+              <a:t>Acquisition structured at NewCo level — OpCo balance sheet stays clean for SBA recap  ·  SDRs 1 &amp; 2 raise funded, SDR 3 ops funded  ·  GovCon: $30K yr 1 growing 15% annually with 95% retention  ·  partnerships@maddogcleaning.com</a:t>
             </a:r>
           </a:p>
         </p:txBody>
